--- a/docs/tutoriais/Tutorial-TI.pptx
+++ b/docs/tutoriais/Tutorial-TI.pptx
@@ -16,9 +16,10 @@
     <p:sldId id="264" r:id="rId10"/>
     <p:sldId id="265" r:id="rId11"/>
     <p:sldId id="266" r:id="rId12"/>
+    <p:sldId id="267" r:id="rId13"/>
   </p:sldIdLst>
   <p:notesMasterIdLst>
-    <p:notesMasterId r:id="rId13"/>
+    <p:notesMasterId r:id="rId14"/>
   </p:notesMasterIdLst>
   <p:sldSz cx="12192000" cy="6858000"/>
   <p:notesSz cx="6858000" cy="12192000"/>
@@ -712,6 +713,94 @@
             <a:fld id="{F7021451-1387-4CA6-816F-3879F97B5CBC}" type="slidenum">
               <a:rPr lang="en-US"/>
               <a:t>11</a:t>
+            </a:fld>
+            <a:endParaRPr lang="en-US"/>
+          </a:p>
+        </p:txBody>
+      </p:sp>
+    </p:spTree>
+    <p:extLst>
+      <p:ext uri="{BB962C8B-B14F-4D97-AF65-F5344CB8AC3E}">
+        <p14:creationId xmlns:p14="http://schemas.microsoft.com/office/powerpoint/2010/main" val="1024086991"/>
+      </p:ext>
+    </p:extLst>
+  </p:cSld>
+  <p:clrMapOvr>
+    <a:masterClrMapping/>
+  </p:clrMapOvr>
+</p:notes>
+</file>
+
+<file path=ppt/notesSlides/notesSlide12.xml><?xml version="1.0" encoding="utf-8"?>
+<p:notes xmlns:a="http://schemas.openxmlformats.org/drawingml/2006/main" xmlns:r="http://schemas.openxmlformats.org/officeDocument/2006/relationships" xmlns:p="http://schemas.openxmlformats.org/presentationml/2006/main">
+  <p:cSld>
+    <p:spTree>
+      <p:nvGrpSpPr>
+        <p:cNvPr id="1" name=""/>
+        <p:cNvGrpSpPr/>
+        <p:nvPr/>
+      </p:nvGrpSpPr>
+      <p:grpSpPr>
+        <a:xfrm>
+          <a:off x="0" y="0"/>
+          <a:ext cx="0" cy="0"/>
+          <a:chOff x="0" y="0"/>
+          <a:chExt cx="0" cy="0"/>
+        </a:xfrm>
+      </p:grpSpPr>
+      <p:sp>
+        <p:nvSpPr>
+          <p:cNvPr id="2" name="Slide Image Placeholder 1"/>
+          <p:cNvSpPr>
+            <a:spLocks noGrp="1" noRot="1" noChangeAspect="1"/>
+          </p:cNvSpPr>
+          <p:nvPr>
+            <p:ph type="sldImg"/>
+          </p:nvPr>
+        </p:nvSpPr>
+        <p:spPr/>
+      </p:sp>
+      <p:sp>
+        <p:nvSpPr>
+          <p:cNvPr id="3" name="Notes Placeholder 2"/>
+          <p:cNvSpPr>
+            <a:spLocks noGrp="1"/>
+          </p:cNvSpPr>
+          <p:nvPr>
+            <p:ph type="body" idx="1"/>
+          </p:nvPr>
+        </p:nvSpPr>
+        <p:spPr/>
+        <p:txBody>
+          <a:bodyPr/>
+          <a:lstStyle/>
+          <a:p>
+            <a:r>
+              <a:rPr lang="en-US" dirty="0"/>
+              <a:t/>
+            </a:r>
+            <a:endParaRPr lang="en-US" dirty="0"/>
+          </a:p>
+        </p:txBody>
+      </p:sp>
+      <p:sp>
+        <p:nvSpPr>
+          <p:cNvPr id="4" name="Slide Number Placeholder 3"/>
+          <p:cNvSpPr>
+            <a:spLocks noGrp="1"/>
+          </p:cNvSpPr>
+          <p:nvPr>
+            <p:ph type="sldNum" sz="quarter" idx="10"/>
+          </p:nvPr>
+        </p:nvSpPr>
+        <p:spPr/>
+        <p:txBody>
+          <a:bodyPr/>
+          <a:lstStyle/>
+          <a:p>
+            <a:fld id="{F7021451-1387-4CA6-816F-3879F97B5CBC}" type="slidenum">
+              <a:rPr lang="en-US"/>
+              <a:t>12</a:t>
             </a:fld>
             <a:endParaRPr lang="en-US"/>
           </a:p>
@@ -1940,7 +2029,7 @@
                 <a:ea typeface="Calibri" pitchFamily="34" charset="-122"/>
                 <a:cs typeface="Calibri" pitchFamily="34" charset="-120"/>
               </a:rPr>
-              <a:t>Revisão técnica e pedagógica, apontamentos, encaminhamento à MB Estúdios</a:t>
+              <a:t>Aprovação do projeto com a carga horária, revisão técnica e pedagógica,</a:t>
             </a:r>
             <a:endParaRPr lang="en-US" sz="1700" dirty="0"/>
           </a:p>
@@ -1960,7 +2049,7 @@
                 <a:ea typeface="Calibri" pitchFamily="34" charset="-122"/>
                 <a:cs typeface="Calibri" pitchFamily="34" charset="-120"/>
               </a:rPr>
-              <a:t>e agendamento da publicação — passo a passo.</a:t>
+              <a:t>apontamentos e agendamento da publicação.</a:t>
             </a:r>
             <a:endParaRPr lang="en-US" sz="1700" dirty="0"/>
           </a:p>
@@ -1975,7 +2064,7 @@
         <p:spPr>
           <a:xfrm>
             <a:off x="822960" y="5349240"/>
-            <a:ext cx="4114800" cy="457200"/>
+            <a:ext cx="4480560" cy="457200"/>
           </a:xfrm>
           <a:prstGeom prst="roundRect">
             <a:avLst>
@@ -2002,7 +2091,7 @@
         <p:spPr>
           <a:xfrm>
             <a:off x="822960" y="5349240"/>
-            <a:ext cx="4114800" cy="457200"/>
+            <a:ext cx="4480560" cy="457200"/>
           </a:xfrm>
           <a:prstGeom prst="rect">
             <a:avLst/>
@@ -2150,7 +2239,7 @@
                 <a:ea typeface="Calibri" pitchFamily="34" charset="-122"/>
                 <a:cs typeface="Calibri" pitchFamily="34" charset="-120"/>
               </a:rPr>
-              <a:t>APOIO</a:t>
+              <a:t>RETA FINAL</a:t>
             </a:r>
             <a:endParaRPr lang="en-US" sz="1200" dirty="0"/>
           </a:p>
@@ -2189,7 +2278,7 @@
                 <a:ea typeface="Calibri" pitchFamily="34" charset="-122"/>
                 <a:cs typeface="Calibri" pitchFamily="34" charset="-120"/>
               </a:rPr>
-              <a:t>8. Relatórios e e-mails automáticos</a:t>
+              <a:t>7. Agendar a publicação</a:t>
             </a:r>
             <a:endParaRPr lang="en-US" sz="3000" dirty="0"/>
           </a:p>
@@ -2203,12 +2292,516 @@
         </p:nvSpPr>
         <p:spPr>
           <a:xfrm>
-            <a:off x="640080" y="1645920"/>
-            <a:ext cx="5394960" cy="2103120"/>
+            <a:off x="640080" y="1783080"/>
+            <a:ext cx="310896" cy="310896"/>
+          </a:xfrm>
+          <a:prstGeom prst="ellipse">
+            <a:avLst/>
+          </a:prstGeom>
+          <a:solidFill>
+            <a:srgbClr val="22D3EE"/>
+          </a:solidFill>
+          <a:ln/>
+        </p:spPr>
+      </p:sp>
+      <p:sp>
+        <p:nvSpPr>
+          <p:cNvPr id="5" name="Text 3"/>
+          <p:cNvSpPr/>
+          <p:nvPr/>
+        </p:nvSpPr>
+        <p:spPr>
+          <a:xfrm>
+            <a:off x="640080" y="1783080"/>
+            <a:ext cx="310896" cy="310896"/>
+          </a:xfrm>
+          <a:prstGeom prst="rect">
+            <a:avLst/>
+          </a:prstGeom>
+          <a:noFill/>
+          <a:ln/>
+        </p:spPr>
+        <p:txBody>
+          <a:bodyPr wrap="square" lIns="0" tIns="0" rIns="0" bIns="0" rtlCol="0" anchor="ctr"/>
+          <a:lstStyle/>
+          <a:p>
+            <a:pPr algn="ctr" indent="0" marL="0">
+              <a:buNone/>
+            </a:pPr>
+            <a:r>
+              <a:rPr lang="en-US" sz="1300" b="1" dirty="0">
+                <a:solidFill>
+                  <a:srgbClr val="07101F"/>
+                </a:solidFill>
+                <a:latin typeface="Calibri" pitchFamily="34" charset="0"/>
+                <a:ea typeface="Calibri" pitchFamily="34" charset="-122"/>
+                <a:cs typeface="Calibri" pitchFamily="34" charset="-120"/>
+              </a:rPr>
+              <a:t>1</a:t>
+            </a:r>
+            <a:endParaRPr lang="en-US" sz="1300" dirty="0"/>
+          </a:p>
+        </p:txBody>
+      </p:sp>
+      <p:sp>
+        <p:nvSpPr>
+          <p:cNvPr id="6" name="Text 4"/>
+          <p:cNvSpPr/>
+          <p:nvPr/>
+        </p:nvSpPr>
+        <p:spPr>
+          <a:xfrm>
+            <a:off x="1097280" y="1737360"/>
+            <a:ext cx="5394960" cy="914400"/>
+          </a:xfrm>
+          <a:prstGeom prst="rect">
+            <a:avLst/>
+          </a:prstGeom>
+          <a:noFill/>
+          <a:ln/>
+        </p:spPr>
+        <p:txBody>
+          <a:bodyPr wrap="square" lIns="0" tIns="0" rIns="0" bIns="0" rtlCol="0" anchor="t"/>
+          <a:lstStyle/>
+          <a:p>
+            <a:pPr indent="0" marL="0">
+              <a:buNone/>
+            </a:pPr>
+            <a:r>
+              <a:rPr lang="en-US" sz="1400" dirty="0">
+                <a:solidFill>
+                  <a:srgbClr val="E8EEF7"/>
+                </a:solidFill>
+                <a:latin typeface="Calibri" pitchFamily="34" charset="0"/>
+                <a:ea typeface="Calibri" pitchFamily="34" charset="-122"/>
+                <a:cs typeface="Calibri" pitchFamily="34" charset="-120"/>
+              </a:rPr>
+              <a:t>O formador confere o curso montado e marca </a:t>
+            </a:r>
+            <a:pPr indent="0" marL="0">
+              <a:buNone/>
+            </a:pPr>
+            <a:r>
+              <a:rPr lang="en-US" sz="1400" b="1" dirty="0">
+                <a:solidFill>
+                  <a:srgbClr val="E8EEF7"/>
+                </a:solidFill>
+                <a:latin typeface="Calibri" pitchFamily="34" charset="0"/>
+                <a:ea typeface="Calibri" pitchFamily="34" charset="-122"/>
+                <a:cs typeface="Calibri" pitchFamily="34" charset="-120"/>
+              </a:rPr>
+              <a:t>Validado</a:t>
+            </a:r>
+            <a:pPr indent="0" marL="0">
+              <a:buNone/>
+            </a:pPr>
+            <a:r>
+              <a:rPr lang="en-US" sz="1400" dirty="0">
+                <a:solidFill>
+                  <a:srgbClr val="E8EEF7"/>
+                </a:solidFill>
+                <a:latin typeface="Calibri" pitchFamily="34" charset="0"/>
+                <a:ea typeface="Calibri" pitchFamily="34" charset="-122"/>
+                <a:cs typeface="Calibri" pitchFamily="34" charset="-120"/>
+              </a:rPr>
+              <a:t>;</a:t>
+            </a:r>
+            <a:endParaRPr lang="en-US" sz="1400" dirty="0"/>
+          </a:p>
+        </p:txBody>
+      </p:sp>
+      <p:sp>
+        <p:nvSpPr>
+          <p:cNvPr id="7" name="Shape 5"/>
+          <p:cNvSpPr/>
+          <p:nvPr/>
+        </p:nvSpPr>
+        <p:spPr>
+          <a:xfrm>
+            <a:off x="640080" y="2697480"/>
+            <a:ext cx="310896" cy="310896"/>
+          </a:xfrm>
+          <a:prstGeom prst="ellipse">
+            <a:avLst/>
+          </a:prstGeom>
+          <a:solidFill>
+            <a:srgbClr val="22D3EE"/>
+          </a:solidFill>
+          <a:ln/>
+        </p:spPr>
+      </p:sp>
+      <p:sp>
+        <p:nvSpPr>
+          <p:cNvPr id="8" name="Text 6"/>
+          <p:cNvSpPr/>
+          <p:nvPr/>
+        </p:nvSpPr>
+        <p:spPr>
+          <a:xfrm>
+            <a:off x="640080" y="2697480"/>
+            <a:ext cx="310896" cy="310896"/>
+          </a:xfrm>
+          <a:prstGeom prst="rect">
+            <a:avLst/>
+          </a:prstGeom>
+          <a:noFill/>
+          <a:ln/>
+        </p:spPr>
+        <p:txBody>
+          <a:bodyPr wrap="square" lIns="0" tIns="0" rIns="0" bIns="0" rtlCol="0" anchor="ctr"/>
+          <a:lstStyle/>
+          <a:p>
+            <a:pPr algn="ctr" indent="0" marL="0">
+              <a:buNone/>
+            </a:pPr>
+            <a:r>
+              <a:rPr lang="en-US" sz="1300" b="1" dirty="0">
+                <a:solidFill>
+                  <a:srgbClr val="07101F"/>
+                </a:solidFill>
+                <a:latin typeface="Calibri" pitchFamily="34" charset="0"/>
+                <a:ea typeface="Calibri" pitchFamily="34" charset="-122"/>
+                <a:cs typeface="Calibri" pitchFamily="34" charset="-120"/>
+              </a:rPr>
+              <a:t>2</a:t>
+            </a:r>
+            <a:endParaRPr lang="en-US" sz="1300" dirty="0"/>
+          </a:p>
+        </p:txBody>
+      </p:sp>
+      <p:sp>
+        <p:nvSpPr>
+          <p:cNvPr id="9" name="Text 7"/>
+          <p:cNvSpPr/>
+          <p:nvPr/>
+        </p:nvSpPr>
+        <p:spPr>
+          <a:xfrm>
+            <a:off x="1097280" y="2651760"/>
+            <a:ext cx="5394960" cy="914400"/>
+          </a:xfrm>
+          <a:prstGeom prst="rect">
+            <a:avLst/>
+          </a:prstGeom>
+          <a:noFill/>
+          <a:ln/>
+        </p:spPr>
+        <p:txBody>
+          <a:bodyPr wrap="square" lIns="0" tIns="0" rIns="0" bIns="0" rtlCol="0" anchor="t"/>
+          <a:lstStyle/>
+          <a:p>
+            <a:pPr indent="0" marL="0">
+              <a:buNone/>
+            </a:pPr>
+            <a:r>
+              <a:rPr lang="en-US" sz="1400" dirty="0">
+                <a:solidFill>
+                  <a:srgbClr val="E8EEF7"/>
+                </a:solidFill>
+                <a:latin typeface="Calibri" pitchFamily="34" charset="0"/>
+                <a:ea typeface="Calibri" pitchFamily="34" charset="-122"/>
+                <a:cs typeface="Calibri" pitchFamily="34" charset="-120"/>
+              </a:rPr>
+              <a:t>Abra o curso e escolha </a:t>
+            </a:r>
+            <a:pPr indent="0" marL="0">
+              <a:buNone/>
+            </a:pPr>
+            <a:r>
+              <a:rPr lang="en-US" sz="1400" b="1" dirty="0">
+                <a:solidFill>
+                  <a:srgbClr val="22D3EE"/>
+                </a:solidFill>
+                <a:latin typeface="Calibri" pitchFamily="34" charset="0"/>
+                <a:ea typeface="Calibri" pitchFamily="34" charset="-122"/>
+                <a:cs typeface="Calibri" pitchFamily="34" charset="-120"/>
+              </a:rPr>
+              <a:t>Pronto para Publicação</a:t>
+            </a:r>
+            <a:pPr indent="0" marL="0">
+              <a:buNone/>
+            </a:pPr>
+            <a:r>
+              <a:rPr lang="en-US" sz="1400" dirty="0">
+                <a:solidFill>
+                  <a:srgbClr val="E8EEF7"/>
+                </a:solidFill>
+                <a:latin typeface="Calibri" pitchFamily="34" charset="0"/>
+                <a:ea typeface="Calibri" pitchFamily="34" charset="-122"/>
+                <a:cs typeface="Calibri" pitchFamily="34" charset="-120"/>
+              </a:rPr>
+              <a:t>;</a:t>
+            </a:r>
+            <a:endParaRPr lang="en-US" sz="1400" dirty="0"/>
+          </a:p>
+        </p:txBody>
+      </p:sp>
+      <p:sp>
+        <p:nvSpPr>
+          <p:cNvPr id="10" name="Shape 8"/>
+          <p:cNvSpPr/>
+          <p:nvPr/>
+        </p:nvSpPr>
+        <p:spPr>
+          <a:xfrm>
+            <a:off x="640080" y="3611880"/>
+            <a:ext cx="310896" cy="310896"/>
+          </a:xfrm>
+          <a:prstGeom prst="ellipse">
+            <a:avLst/>
+          </a:prstGeom>
+          <a:solidFill>
+            <a:srgbClr val="22D3EE"/>
+          </a:solidFill>
+          <a:ln/>
+        </p:spPr>
+      </p:sp>
+      <p:sp>
+        <p:nvSpPr>
+          <p:cNvPr id="11" name="Text 9"/>
+          <p:cNvSpPr/>
+          <p:nvPr/>
+        </p:nvSpPr>
+        <p:spPr>
+          <a:xfrm>
+            <a:off x="640080" y="3611880"/>
+            <a:ext cx="310896" cy="310896"/>
+          </a:xfrm>
+          <a:prstGeom prst="rect">
+            <a:avLst/>
+          </a:prstGeom>
+          <a:noFill/>
+          <a:ln/>
+        </p:spPr>
+        <p:txBody>
+          <a:bodyPr wrap="square" lIns="0" tIns="0" rIns="0" bIns="0" rtlCol="0" anchor="ctr"/>
+          <a:lstStyle/>
+          <a:p>
+            <a:pPr algn="ctr" indent="0" marL="0">
+              <a:buNone/>
+            </a:pPr>
+            <a:r>
+              <a:rPr lang="en-US" sz="1300" b="1" dirty="0">
+                <a:solidFill>
+                  <a:srgbClr val="07101F"/>
+                </a:solidFill>
+                <a:latin typeface="Calibri" pitchFamily="34" charset="0"/>
+                <a:ea typeface="Calibri" pitchFamily="34" charset="-122"/>
+                <a:cs typeface="Calibri" pitchFamily="34" charset="-120"/>
+              </a:rPr>
+              <a:t>3</a:t>
+            </a:r>
+            <a:endParaRPr lang="en-US" sz="1300" dirty="0"/>
+          </a:p>
+        </p:txBody>
+      </p:sp>
+      <p:sp>
+        <p:nvSpPr>
+          <p:cNvPr id="12" name="Text 10"/>
+          <p:cNvSpPr/>
+          <p:nvPr/>
+        </p:nvSpPr>
+        <p:spPr>
+          <a:xfrm>
+            <a:off x="1097280" y="3566160"/>
+            <a:ext cx="5394960" cy="914400"/>
+          </a:xfrm>
+          <a:prstGeom prst="rect">
+            <a:avLst/>
+          </a:prstGeom>
+          <a:noFill/>
+          <a:ln/>
+        </p:spPr>
+        <p:txBody>
+          <a:bodyPr wrap="square" lIns="0" tIns="0" rIns="0" bIns="0" rtlCol="0" anchor="t"/>
+          <a:lstStyle/>
+          <a:p>
+            <a:pPr indent="0" marL="0">
+              <a:buNone/>
+            </a:pPr>
+            <a:r>
+              <a:rPr lang="en-US" sz="1400" dirty="0">
+                <a:solidFill>
+                  <a:srgbClr val="E8EEF7"/>
+                </a:solidFill>
+                <a:latin typeface="Calibri" pitchFamily="34" charset="0"/>
+                <a:ea typeface="Calibri" pitchFamily="34" charset="-122"/>
+                <a:cs typeface="Calibri" pitchFamily="34" charset="-120"/>
+              </a:rPr>
+              <a:t>Informe a </a:t>
+            </a:r>
+            <a:pPr indent="0" marL="0">
+              <a:buNone/>
+            </a:pPr>
+            <a:r>
+              <a:rPr lang="en-US" sz="1400" b="1" dirty="0">
+                <a:solidFill>
+                  <a:srgbClr val="E8EEF7"/>
+                </a:solidFill>
+                <a:latin typeface="Calibri" pitchFamily="34" charset="0"/>
+                <a:ea typeface="Calibri" pitchFamily="34" charset="-122"/>
+                <a:cs typeface="Calibri" pitchFamily="34" charset="-120"/>
+              </a:rPr>
+              <a:t>data de entrada na plataforma</a:t>
+            </a:r>
+            <a:pPr indent="0" marL="0">
+              <a:buNone/>
+            </a:pPr>
+            <a:r>
+              <a:rPr lang="en-US" sz="1400" dirty="0">
+                <a:solidFill>
+                  <a:srgbClr val="E8EEF7"/>
+                </a:solidFill>
+                <a:latin typeface="Calibri" pitchFamily="34" charset="0"/>
+                <a:ea typeface="Calibri" pitchFamily="34" charset="-122"/>
+                <a:cs typeface="Calibri" pitchFamily="34" charset="-120"/>
+              </a:rPr>
+              <a:t> (obrigatória);</a:t>
+            </a:r>
+            <a:endParaRPr lang="en-US" sz="1400" dirty="0"/>
+          </a:p>
+        </p:txBody>
+      </p:sp>
+      <p:sp>
+        <p:nvSpPr>
+          <p:cNvPr id="13" name="Shape 11"/>
+          <p:cNvSpPr/>
+          <p:nvPr/>
+        </p:nvSpPr>
+        <p:spPr>
+          <a:xfrm>
+            <a:off x="640080" y="4526280"/>
+            <a:ext cx="310896" cy="310896"/>
+          </a:xfrm>
+          <a:prstGeom prst="ellipse">
+            <a:avLst/>
+          </a:prstGeom>
+          <a:solidFill>
+            <a:srgbClr val="22D3EE"/>
+          </a:solidFill>
+          <a:ln/>
+        </p:spPr>
+      </p:sp>
+      <p:sp>
+        <p:nvSpPr>
+          <p:cNvPr id="14" name="Text 12"/>
+          <p:cNvSpPr/>
+          <p:nvPr/>
+        </p:nvSpPr>
+        <p:spPr>
+          <a:xfrm>
+            <a:off x="640080" y="4526280"/>
+            <a:ext cx="310896" cy="310896"/>
+          </a:xfrm>
+          <a:prstGeom prst="rect">
+            <a:avLst/>
+          </a:prstGeom>
+          <a:noFill/>
+          <a:ln/>
+        </p:spPr>
+        <p:txBody>
+          <a:bodyPr wrap="square" lIns="0" tIns="0" rIns="0" bIns="0" rtlCol="0" anchor="ctr"/>
+          <a:lstStyle/>
+          <a:p>
+            <a:pPr algn="ctr" indent="0" marL="0">
+              <a:buNone/>
+            </a:pPr>
+            <a:r>
+              <a:rPr lang="en-US" sz="1300" b="1" dirty="0">
+                <a:solidFill>
+                  <a:srgbClr val="07101F"/>
+                </a:solidFill>
+                <a:latin typeface="Calibri" pitchFamily="34" charset="0"/>
+                <a:ea typeface="Calibri" pitchFamily="34" charset="-122"/>
+                <a:cs typeface="Calibri" pitchFamily="34" charset="-120"/>
+              </a:rPr>
+              <a:t>4</a:t>
+            </a:r>
+            <a:endParaRPr lang="en-US" sz="1300" dirty="0"/>
+          </a:p>
+        </p:txBody>
+      </p:sp>
+      <p:sp>
+        <p:nvSpPr>
+          <p:cNvPr id="15" name="Text 13"/>
+          <p:cNvSpPr/>
+          <p:nvPr/>
+        </p:nvSpPr>
+        <p:spPr>
+          <a:xfrm>
+            <a:off x="1097280" y="4480560"/>
+            <a:ext cx="5394960" cy="914400"/>
+          </a:xfrm>
+          <a:prstGeom prst="rect">
+            <a:avLst/>
+          </a:prstGeom>
+          <a:noFill/>
+          <a:ln/>
+        </p:spPr>
+        <p:txBody>
+          <a:bodyPr wrap="square" lIns="0" tIns="0" rIns="0" bIns="0" rtlCol="0" anchor="t"/>
+          <a:lstStyle/>
+          <a:p>
+            <a:pPr indent="0" marL="0">
+              <a:buNone/>
+            </a:pPr>
+            <a:r>
+              <a:rPr lang="en-US" sz="1400" dirty="0">
+                <a:solidFill>
+                  <a:srgbClr val="E8EEF7"/>
+                </a:solidFill>
+                <a:latin typeface="Calibri" pitchFamily="34" charset="0"/>
+                <a:ea typeface="Calibri" pitchFamily="34" charset="-122"/>
+                <a:cs typeface="Calibri" pitchFamily="34" charset="-120"/>
+              </a:rPr>
+              <a:t>Clique em </a:t>
+            </a:r>
+            <a:pPr indent="0" marL="0">
+              <a:buNone/>
+            </a:pPr>
+            <a:r>
+              <a:rPr lang="en-US" sz="1400" b="1" dirty="0">
+                <a:solidFill>
+                  <a:srgbClr val="22D3EE"/>
+                </a:solidFill>
+                <a:latin typeface="Calibri" pitchFamily="34" charset="0"/>
+                <a:ea typeface="Calibri" pitchFamily="34" charset="-122"/>
+                <a:cs typeface="Calibri" pitchFamily="34" charset="-120"/>
+              </a:rPr>
+              <a:t>Atualizar Status</a:t>
+            </a:r>
+            <a:pPr indent="0" marL="0">
+              <a:buNone/>
+            </a:pPr>
+            <a:r>
+              <a:rPr lang="en-US" sz="1400" dirty="0">
+                <a:solidFill>
+                  <a:srgbClr val="E8EEF7"/>
+                </a:solidFill>
+                <a:latin typeface="Calibri" pitchFamily="34" charset="0"/>
+                <a:ea typeface="Calibri" pitchFamily="34" charset="-122"/>
+                <a:cs typeface="Calibri" pitchFamily="34" charset="-120"/>
+              </a:rPr>
+              <a:t>. Formador e MB recebem a data.</a:t>
+            </a:r>
+            <a:endParaRPr lang="en-US" sz="1400" dirty="0"/>
+          </a:p>
+        </p:txBody>
+      </p:sp>
+      <p:sp>
+        <p:nvSpPr>
+          <p:cNvPr id="16" name="Shape 14"/>
+          <p:cNvSpPr/>
+          <p:nvPr/>
+        </p:nvSpPr>
+        <p:spPr>
+          <a:xfrm>
+            <a:off x="640080" y="5212080"/>
+            <a:ext cx="5852160" cy="1005840"/>
           </a:xfrm>
           <a:prstGeom prst="roundRect">
             <a:avLst>
-              <a:gd name="adj" fmla="val 3913"/>
+              <a:gd name="adj" fmla="val 8182"/>
             </a:avLst>
           </a:prstGeom>
           <a:solidFill>
@@ -2224,14 +2817,14 @@
       </p:sp>
       <p:sp>
         <p:nvSpPr>
-          <p:cNvPr id="5" name="Text 3"/>
-          <p:cNvSpPr/>
-          <p:nvPr/>
-        </p:nvSpPr>
-        <p:spPr>
-          <a:xfrm>
-            <a:off x="841248" y="1792224"/>
-            <a:ext cx="4992624" cy="329184"/>
+          <p:cNvPr id="17" name="Text 15"/>
+          <p:cNvSpPr/>
+          <p:nvPr/>
+        </p:nvSpPr>
+        <p:spPr>
+          <a:xfrm>
+            <a:off x="841248" y="5358384"/>
+            <a:ext cx="5449824" cy="329184"/>
           </a:xfrm>
           <a:prstGeom prst="rect">
             <a:avLst/>
@@ -2255,7 +2848,7 @@
                 <a:ea typeface="Calibri" pitchFamily="34" charset="-122"/>
                 <a:cs typeface="Calibri" pitchFamily="34" charset="-120"/>
               </a:rPr>
-              <a:t>Menu Relatórios</a:t>
+              <a:t>Depois disso</a:t>
             </a:r>
             <a:endParaRPr lang="en-US" sz="1400" dirty="0"/>
           </a:p>
@@ -2263,14 +2856,14 @@
       </p:sp>
       <p:sp>
         <p:nvSpPr>
-          <p:cNvPr id="6" name="Text 4"/>
-          <p:cNvSpPr/>
-          <p:nvPr/>
-        </p:nvSpPr>
-        <p:spPr>
-          <a:xfrm>
-            <a:off x="841248" y="2121408"/>
-            <a:ext cx="4992624" cy="1499616"/>
+          <p:cNvPr id="18" name="Text 16"/>
+          <p:cNvSpPr/>
+          <p:nvPr/>
+        </p:nvSpPr>
+        <p:spPr>
+          <a:xfrm>
+            <a:off x="841248" y="5687568"/>
+            <a:ext cx="5449824" cy="402336"/>
           </a:xfrm>
           <a:prstGeom prst="rect">
             <a:avLst/>
@@ -2289,7 +2882,7 @@
               <a:buNone/>
             </a:pPr>
             <a:r>
-              <a:rPr lang="en-US" sz="1300" dirty="0">
+              <a:rPr lang="en-US" sz="1250" dirty="0">
                 <a:solidFill>
                   <a:srgbClr val="E8EEF7"/>
                 </a:solidFill>
@@ -2297,86 +2890,26 @@
                 <a:ea typeface="Calibri" pitchFamily="34" charset="-122"/>
                 <a:cs typeface="Calibri" pitchFamily="34" charset="-120"/>
               </a:rPr>
-              <a:t>• Cursos por status</a:t>
-            </a:r>
-            <a:endParaRPr lang="en-US" sz="1300" dirty="0"/>
-          </a:p>
-          <a:p>
-            <a:pPr indent="0" marL="0">
-              <a:lnSpc>
-                <a:spcPct val="112000"/>
-              </a:lnSpc>
-              <a:buNone/>
-            </a:pPr>
-            <a:r>
-              <a:rPr lang="en-US" sz="1300" dirty="0">
-                <a:solidFill>
-                  <a:srgbClr val="E8EEF7"/>
-                </a:solidFill>
-                <a:latin typeface="Calibri" pitchFamily="34" charset="0"/>
-                <a:ea typeface="Calibri" pitchFamily="34" charset="-122"/>
-                <a:cs typeface="Calibri" pitchFamily="34" charset="-120"/>
-              </a:rPr>
-              <a:t>• Produção por formador(a)</a:t>
-            </a:r>
-            <a:endParaRPr lang="en-US" sz="1300" dirty="0"/>
-          </a:p>
-          <a:p>
-            <a:pPr indent="0" marL="0">
-              <a:lnSpc>
-                <a:spcPct val="112000"/>
-              </a:lnSpc>
-              <a:buNone/>
-            </a:pPr>
-            <a:r>
-              <a:rPr lang="en-US" sz="1300" dirty="0">
-                <a:solidFill>
-                  <a:srgbClr val="E8EEF7"/>
-                </a:solidFill>
-                <a:latin typeface="Calibri" pitchFamily="34" charset="0"/>
-                <a:ea typeface="Calibri" pitchFamily="34" charset="-122"/>
-                <a:cs typeface="Calibri" pitchFamily="34" charset="-120"/>
-              </a:rPr>
-              <a:t>• Prazos estourados e próximos</a:t>
-            </a:r>
-            <a:endParaRPr lang="en-US" sz="1300" dirty="0"/>
-          </a:p>
-          <a:p>
-            <a:pPr indent="0" marL="0">
-              <a:lnSpc>
-                <a:spcPct val="112000"/>
-              </a:lnSpc>
-              <a:buNone/>
-            </a:pPr>
-            <a:r>
-              <a:rPr lang="en-US" sz="1300" dirty="0">
-                <a:solidFill>
-                  <a:srgbClr val="E8EEF7"/>
-                </a:solidFill>
-                <a:latin typeface="Calibri" pitchFamily="34" charset="0"/>
-                <a:ea typeface="Calibri" pitchFamily="34" charset="-122"/>
-                <a:cs typeface="Calibri" pitchFamily="34" charset="-120"/>
-              </a:rPr>
-              <a:t>• Exportação CSV (abre no Excel)</a:t>
-            </a:r>
-            <a:endParaRPr lang="en-US" sz="1300" dirty="0"/>
-          </a:p>
-        </p:txBody>
-      </p:sp>
-      <p:sp>
-        <p:nvSpPr>
-          <p:cNvPr id="7" name="Shape 5"/>
-          <p:cNvSpPr/>
-          <p:nvPr/>
-        </p:nvSpPr>
-        <p:spPr>
-          <a:xfrm>
-            <a:off x="6217920" y="1645920"/>
-            <a:ext cx="5394960" cy="2103120"/>
+              <a:t>A MB publica na data e marca "Publicado" — fim do fluxo.</a:t>
+            </a:r>
+            <a:endParaRPr lang="en-US" sz="1250" dirty="0"/>
+          </a:p>
+        </p:txBody>
+      </p:sp>
+      <p:sp>
+        <p:nvSpPr>
+          <p:cNvPr id="19" name="Shape 17"/>
+          <p:cNvSpPr/>
+          <p:nvPr/>
+        </p:nvSpPr>
+        <p:spPr>
+          <a:xfrm>
+            <a:off x="6766560" y="1828800"/>
+            <a:ext cx="4846320" cy="2109910"/>
           </a:xfrm>
           <a:prstGeom prst="roundRect">
             <a:avLst>
-              <a:gd name="adj" fmla="val 3913"/>
+              <a:gd name="adj" fmla="val 3900"/>
             </a:avLst>
           </a:prstGeom>
           <a:solidFill>
@@ -2390,258 +2923,33 @@
           </a:ln>
         </p:spPr>
       </p:sp>
-      <p:sp>
-        <p:nvSpPr>
-          <p:cNvPr id="8" name="Text 6"/>
-          <p:cNvSpPr/>
-          <p:nvPr/>
-        </p:nvSpPr>
-        <p:spPr>
-          <a:xfrm>
-            <a:off x="6419088" y="1792224"/>
-            <a:ext cx="4992624" cy="329184"/>
-          </a:xfrm>
-          <a:prstGeom prst="rect">
-            <a:avLst/>
-          </a:prstGeom>
-          <a:noFill/>
-          <a:ln/>
-        </p:spPr>
-        <p:txBody>
-          <a:bodyPr wrap="square" lIns="0" tIns="0" rIns="0" bIns="0" rtlCol="0" anchor="ctr"/>
-          <a:lstStyle/>
-          <a:p>
-            <a:pPr indent="0" marL="0">
-              <a:buNone/>
-            </a:pPr>
-            <a:r>
-              <a:rPr lang="en-US" sz="1400" b="1" dirty="0">
-                <a:solidFill>
-                  <a:srgbClr val="22D3EE"/>
-                </a:solidFill>
-                <a:latin typeface="Calibri" pitchFamily="34" charset="0"/>
-                <a:ea typeface="Calibri" pitchFamily="34" charset="-122"/>
-                <a:cs typeface="Calibri" pitchFamily="34" charset="-120"/>
-              </a:rPr>
-              <a:t>A TI recebe e-mail quando…</a:t>
-            </a:r>
-            <a:endParaRPr lang="en-US" sz="1400" dirty="0"/>
-          </a:p>
-        </p:txBody>
-      </p:sp>
-      <p:sp>
-        <p:nvSpPr>
-          <p:cNvPr id="9" name="Text 7"/>
-          <p:cNvSpPr/>
-          <p:nvPr/>
-        </p:nvSpPr>
-        <p:spPr>
-          <a:xfrm>
-            <a:off x="6419088" y="2121408"/>
-            <a:ext cx="4992624" cy="1499616"/>
-          </a:xfrm>
-          <a:prstGeom prst="rect">
-            <a:avLst/>
-          </a:prstGeom>
-          <a:noFill/>
-          <a:ln/>
-        </p:spPr>
-        <p:txBody>
-          <a:bodyPr wrap="square" lIns="0" tIns="0" rIns="0" bIns="0" rtlCol="0" anchor="t"/>
-          <a:lstStyle/>
-          <a:p>
-            <a:pPr indent="0" marL="0">
-              <a:lnSpc>
-                <a:spcPct val="112000"/>
-              </a:lnSpc>
-              <a:buNone/>
-            </a:pPr>
-            <a:r>
-              <a:rPr lang="en-US" sz="1300" dirty="0">
-                <a:solidFill>
-                  <a:srgbClr val="E8EEF7"/>
-                </a:solidFill>
-                <a:latin typeface="Calibri" pitchFamily="34" charset="0"/>
-                <a:ea typeface="Calibri" pitchFamily="34" charset="-122"/>
-                <a:cs typeface="Calibri" pitchFamily="34" charset="-120"/>
-              </a:rPr>
-              <a:t>• Formador ou MB muda qualquer status</a:t>
-            </a:r>
-            <a:endParaRPr lang="en-US" sz="1300" dirty="0"/>
-          </a:p>
-          <a:p>
-            <a:pPr indent="0" marL="0">
-              <a:lnSpc>
-                <a:spcPct val="112000"/>
-              </a:lnSpc>
-              <a:buNone/>
-            </a:pPr>
-            <a:r>
-              <a:rPr lang="en-US" sz="1300" dirty="0">
-                <a:solidFill>
-                  <a:srgbClr val="E8EEF7"/>
-                </a:solidFill>
-                <a:latin typeface="Calibri" pitchFamily="34" charset="0"/>
-                <a:ea typeface="Calibri" pitchFamily="34" charset="-122"/>
-                <a:cs typeface="Calibri" pitchFamily="34" charset="-120"/>
-              </a:rPr>
-              <a:t>• Um curso chega "Pronto para Análise"</a:t>
-            </a:r>
-            <a:endParaRPr lang="en-US" sz="1300" dirty="0"/>
-          </a:p>
-          <a:p>
-            <a:pPr indent="0" marL="0">
-              <a:lnSpc>
-                <a:spcPct val="112000"/>
-              </a:lnSpc>
-              <a:buNone/>
-            </a:pPr>
-            <a:r>
-              <a:rPr lang="en-US" sz="1300" dirty="0">
-                <a:solidFill>
-                  <a:srgbClr val="E8EEF7"/>
-                </a:solidFill>
-                <a:latin typeface="Calibri" pitchFamily="34" charset="0"/>
-                <a:ea typeface="Calibri" pitchFamily="34" charset="-122"/>
-                <a:cs typeface="Calibri" pitchFamily="34" charset="-120"/>
-              </a:rPr>
-              <a:t>• Um curso é marcado "Inserido"</a:t>
-            </a:r>
-            <a:endParaRPr lang="en-US" sz="1300" dirty="0"/>
-          </a:p>
-          <a:p>
-            <a:pPr indent="0" marL="0">
-              <a:lnSpc>
-                <a:spcPct val="112000"/>
-              </a:lnSpc>
-              <a:buNone/>
-            </a:pPr>
-            <a:r>
-              <a:rPr lang="en-US" sz="1300" dirty="0">
-                <a:solidFill>
-                  <a:srgbClr val="E8EEF7"/>
-                </a:solidFill>
-                <a:latin typeface="Calibri" pitchFamily="34" charset="0"/>
-                <a:ea typeface="Calibri" pitchFamily="34" charset="-122"/>
-                <a:cs typeface="Calibri" pitchFamily="34" charset="-120"/>
-              </a:rPr>
-              <a:t>• Alertas de prazo (7h) e resumo às segundas</a:t>
-            </a:r>
-            <a:endParaRPr lang="en-US" sz="1300" dirty="0"/>
-          </a:p>
-        </p:txBody>
-      </p:sp>
-      <p:sp>
-        <p:nvSpPr>
-          <p:cNvPr id="10" name="Shape 8"/>
-          <p:cNvSpPr/>
-          <p:nvPr/>
-        </p:nvSpPr>
-        <p:spPr>
-          <a:xfrm>
-            <a:off x="640080" y="4023360"/>
-            <a:ext cx="10972800" cy="2011680"/>
-          </a:xfrm>
-          <a:prstGeom prst="roundRect">
-            <a:avLst>
-              <a:gd name="adj" fmla="val 4091"/>
-            </a:avLst>
-          </a:prstGeom>
-          <a:solidFill>
-            <a:srgbClr val="10233F"/>
-          </a:solidFill>
-          <a:ln w="12700">
-            <a:solidFill>
-              <a:srgbClr val="1D3A5F"/>
-            </a:solidFill>
-            <a:prstDash val="solid"/>
-          </a:ln>
-        </p:spPr>
-      </p:sp>
-      <p:sp>
-        <p:nvSpPr>
-          <p:cNvPr id="11" name="Text 9"/>
-          <p:cNvSpPr/>
-          <p:nvPr/>
-        </p:nvSpPr>
-        <p:spPr>
-          <a:xfrm>
-            <a:off x="841248" y="4169664"/>
-            <a:ext cx="10570464" cy="329184"/>
-          </a:xfrm>
-          <a:prstGeom prst="rect">
-            <a:avLst/>
-          </a:prstGeom>
-          <a:noFill/>
-          <a:ln/>
-        </p:spPr>
-        <p:txBody>
-          <a:bodyPr wrap="square" lIns="0" tIns="0" rIns="0" bIns="0" rtlCol="0" anchor="ctr"/>
-          <a:lstStyle/>
-          <a:p>
-            <a:pPr indent="0" marL="0">
-              <a:buNone/>
-            </a:pPr>
-            <a:r>
-              <a:rPr lang="en-US" sz="1400" b="1" dirty="0">
-                <a:solidFill>
-                  <a:srgbClr val="22D3EE"/>
-                </a:solidFill>
-                <a:latin typeface="Calibri" pitchFamily="34" charset="0"/>
-                <a:ea typeface="Calibri" pitchFamily="34" charset="-122"/>
-                <a:cs typeface="Calibri" pitchFamily="34" charset="-120"/>
-              </a:rPr>
-              <a:t>Arquivos do curso — sempre na ordem oficial</a:t>
-            </a:r>
-            <a:endParaRPr lang="en-US" sz="1400" dirty="0"/>
-          </a:p>
-        </p:txBody>
-      </p:sp>
-      <p:sp>
-        <p:nvSpPr>
-          <p:cNvPr id="12" name="Text 10"/>
-          <p:cNvSpPr/>
-          <p:nvPr/>
-        </p:nvSpPr>
-        <p:spPr>
-          <a:xfrm>
-            <a:off x="841248" y="4498848"/>
-            <a:ext cx="10570464" cy="1408176"/>
-          </a:xfrm>
-          <a:prstGeom prst="rect">
-            <a:avLst/>
-          </a:prstGeom>
-          <a:noFill/>
-          <a:ln/>
-        </p:spPr>
-        <p:txBody>
-          <a:bodyPr wrap="square" lIns="0" tIns="0" rIns="0" bIns="0" rtlCol="0" anchor="t"/>
-          <a:lstStyle/>
-          <a:p>
-            <a:pPr indent="0" marL="0">
-              <a:lnSpc>
-                <a:spcPct val="112000"/>
-              </a:lnSpc>
-              <a:buNone/>
-            </a:pPr>
-            <a:r>
-              <a:rPr lang="en-US" sz="1300" dirty="0">
-                <a:solidFill>
-                  <a:srgbClr val="E8EEF7"/>
-                </a:solidFill>
-                <a:latin typeface="Calibri" pitchFamily="34" charset="0"/>
-                <a:ea typeface="Calibri" pitchFamily="34" charset="-122"/>
-                <a:cs typeface="Calibri" pitchFamily="34" charset="-120"/>
-              </a:rPr>
-              <a:t>A lista de arquivos aparece na ordem de entrega (Geral → Módulo 1 → ... e, dentro do módulo, na sequência das categorias). O botão "Baixar todos (ZIP)" baixa o pacote completo com pastas numeradas — ideal para conferir a entrega inteira de uma vez. Categorias declaradas "sem material" pelo formador não aparecem (e não são erro).</a:t>
-            </a:r>
-            <a:endParaRPr lang="en-US" sz="1300" dirty="0"/>
-          </a:p>
-        </p:txBody>
-      </p:sp>
-      <p:sp>
-        <p:nvSpPr>
-          <p:cNvPr id="13" name="Text 11"/>
+      <p:pic>
+        <p:nvPicPr>
+          <p:cNvPr id="20" name="Image 0" descr="/home/user/AutoriaSCS-Scrum-cursos/docs/tutoriais/img/ti-data-publicacao.png">    </p:cNvPr>
+          <p:cNvPicPr>
+            <a:picLocks noChangeAspect="1"/>
+          </p:cNvPicPr>
+          <p:nvPr/>
+        </p:nvPicPr>
+        <p:blipFill>
+          <a:blip r:embed="rId1"/>
+          <a:stretch>
+            <a:fillRect/>
+          </a:stretch>
+        </p:blipFill>
+        <p:spPr>
+          <a:xfrm>
+            <a:off x="6876288" y="1938528"/>
+            <a:ext cx="4626864" cy="1890454"/>
+          </a:xfrm>
+          <a:prstGeom prst="rect">
+            <a:avLst/>
+          </a:prstGeom>
+        </p:spPr>
+      </p:pic>
+      <p:sp>
+        <p:nvSpPr>
+          <p:cNvPr id="21" name="Text 18"/>
           <p:cNvSpPr/>
           <p:nvPr/>
         </p:nvSpPr>
@@ -2680,7 +2988,7 @@
       </p:sp>
       <p:sp>
         <p:nvSpPr>
-          <p:cNvPr id="14" name="Text 12"/>
+          <p:cNvPr id="22" name="Text 19"/>
           <p:cNvSpPr/>
           <p:nvPr/>
         </p:nvSpPr>
@@ -2711,7 +3019,7 @@
                 <a:ea typeface="Calibri" pitchFamily="34" charset="-122"/>
                 <a:cs typeface="Calibri" pitchFamily="34" charset="-120"/>
               </a:rPr>
-              <a:t>10 / 11</a:t>
+              <a:t>10 / 12</a:t>
             </a:r>
             <a:endParaRPr lang="en-US" sz="950" dirty="0"/>
           </a:p>
@@ -2728,6 +3036,578 @@
 <file path=ppt/slides/slide11.xml><?xml version="1.0" encoding="utf-8"?>
 <p:sld xmlns:a="http://schemas.openxmlformats.org/drawingml/2006/main" xmlns:r="http://schemas.openxmlformats.org/officeDocument/2006/relationships" xmlns:p="http://schemas.openxmlformats.org/presentationml/2006/main">
   <p:cSld name="Slide 11">
+    <p:bg>
+      <p:bgPr>
+        <a:solidFill>
+          <a:srgbClr val="0A1626"/>
+        </a:solidFill>
+      </p:bgPr>
+    </p:bg>
+    <p:spTree>
+      <p:nvGrpSpPr>
+        <p:cNvPr id="1" name=""/>
+        <p:cNvGrpSpPr/>
+        <p:nvPr/>
+      </p:nvGrpSpPr>
+      <p:grpSpPr>
+        <a:xfrm>
+          <a:off x="0" y="0"/>
+          <a:ext cx="0" cy="0"/>
+          <a:chOff x="0" y="0"/>
+          <a:chExt cx="0" cy="0"/>
+        </a:xfrm>
+      </p:grpSpPr>
+      <p:sp>
+        <p:nvSpPr>
+          <p:cNvPr id="2" name="Text 0"/>
+          <p:cNvSpPr/>
+          <p:nvPr/>
+        </p:nvSpPr>
+        <p:spPr>
+          <a:xfrm>
+            <a:off x="548640" y="320040"/>
+            <a:ext cx="5486400" cy="292608"/>
+          </a:xfrm>
+          <a:prstGeom prst="rect">
+            <a:avLst/>
+          </a:prstGeom>
+          <a:noFill/>
+          <a:ln/>
+        </p:spPr>
+        <p:txBody>
+          <a:bodyPr wrap="square" lIns="0" tIns="0" rIns="0" bIns="0" rtlCol="0" anchor="ctr"/>
+          <a:lstStyle/>
+          <a:p>
+            <a:pPr indent="0" marL="0">
+              <a:buNone/>
+            </a:pPr>
+            <a:r>
+              <a:rPr lang="en-US" sz="1200" b="1" spc="300" kern="0" dirty="0">
+                <a:solidFill>
+                  <a:srgbClr val="22D3EE"/>
+                </a:solidFill>
+                <a:latin typeface="Calibri" pitchFamily="34" charset="0"/>
+                <a:ea typeface="Calibri" pitchFamily="34" charset="-122"/>
+                <a:cs typeface="Calibri" pitchFamily="34" charset="-120"/>
+              </a:rPr>
+              <a:t>APOIO</a:t>
+            </a:r>
+            <a:endParaRPr lang="en-US" sz="1200" dirty="0"/>
+          </a:p>
+        </p:txBody>
+      </p:sp>
+      <p:sp>
+        <p:nvSpPr>
+          <p:cNvPr id="3" name="Text 1"/>
+          <p:cNvSpPr/>
+          <p:nvPr/>
+        </p:nvSpPr>
+        <p:spPr>
+          <a:xfrm>
+            <a:off x="548640" y="566928"/>
+            <a:ext cx="11091672" cy="685800"/>
+          </a:xfrm>
+          <a:prstGeom prst="rect">
+            <a:avLst/>
+          </a:prstGeom>
+          <a:noFill/>
+          <a:ln/>
+        </p:spPr>
+        <p:txBody>
+          <a:bodyPr wrap="square" lIns="0" tIns="0" rIns="0" bIns="0" rtlCol="0" anchor="ctr"/>
+          <a:lstStyle/>
+          <a:p>
+            <a:pPr indent="0" marL="0">
+              <a:buNone/>
+            </a:pPr>
+            <a:r>
+              <a:rPr lang="en-US" sz="3000" b="1" dirty="0">
+                <a:solidFill>
+                  <a:srgbClr val="E8EEF7"/>
+                </a:solidFill>
+                <a:latin typeface="Calibri" pitchFamily="34" charset="0"/>
+                <a:ea typeface="Calibri" pitchFamily="34" charset="-122"/>
+                <a:cs typeface="Calibri" pitchFamily="34" charset="-120"/>
+              </a:rPr>
+              <a:t>8. Modelos, relatórios e vídeos</a:t>
+            </a:r>
+            <a:endParaRPr lang="en-US" sz="3000" dirty="0"/>
+          </a:p>
+        </p:txBody>
+      </p:sp>
+      <p:sp>
+        <p:nvSpPr>
+          <p:cNvPr id="4" name="Shape 2"/>
+          <p:cNvSpPr/>
+          <p:nvPr/>
+        </p:nvSpPr>
+        <p:spPr>
+          <a:xfrm>
+            <a:off x="640080" y="1691640"/>
+            <a:ext cx="5394960" cy="1783080"/>
+          </a:xfrm>
+          <a:prstGeom prst="roundRect">
+            <a:avLst>
+              <a:gd name="adj" fmla="val 4615"/>
+            </a:avLst>
+          </a:prstGeom>
+          <a:solidFill>
+            <a:srgbClr val="10233F"/>
+          </a:solidFill>
+          <a:ln w="12700">
+            <a:solidFill>
+              <a:srgbClr val="1D3A5F"/>
+            </a:solidFill>
+            <a:prstDash val="solid"/>
+          </a:ln>
+        </p:spPr>
+      </p:sp>
+      <p:sp>
+        <p:nvSpPr>
+          <p:cNvPr id="5" name="Text 3"/>
+          <p:cNvSpPr/>
+          <p:nvPr/>
+        </p:nvSpPr>
+        <p:spPr>
+          <a:xfrm>
+            <a:off x="841248" y="1837944"/>
+            <a:ext cx="4992624" cy="329184"/>
+          </a:xfrm>
+          <a:prstGeom prst="rect">
+            <a:avLst/>
+          </a:prstGeom>
+          <a:noFill/>
+          <a:ln/>
+        </p:spPr>
+        <p:txBody>
+          <a:bodyPr wrap="square" lIns="0" tIns="0" rIns="0" bIns="0" rtlCol="0" anchor="ctr"/>
+          <a:lstStyle/>
+          <a:p>
+            <a:pPr indent="0" marL="0">
+              <a:buNone/>
+            </a:pPr>
+            <a:r>
+              <a:rPr lang="en-US" sz="1400" b="1" dirty="0">
+                <a:solidFill>
+                  <a:srgbClr val="22D3EE"/>
+                </a:solidFill>
+                <a:latin typeface="Calibri" pitchFamily="34" charset="0"/>
+                <a:ea typeface="Calibri" pitchFamily="34" charset="-122"/>
+                <a:cs typeface="Calibri" pitchFamily="34" charset="-120"/>
+              </a:rPr>
+              <a:t>Biblioteca de Modelos</a:t>
+            </a:r>
+            <a:endParaRPr lang="en-US" sz="1400" dirty="0"/>
+          </a:p>
+        </p:txBody>
+      </p:sp>
+      <p:sp>
+        <p:nvSpPr>
+          <p:cNvPr id="6" name="Text 4"/>
+          <p:cNvSpPr/>
+          <p:nvPr/>
+        </p:nvSpPr>
+        <p:spPr>
+          <a:xfrm>
+            <a:off x="841248" y="2167128"/>
+            <a:ext cx="4992624" cy="1179576"/>
+          </a:xfrm>
+          <a:prstGeom prst="rect">
+            <a:avLst/>
+          </a:prstGeom>
+          <a:noFill/>
+          <a:ln/>
+        </p:spPr>
+        <p:txBody>
+          <a:bodyPr wrap="square" lIns="0" tIns="0" rIns="0" bIns="0" rtlCol="0" anchor="t"/>
+          <a:lstStyle/>
+          <a:p>
+            <a:pPr indent="0" marL="0">
+              <a:lnSpc>
+                <a:spcPct val="112000"/>
+              </a:lnSpc>
+              <a:buNone/>
+            </a:pPr>
+            <a:r>
+              <a:rPr lang="en-US" sz="1300" dirty="0">
+                <a:solidFill>
+                  <a:srgbClr val="E8EEF7"/>
+                </a:solidFill>
+                <a:latin typeface="Calibri" pitchFamily="34" charset="0"/>
+                <a:ea typeface="Calibri" pitchFamily="34" charset="-122"/>
+                <a:cs typeface="Calibri" pitchFamily="34" charset="-120"/>
+              </a:rPr>
+              <a:t>Publique os templates oficiais com título, categoria, versão e arquivo (até 50MB). O ★ marca a versão vigente.</a:t>
+            </a:r>
+            <a:endParaRPr lang="en-US" sz="1300" dirty="0"/>
+          </a:p>
+        </p:txBody>
+      </p:sp>
+      <p:sp>
+        <p:nvSpPr>
+          <p:cNvPr id="7" name="Shape 5"/>
+          <p:cNvSpPr/>
+          <p:nvPr/>
+        </p:nvSpPr>
+        <p:spPr>
+          <a:xfrm>
+            <a:off x="6217920" y="1691640"/>
+            <a:ext cx="5394960" cy="1783080"/>
+          </a:xfrm>
+          <a:prstGeom prst="roundRect">
+            <a:avLst>
+              <a:gd name="adj" fmla="val 4615"/>
+            </a:avLst>
+          </a:prstGeom>
+          <a:solidFill>
+            <a:srgbClr val="10233F"/>
+          </a:solidFill>
+          <a:ln w="12700">
+            <a:solidFill>
+              <a:srgbClr val="1D3A5F"/>
+            </a:solidFill>
+            <a:prstDash val="solid"/>
+          </a:ln>
+        </p:spPr>
+      </p:sp>
+      <p:sp>
+        <p:nvSpPr>
+          <p:cNvPr id="8" name="Text 6"/>
+          <p:cNvSpPr/>
+          <p:nvPr/>
+        </p:nvSpPr>
+        <p:spPr>
+          <a:xfrm>
+            <a:off x="6419088" y="1837944"/>
+            <a:ext cx="4992624" cy="329184"/>
+          </a:xfrm>
+          <a:prstGeom prst="rect">
+            <a:avLst/>
+          </a:prstGeom>
+          <a:noFill/>
+          <a:ln/>
+        </p:spPr>
+        <p:txBody>
+          <a:bodyPr wrap="square" lIns="0" tIns="0" rIns="0" bIns="0" rtlCol="0" anchor="ctr"/>
+          <a:lstStyle/>
+          <a:p>
+            <a:pPr indent="0" marL="0">
+              <a:buNone/>
+            </a:pPr>
+            <a:r>
+              <a:rPr lang="en-US" sz="1400" b="1" dirty="0">
+                <a:solidFill>
+                  <a:srgbClr val="22D3EE"/>
+                </a:solidFill>
+                <a:latin typeface="Calibri" pitchFamily="34" charset="0"/>
+                <a:ea typeface="Calibri" pitchFamily="34" charset="-122"/>
+                <a:cs typeface="Calibri" pitchFamily="34" charset="-120"/>
+              </a:rPr>
+              <a:t>Relatórios</a:t>
+            </a:r>
+            <a:endParaRPr lang="en-US" sz="1400" dirty="0"/>
+          </a:p>
+        </p:txBody>
+      </p:sp>
+      <p:sp>
+        <p:nvSpPr>
+          <p:cNvPr id="9" name="Text 7"/>
+          <p:cNvSpPr/>
+          <p:nvPr/>
+        </p:nvSpPr>
+        <p:spPr>
+          <a:xfrm>
+            <a:off x="6419088" y="2167128"/>
+            <a:ext cx="4992624" cy="1179576"/>
+          </a:xfrm>
+          <a:prstGeom prst="rect">
+            <a:avLst/>
+          </a:prstGeom>
+          <a:noFill/>
+          <a:ln/>
+        </p:spPr>
+        <p:txBody>
+          <a:bodyPr wrap="square" lIns="0" tIns="0" rIns="0" bIns="0" rtlCol="0" anchor="t"/>
+          <a:lstStyle/>
+          <a:p>
+            <a:pPr indent="0" marL="0">
+              <a:lnSpc>
+                <a:spcPct val="112000"/>
+              </a:lnSpc>
+              <a:buNone/>
+            </a:pPr>
+            <a:r>
+              <a:rPr lang="en-US" sz="1300" dirty="0">
+                <a:solidFill>
+                  <a:srgbClr val="E8EEF7"/>
+                </a:solidFill>
+                <a:latin typeface="Calibri" pitchFamily="34" charset="0"/>
+                <a:ea typeface="Calibri" pitchFamily="34" charset="-122"/>
+                <a:cs typeface="Calibri" pitchFamily="34" charset="-120"/>
+              </a:rPr>
+              <a:t>• Cursos por status</a:t>
+            </a:r>
+            <a:endParaRPr lang="en-US" sz="1300" dirty="0"/>
+          </a:p>
+          <a:p>
+            <a:pPr indent="0" marL="0">
+              <a:lnSpc>
+                <a:spcPct val="112000"/>
+              </a:lnSpc>
+              <a:buNone/>
+            </a:pPr>
+            <a:r>
+              <a:rPr lang="en-US" sz="1300" dirty="0">
+                <a:solidFill>
+                  <a:srgbClr val="E8EEF7"/>
+                </a:solidFill>
+                <a:latin typeface="Calibri" pitchFamily="34" charset="0"/>
+                <a:ea typeface="Calibri" pitchFamily="34" charset="-122"/>
+                <a:cs typeface="Calibri" pitchFamily="34" charset="-120"/>
+              </a:rPr>
+              <a:t>• Produção por formador(a)</a:t>
+            </a:r>
+            <a:endParaRPr lang="en-US" sz="1300" dirty="0"/>
+          </a:p>
+          <a:p>
+            <a:pPr indent="0" marL="0">
+              <a:lnSpc>
+                <a:spcPct val="112000"/>
+              </a:lnSpc>
+              <a:buNone/>
+            </a:pPr>
+            <a:r>
+              <a:rPr lang="en-US" sz="1300" dirty="0">
+                <a:solidFill>
+                  <a:srgbClr val="E8EEF7"/>
+                </a:solidFill>
+                <a:latin typeface="Calibri" pitchFamily="34" charset="0"/>
+                <a:ea typeface="Calibri" pitchFamily="34" charset="-122"/>
+                <a:cs typeface="Calibri" pitchFamily="34" charset="-120"/>
+              </a:rPr>
+              <a:t>• Prazos estourados e próximos</a:t>
+            </a:r>
+            <a:endParaRPr lang="en-US" sz="1300" dirty="0"/>
+          </a:p>
+          <a:p>
+            <a:pPr indent="0" marL="0">
+              <a:lnSpc>
+                <a:spcPct val="112000"/>
+              </a:lnSpc>
+              <a:buNone/>
+            </a:pPr>
+            <a:r>
+              <a:rPr lang="en-US" sz="1300" dirty="0">
+                <a:solidFill>
+                  <a:srgbClr val="E8EEF7"/>
+                </a:solidFill>
+                <a:latin typeface="Calibri" pitchFamily="34" charset="0"/>
+                <a:ea typeface="Calibri" pitchFamily="34" charset="-122"/>
+                <a:cs typeface="Calibri" pitchFamily="34" charset="-120"/>
+              </a:rPr>
+              <a:t>• Exportação CSV (abre no Excel)</a:t>
+            </a:r>
+            <a:endParaRPr lang="en-US" sz="1300" dirty="0"/>
+          </a:p>
+        </p:txBody>
+      </p:sp>
+      <p:sp>
+        <p:nvSpPr>
+          <p:cNvPr id="10" name="Shape 8"/>
+          <p:cNvSpPr/>
+          <p:nvPr/>
+        </p:nvSpPr>
+        <p:spPr>
+          <a:xfrm>
+            <a:off x="640080" y="3794760"/>
+            <a:ext cx="10972800" cy="2194560"/>
+          </a:xfrm>
+          <a:prstGeom prst="roundRect">
+            <a:avLst>
+              <a:gd name="adj" fmla="val 3750"/>
+            </a:avLst>
+          </a:prstGeom>
+          <a:solidFill>
+            <a:srgbClr val="10233F"/>
+          </a:solidFill>
+          <a:ln w="12700">
+            <a:solidFill>
+              <a:srgbClr val="1D3A5F"/>
+            </a:solidFill>
+            <a:prstDash val="solid"/>
+          </a:ln>
+        </p:spPr>
+      </p:sp>
+      <p:sp>
+        <p:nvSpPr>
+          <p:cNvPr id="11" name="Text 9"/>
+          <p:cNvSpPr/>
+          <p:nvPr/>
+        </p:nvSpPr>
+        <p:spPr>
+          <a:xfrm>
+            <a:off x="841248" y="3941064"/>
+            <a:ext cx="10570464" cy="329184"/>
+          </a:xfrm>
+          <a:prstGeom prst="rect">
+            <a:avLst/>
+          </a:prstGeom>
+          <a:noFill/>
+          <a:ln/>
+        </p:spPr>
+        <p:txBody>
+          <a:bodyPr wrap="square" lIns="0" tIns="0" rIns="0" bIns="0" rtlCol="0" anchor="ctr"/>
+          <a:lstStyle/>
+          <a:p>
+            <a:pPr indent="0" marL="0">
+              <a:buNone/>
+            </a:pPr>
+            <a:r>
+              <a:rPr lang="en-US" sz="1400" b="1" dirty="0">
+                <a:solidFill>
+                  <a:srgbClr val="22D3EE"/>
+                </a:solidFill>
+                <a:latin typeface="Calibri" pitchFamily="34" charset="0"/>
+                <a:ea typeface="Calibri" pitchFamily="34" charset="-122"/>
+                <a:cs typeface="Calibri" pitchFamily="34" charset="-120"/>
+              </a:rPr>
+              <a:t>Vídeos: a TI acompanha</a:t>
+            </a:r>
+            <a:endParaRPr lang="en-US" sz="1400" dirty="0"/>
+          </a:p>
+        </p:txBody>
+      </p:sp>
+      <p:sp>
+        <p:nvSpPr>
+          <p:cNvPr id="12" name="Text 10"/>
+          <p:cNvSpPr/>
+          <p:nvPr/>
+        </p:nvSpPr>
+        <p:spPr>
+          <a:xfrm>
+            <a:off x="841248" y="4270248"/>
+            <a:ext cx="10570464" cy="1591056"/>
+          </a:xfrm>
+          <a:prstGeom prst="rect">
+            <a:avLst/>
+          </a:prstGeom>
+          <a:noFill/>
+          <a:ln/>
+        </p:spPr>
+        <p:txBody>
+          <a:bodyPr wrap="square" lIns="0" tIns="0" rIns="0" bIns="0" rtlCol="0" anchor="t"/>
+          <a:lstStyle/>
+          <a:p>
+            <a:pPr indent="0" marL="0">
+              <a:lnSpc>
+                <a:spcPct val="112000"/>
+              </a:lnSpc>
+              <a:buNone/>
+            </a:pPr>
+            <a:r>
+              <a:rPr lang="en-US" sz="1300" dirty="0">
+                <a:solidFill>
+                  <a:srgbClr val="E8EEF7"/>
+                </a:solidFill>
+                <a:latin typeface="Calibri" pitchFamily="34" charset="0"/>
+                <a:ea typeface="Calibri" pitchFamily="34" charset="-122"/>
+                <a:cs typeface="Calibri" pitchFamily="34" charset="-120"/>
+              </a:rPr>
+              <a:t>A análise dos vídeos é feita pelo(a) FORMADOR(A), sobre o material produzido pela MB ESTÚDIOS. A TI acompanha pelo botão 🎬 Vídeos do curso e recebe cópia dos e-mails de apontamento e de aprovação — sem precisar agir, salvo se for solicitada.</a:t>
+            </a:r>
+            <a:endParaRPr lang="en-US" sz="1300" dirty="0"/>
+          </a:p>
+        </p:txBody>
+      </p:sp>
+      <p:sp>
+        <p:nvSpPr>
+          <p:cNvPr id="13" name="Text 11"/>
+          <p:cNvSpPr/>
+          <p:nvPr/>
+        </p:nvSpPr>
+        <p:spPr>
+          <a:xfrm>
+            <a:off x="548640" y="6473952"/>
+            <a:ext cx="7315200" cy="274320"/>
+          </a:xfrm>
+          <a:prstGeom prst="rect">
+            <a:avLst/>
+          </a:prstGeom>
+          <a:noFill/>
+          <a:ln/>
+        </p:spPr>
+        <p:txBody>
+          <a:bodyPr wrap="square" lIns="0" tIns="0" rIns="0" bIns="0" rtlCol="0" anchor="ctr"/>
+          <a:lstStyle/>
+          <a:p>
+            <a:pPr indent="0" marL="0">
+              <a:buNone/>
+            </a:pPr>
+            <a:r>
+              <a:rPr lang="en-US" sz="950" dirty="0">
+                <a:solidFill>
+                  <a:srgbClr val="8BAAC8"/>
+                </a:solidFill>
+                <a:latin typeface="Calibri" pitchFamily="34" charset="0"/>
+                <a:ea typeface="Calibri" pitchFamily="34" charset="-122"/>
+                <a:cs typeface="Calibri" pitchFamily="34" charset="-120"/>
+              </a:rPr>
+              <a:t>AutoriaSCS • Gestão de Cursos  —  Tutorial da Equipe TI</a:t>
+            </a:r>
+            <a:endParaRPr lang="en-US" sz="950" dirty="0"/>
+          </a:p>
+        </p:txBody>
+      </p:sp>
+      <p:sp>
+        <p:nvSpPr>
+          <p:cNvPr id="14" name="Text 12"/>
+          <p:cNvSpPr/>
+          <p:nvPr/>
+        </p:nvSpPr>
+        <p:spPr>
+          <a:xfrm>
+            <a:off x="10725912" y="6473952"/>
+            <a:ext cx="914400" cy="274320"/>
+          </a:xfrm>
+          <a:prstGeom prst="rect">
+            <a:avLst/>
+          </a:prstGeom>
+          <a:noFill/>
+          <a:ln/>
+        </p:spPr>
+        <p:txBody>
+          <a:bodyPr wrap="square" lIns="0" tIns="0" rIns="0" bIns="0" rtlCol="0" anchor="ctr"/>
+          <a:lstStyle/>
+          <a:p>
+            <a:pPr algn="r" indent="0" marL="0">
+              <a:buNone/>
+            </a:pPr>
+            <a:r>
+              <a:rPr lang="en-US" sz="950" dirty="0">
+                <a:solidFill>
+                  <a:srgbClr val="8BAAC8"/>
+                </a:solidFill>
+                <a:latin typeface="Calibri" pitchFamily="34" charset="0"/>
+                <a:ea typeface="Calibri" pitchFamily="34" charset="-122"/>
+                <a:cs typeface="Calibri" pitchFamily="34" charset="-120"/>
+              </a:rPr>
+              <a:t>11 / 12</a:t>
+            </a:r>
+            <a:endParaRPr lang="en-US" sz="950" dirty="0"/>
+          </a:p>
+        </p:txBody>
+      </p:sp>
+    </p:spTree>
+  </p:cSld>
+  <p:clrMapOvr>
+    <a:masterClrMapping/>
+  </p:clrMapOvr>
+</p:sld>
+</file>
+
+<file path=ppt/slides/slide12.xml><?xml version="1.0" encoding="utf-8"?>
+<p:sld xmlns:a="http://schemas.openxmlformats.org/drawingml/2006/main" xmlns:r="http://schemas.openxmlformats.org/officeDocument/2006/relationships" xmlns:p="http://schemas.openxmlformats.org/presentationml/2006/main">
+  <p:cSld name="Slide 12">
     <p:bg>
       <p:bgPr>
         <a:solidFill>
@@ -2835,12 +3715,12 @@
         </p:nvSpPr>
         <p:spPr>
           <a:xfrm>
-            <a:off x="640080" y="1645920"/>
-            <a:ext cx="10881360" cy="914400"/>
+            <a:off x="640080" y="1691640"/>
+            <a:ext cx="10881360" cy="1234440"/>
           </a:xfrm>
           <a:prstGeom prst="roundRect">
             <a:avLst>
-              <a:gd name="adj" fmla="val 9000"/>
+              <a:gd name="adj" fmla="val 6667"/>
             </a:avLst>
           </a:prstGeom>
           <a:solidFill>
@@ -2862,7 +3742,7 @@
         </p:nvSpPr>
         <p:spPr>
           <a:xfrm>
-            <a:off x="841248" y="1792224"/>
+            <a:off x="841248" y="1837944"/>
             <a:ext cx="10479024" cy="329184"/>
           </a:xfrm>
           <a:prstGeom prst="rect">
@@ -2887,7 +3767,7 @@
                 <a:ea typeface="Calibri" pitchFamily="34" charset="-122"/>
                 <a:cs typeface="Calibri" pitchFamily="34" charset="-120"/>
               </a:rPr>
-              <a:t>Formador diz que não consegue mover o curso</a:t>
+              <a:t>Formador não consegue mover o curso</a:t>
             </a:r>
             <a:endParaRPr lang="en-US" sz="1400" dirty="0"/>
           </a:p>
@@ -2901,8 +3781,8 @@
         </p:nvSpPr>
         <p:spPr>
           <a:xfrm>
-            <a:off x="841248" y="2121408"/>
-            <a:ext cx="10479024" cy="310896"/>
+            <a:off x="841248" y="2167128"/>
+            <a:ext cx="10479024" cy="630936"/>
           </a:xfrm>
           <a:prstGeom prst="rect">
             <a:avLst/>
@@ -2929,7 +3809,7 @@
                 <a:ea typeface="Calibri" pitchFamily="34" charset="-122"/>
                 <a:cs typeface="Calibri" pitchFamily="34" charset="-120"/>
               </a:rPr>
-              <a:t>Confira a fase atual: cada perfil só move nas suas transições. Se necessário, o ADMIN revisa a tela Transições por perfil.</a:t>
+              <a:t>Confira a fase: o projeto precisa estar aprovado (com carga horária). O ADMIN revisa a tela Transições por perfil.</a:t>
             </a:r>
             <a:endParaRPr lang="en-US" sz="1300" dirty="0"/>
           </a:p>
@@ -2943,12 +3823,12 @@
         </p:nvSpPr>
         <p:spPr>
           <a:xfrm>
-            <a:off x="640080" y="2706624"/>
-            <a:ext cx="10881360" cy="914400"/>
+            <a:off x="640080" y="3108960"/>
+            <a:ext cx="10881360" cy="1234440"/>
           </a:xfrm>
           <a:prstGeom prst="roundRect">
             <a:avLst>
-              <a:gd name="adj" fmla="val 9000"/>
+              <a:gd name="adj" fmla="val 6667"/>
             </a:avLst>
           </a:prstGeom>
           <a:solidFill>
@@ -2970,7 +3850,7 @@
         </p:nvSpPr>
         <p:spPr>
           <a:xfrm>
-            <a:off x="841248" y="2852928"/>
+            <a:off x="841248" y="3255264"/>
             <a:ext cx="10479024" cy="329184"/>
           </a:xfrm>
           <a:prstGeom prst="rect">
@@ -3009,8 +3889,8 @@
         </p:nvSpPr>
         <p:spPr>
           <a:xfrm>
-            <a:off x="841248" y="3182112"/>
-            <a:ext cx="10479024" cy="310896"/>
+            <a:off x="841248" y="3584448"/>
+            <a:ext cx="10479024" cy="630936"/>
           </a:xfrm>
           <a:prstGeom prst="rect">
             <a:avLst/>
@@ -3037,7 +3917,7 @@
                 <a:ea typeface="Calibri" pitchFamily="34" charset="-122"/>
                 <a:cs typeface="Calibri" pitchFamily="34" charset="-120"/>
               </a:rPr>
-              <a:t>Somente o ADMIN exclui arquivos (botão Excluir na lista, com auditoria e recálculo da sequência).</a:t>
+              <a:t>Somente o ADMIN exclui arquivos (botão Excluir na lista, com auditoria).</a:t>
             </a:r>
             <a:endParaRPr lang="en-US" sz="1300" dirty="0"/>
           </a:p>
@@ -3051,12 +3931,12 @@
         </p:nvSpPr>
         <p:spPr>
           <a:xfrm>
-            <a:off x="640080" y="3767328"/>
-            <a:ext cx="10881360" cy="914400"/>
+            <a:off x="640080" y="4526280"/>
+            <a:ext cx="10881360" cy="1234440"/>
           </a:xfrm>
           <a:prstGeom prst="roundRect">
             <a:avLst>
-              <a:gd name="adj" fmla="val 9000"/>
+              <a:gd name="adj" fmla="val 6667"/>
             </a:avLst>
           </a:prstGeom>
           <a:solidFill>
@@ -3078,7 +3958,7 @@
         </p:nvSpPr>
         <p:spPr>
           <a:xfrm>
-            <a:off x="841248" y="3913632"/>
+            <a:off x="841248" y="4672584"/>
             <a:ext cx="10479024" cy="329184"/>
           </a:xfrm>
           <a:prstGeom prst="rect">
@@ -3117,8 +3997,8 @@
         </p:nvSpPr>
         <p:spPr>
           <a:xfrm>
-            <a:off x="841248" y="4242816"/>
-            <a:ext cx="10479024" cy="310896"/>
+            <a:off x="841248" y="5001768"/>
+            <a:ext cx="10479024" cy="630936"/>
           </a:xfrm>
           <a:prstGeom prst="rect">
             <a:avLst/>
@@ -3276,7 +4156,7 @@
                 <a:ea typeface="Calibri" pitchFamily="34" charset="-122"/>
                 <a:cs typeface="Calibri" pitchFamily="34" charset="-120"/>
               </a:rPr>
-              <a:t>11 / 11</a:t>
+              <a:t>12 / 12</a:t>
             </a:r>
             <a:endParaRPr lang="en-US" sz="950" dirty="0"/>
           </a:p>
@@ -3400,7 +4280,7 @@
         </p:nvSpPr>
         <p:spPr>
           <a:xfrm>
-            <a:off x="640080" y="1691640"/>
+            <a:off x="640080" y="1783080"/>
             <a:ext cx="384048" cy="384048"/>
           </a:xfrm>
           <a:prstGeom prst="ellipse">
@@ -3425,7 +4305,7 @@
         </p:nvSpPr>
         <p:spPr>
           <a:xfrm>
-            <a:off x="640080" y="1691640"/>
+            <a:off x="640080" y="1783080"/>
             <a:ext cx="384048" cy="384048"/>
           </a:xfrm>
           <a:prstGeom prst="rect">
@@ -3464,7 +4344,7 @@
         </p:nvSpPr>
         <p:spPr>
           <a:xfrm>
-            <a:off x="1207008" y="1655064"/>
+            <a:off x="1207008" y="1746504"/>
             <a:ext cx="4828032" cy="731520"/>
           </a:xfrm>
           <a:prstGeom prst="rect">
@@ -3503,7 +4383,7 @@
         </p:nvSpPr>
         <p:spPr>
           <a:xfrm>
-            <a:off x="640080" y="2532888"/>
+            <a:off x="640080" y="2862072"/>
             <a:ext cx="384048" cy="384048"/>
           </a:xfrm>
           <a:prstGeom prst="ellipse">
@@ -3528,7 +4408,7 @@
         </p:nvSpPr>
         <p:spPr>
           <a:xfrm>
-            <a:off x="640080" y="2532888"/>
+            <a:off x="640080" y="2862072"/>
             <a:ext cx="384048" cy="384048"/>
           </a:xfrm>
           <a:prstGeom prst="rect">
@@ -3567,7 +4447,7 @@
         </p:nvSpPr>
         <p:spPr>
           <a:xfrm>
-            <a:off x="1207008" y="2496312"/>
+            <a:off x="1207008" y="2825496"/>
             <a:ext cx="4828032" cy="731520"/>
           </a:xfrm>
           <a:prstGeom prst="rect">
@@ -3606,7 +4486,7 @@
         </p:nvSpPr>
         <p:spPr>
           <a:xfrm>
-            <a:off x="640080" y="3374136"/>
+            <a:off x="640080" y="3941064"/>
             <a:ext cx="384048" cy="384048"/>
           </a:xfrm>
           <a:prstGeom prst="ellipse">
@@ -3631,7 +4511,7 @@
         </p:nvSpPr>
         <p:spPr>
           <a:xfrm>
-            <a:off x="640080" y="3374136"/>
+            <a:off x="640080" y="3941064"/>
             <a:ext cx="384048" cy="384048"/>
           </a:xfrm>
           <a:prstGeom prst="rect">
@@ -3670,7 +4550,7 @@
         </p:nvSpPr>
         <p:spPr>
           <a:xfrm>
-            <a:off x="1207008" y="3337560"/>
+            <a:off x="1207008" y="3904488"/>
             <a:ext cx="4828032" cy="731520"/>
           </a:xfrm>
           <a:prstGeom prst="rect">
@@ -3695,7 +4575,7 @@
                 <a:ea typeface="Calibri" pitchFamily="34" charset="-122"/>
                 <a:cs typeface="Calibri" pitchFamily="34" charset="-120"/>
               </a:rPr>
-              <a:t>Revisar um curso</a:t>
+              <a:t>Aprovar o projeto e a carga horária</a:t>
             </a:r>
             <a:endParaRPr lang="en-US" sz="1550" dirty="0"/>
           </a:p>
@@ -3709,7 +4589,7 @@
         </p:nvSpPr>
         <p:spPr>
           <a:xfrm>
-            <a:off x="640080" y="4215384"/>
+            <a:off x="640080" y="5020056"/>
             <a:ext cx="384048" cy="384048"/>
           </a:xfrm>
           <a:prstGeom prst="ellipse">
@@ -3734,7 +4614,7 @@
         </p:nvSpPr>
         <p:spPr>
           <a:xfrm>
-            <a:off x="640080" y="4215384"/>
+            <a:off x="640080" y="5020056"/>
             <a:ext cx="384048" cy="384048"/>
           </a:xfrm>
           <a:prstGeom prst="rect">
@@ -3773,7 +4653,7 @@
         </p:nvSpPr>
         <p:spPr>
           <a:xfrm>
-            <a:off x="1207008" y="4178808"/>
+            <a:off x="1207008" y="4983480"/>
             <a:ext cx="4828032" cy="731520"/>
           </a:xfrm>
           <a:prstGeom prst="rect">
@@ -3798,7 +4678,7 @@
                 <a:ea typeface="Calibri" pitchFamily="34" charset="-122"/>
                 <a:cs typeface="Calibri" pitchFamily="34" charset="-120"/>
               </a:rPr>
-              <a:t>Recusar com relatório</a:t>
+              <a:t>Revisar um curso</a:t>
             </a:r>
             <a:endParaRPr lang="en-US" sz="1550" dirty="0"/>
           </a:p>
@@ -3812,7 +4692,7 @@
         </p:nvSpPr>
         <p:spPr>
           <a:xfrm>
-            <a:off x="6492240" y="1691640"/>
+            <a:off x="6492240" y="1783080"/>
             <a:ext cx="384048" cy="384048"/>
           </a:xfrm>
           <a:prstGeom prst="ellipse">
@@ -3837,7 +4717,7 @@
         </p:nvSpPr>
         <p:spPr>
           <a:xfrm>
-            <a:off x="6492240" y="1691640"/>
+            <a:off x="6492240" y="1783080"/>
             <a:ext cx="384048" cy="384048"/>
           </a:xfrm>
           <a:prstGeom prst="rect">
@@ -3876,7 +4756,7 @@
         </p:nvSpPr>
         <p:spPr>
           <a:xfrm>
-            <a:off x="7059168" y="1655064"/>
+            <a:off x="7059168" y="1746504"/>
             <a:ext cx="4828032" cy="731520"/>
           </a:xfrm>
           <a:prstGeom prst="rect">
@@ -3901,7 +4781,7 @@
                 <a:ea typeface="Calibri" pitchFamily="34" charset="-122"/>
                 <a:cs typeface="Calibri" pitchFamily="34" charset="-120"/>
               </a:rPr>
-              <a:t>Aprovar e encaminhar à MB</a:t>
+              <a:t>Recusar com relatório</a:t>
             </a:r>
             <a:endParaRPr lang="en-US" sz="1550" dirty="0"/>
           </a:p>
@@ -3915,7 +4795,7 @@
         </p:nvSpPr>
         <p:spPr>
           <a:xfrm>
-            <a:off x="6492240" y="2532888"/>
+            <a:off x="6492240" y="2862072"/>
             <a:ext cx="384048" cy="384048"/>
           </a:xfrm>
           <a:prstGeom prst="ellipse">
@@ -3940,7 +4820,7 @@
         </p:nvSpPr>
         <p:spPr>
           <a:xfrm>
-            <a:off x="6492240" y="2532888"/>
+            <a:off x="6492240" y="2862072"/>
             <a:ext cx="384048" cy="384048"/>
           </a:xfrm>
           <a:prstGeom prst="rect">
@@ -3979,7 +4859,7 @@
         </p:nvSpPr>
         <p:spPr>
           <a:xfrm>
-            <a:off x="7059168" y="2496312"/>
+            <a:off x="7059168" y="2825496"/>
             <a:ext cx="4828032" cy="731520"/>
           </a:xfrm>
           <a:prstGeom prst="rect">
@@ -4004,7 +4884,7 @@
                 <a:ea typeface="Calibri" pitchFamily="34" charset="-122"/>
                 <a:cs typeface="Calibri" pitchFamily="34" charset="-120"/>
               </a:rPr>
-              <a:t>Agendar a publicação</a:t>
+              <a:t>Encaminhar à MB</a:t>
             </a:r>
             <a:endParaRPr lang="en-US" sz="1550" dirty="0"/>
           </a:p>
@@ -4018,7 +4898,7 @@
         </p:nvSpPr>
         <p:spPr>
           <a:xfrm>
-            <a:off x="6492240" y="3374136"/>
+            <a:off x="6492240" y="3941064"/>
             <a:ext cx="384048" cy="384048"/>
           </a:xfrm>
           <a:prstGeom prst="ellipse">
@@ -4043,7 +4923,7 @@
         </p:nvSpPr>
         <p:spPr>
           <a:xfrm>
-            <a:off x="6492240" y="3374136"/>
+            <a:off x="6492240" y="3941064"/>
             <a:ext cx="384048" cy="384048"/>
           </a:xfrm>
           <a:prstGeom prst="rect">
@@ -4082,7 +4962,7 @@
         </p:nvSpPr>
         <p:spPr>
           <a:xfrm>
-            <a:off x="7059168" y="3337560"/>
+            <a:off x="7059168" y="3904488"/>
             <a:ext cx="4828032" cy="731520"/>
           </a:xfrm>
           <a:prstGeom prst="rect">
@@ -4107,7 +4987,7 @@
                 <a:ea typeface="Calibri" pitchFamily="34" charset="-122"/>
                 <a:cs typeface="Calibri" pitchFamily="34" charset="-120"/>
               </a:rPr>
-              <a:t>Biblioteca de modelos</a:t>
+              <a:t>Agendar a publicação</a:t>
             </a:r>
             <a:endParaRPr lang="en-US" sz="1550" dirty="0"/>
           </a:p>
@@ -4121,7 +5001,7 @@
         </p:nvSpPr>
         <p:spPr>
           <a:xfrm>
-            <a:off x="6492240" y="4215384"/>
+            <a:off x="6492240" y="5020056"/>
             <a:ext cx="384048" cy="384048"/>
           </a:xfrm>
           <a:prstGeom prst="ellipse">
@@ -4146,7 +5026,7 @@
         </p:nvSpPr>
         <p:spPr>
           <a:xfrm>
-            <a:off x="6492240" y="4215384"/>
+            <a:off x="6492240" y="5020056"/>
             <a:ext cx="384048" cy="384048"/>
           </a:xfrm>
           <a:prstGeom prst="rect">
@@ -4185,7 +5065,7 @@
         </p:nvSpPr>
         <p:spPr>
           <a:xfrm>
-            <a:off x="7059168" y="4178808"/>
+            <a:off x="7059168" y="4983480"/>
             <a:ext cx="4828032" cy="731520"/>
           </a:xfrm>
           <a:prstGeom prst="rect">
@@ -4210,7 +5090,7 @@
                 <a:ea typeface="Calibri" pitchFamily="34" charset="-122"/>
                 <a:cs typeface="Calibri" pitchFamily="34" charset="-120"/>
               </a:rPr>
-              <a:t>Relatórios e e-mails</a:t>
+              <a:t>Modelos, relatórios e vídeos</a:t>
             </a:r>
             <a:endParaRPr lang="en-US" sz="1550" dirty="0"/>
           </a:p>
@@ -4288,7 +5168,7 @@
                 <a:ea typeface="Calibri" pitchFamily="34" charset="-122"/>
                 <a:cs typeface="Calibri" pitchFamily="34" charset="-120"/>
               </a:rPr>
-              <a:t>2 / 11</a:t>
+              <a:t>2 / 12</a:t>
             </a:r>
             <a:endParaRPr lang="en-US" sz="950" dirty="0"/>
           </a:p>
@@ -4412,12 +5292,12 @@
         </p:nvSpPr>
         <p:spPr>
           <a:xfrm>
-            <a:off x="1824685" y="1463040"/>
-            <a:ext cx="8603590" cy="3383280"/>
+            <a:off x="2430475" y="1463040"/>
+            <a:ext cx="7392010" cy="2926080"/>
           </a:xfrm>
           <a:prstGeom prst="roundRect">
             <a:avLst>
-              <a:gd name="adj" fmla="val 2432"/>
+              <a:gd name="adj" fmla="val 2813"/>
             </a:avLst>
           </a:prstGeom>
           <a:solidFill>
@@ -4447,8 +5327,8 @@
         </p:blipFill>
         <p:spPr>
           <a:xfrm>
-            <a:off x="1934413" y="1572768"/>
-            <a:ext cx="8384134" cy="3163824"/>
+            <a:off x="2540203" y="1572768"/>
+            <a:ext cx="7172554" cy="2706624"/>
           </a:xfrm>
           <a:prstGeom prst="rect">
             <a:avLst/>
@@ -4508,7 +5388,7 @@
                 <a:ea typeface="Calibri" pitchFamily="34" charset="-122"/>
                 <a:cs typeface="Calibri" pitchFamily="34" charset="-120"/>
               </a:rPr>
-              <a:t>O curso "anda" da esquerda (Backlog) para a direita (Publicado). Mova arrastando o cartão com o mouse ou abra o curso e use Ações de Status. Os botões Kanban / Tabela alternam a visualização.</a:t>
+              <a:t>O curso "anda" da esquerda (Backlog) para a direita (Publicado). Mova arrastando o cartão ou abra o curso e use Ações de Status.</a:t>
             </a:r>
             <a:endParaRPr lang="en-US" sz="1350" dirty="0"/>
           </a:p>
@@ -4586,7 +5466,7 @@
                 <a:ea typeface="Calibri" pitchFamily="34" charset="-122"/>
                 <a:cs typeface="Calibri" pitchFamily="34" charset="-120"/>
               </a:rPr>
-              <a:t>3 / 11</a:t>
+              <a:t>3 / 12</a:t>
             </a:r>
             <a:endParaRPr lang="en-US" sz="950" dirty="0"/>
           </a:p>
@@ -4963,7 +5843,7 @@
                 <a:ea typeface="Calibri" pitchFamily="34" charset="-122"/>
                 <a:cs typeface="Calibri" pitchFamily="34" charset="-120"/>
               </a:rPr>
-              <a:t>Digite: os nomes cadastrados aparecem para escolher</a:t>
+              <a:t>Digite: os nomes cadastrados aparecem</a:t>
             </a:r>
             <a:endParaRPr lang="en-US" sz="1200" dirty="0"/>
           </a:p>
@@ -5473,7 +6353,7 @@
                 <a:ea typeface="Calibri" pitchFamily="34" charset="-122"/>
                 <a:cs typeface="Calibri" pitchFamily="34" charset="-120"/>
               </a:rPr>
-              <a:t>4 / 11</a:t>
+              <a:t>4 / 12</a:t>
             </a:r>
             <a:endParaRPr lang="en-US" sz="950" dirty="0"/>
           </a:p>
@@ -5520,7 +6400,7 @@
         <p:spPr>
           <a:xfrm>
             <a:off x="548640" y="320040"/>
-            <a:ext cx="5486400" cy="292608"/>
+            <a:ext cx="7315200" cy="292608"/>
           </a:xfrm>
           <a:prstGeom prst="rect">
             <a:avLst/>
@@ -5544,7 +6424,7 @@
                 <a:ea typeface="Calibri" pitchFamily="34" charset="-122"/>
                 <a:cs typeface="Calibri" pitchFamily="34" charset="-120"/>
               </a:rPr>
-              <a:t>REVISÃO</a:t>
+              <a:t>PRIMEIRA DECISÃO DA TI</a:t>
             </a:r>
             <a:endParaRPr lang="en-US" sz="1200" dirty="0"/>
           </a:p>
@@ -5583,7 +6463,7 @@
                 <a:ea typeface="Calibri" pitchFamily="34" charset="-122"/>
                 <a:cs typeface="Calibri" pitchFamily="34" charset="-120"/>
               </a:rPr>
-              <a:t>3. Revisar um curso</a:t>
+              <a:t>3. Aprovar o projeto e definir a carga horária</a:t>
             </a:r>
             <a:endParaRPr lang="en-US" sz="3000" dirty="0"/>
           </a:p>
@@ -5657,7 +6537,7 @@
         <p:spPr>
           <a:xfrm>
             <a:off x="1097280" y="1737360"/>
-            <a:ext cx="5394960" cy="960120"/>
+            <a:ext cx="5212080" cy="777240"/>
           </a:xfrm>
           <a:prstGeom prst="rect">
             <a:avLst/>
@@ -5681,7 +6561,7 @@
                 <a:ea typeface="Calibri" pitchFamily="34" charset="-122"/>
                 <a:cs typeface="Calibri" pitchFamily="34" charset="-120"/>
               </a:rPr>
-              <a:t>O formador move para </a:t>
+              <a:t>Abra o curso que está em </a:t>
             </a:r>
             <a:pPr indent="0" marL="0">
               <a:buNone/>
@@ -5695,7 +6575,7 @@
                 <a:ea typeface="Calibri" pitchFamily="34" charset="-122"/>
                 <a:cs typeface="Calibri" pitchFamily="34" charset="-120"/>
               </a:rPr>
-              <a:t>Pronto para Análise</a:t>
+              <a:t>Curso Proposto</a:t>
             </a:r>
             <a:pPr indent="0" marL="0">
               <a:buNone/>
@@ -5709,7 +6589,7 @@
                 <a:ea typeface="Calibri" pitchFamily="34" charset="-122"/>
                 <a:cs typeface="Calibri" pitchFamily="34" charset="-120"/>
               </a:rPr>
-              <a:t> → a TI recebe e-mail;</a:t>
+              <a:t>;</a:t>
             </a:r>
             <a:endParaRPr lang="en-US" sz="1400" dirty="0"/>
           </a:p>
@@ -5723,7 +6603,7 @@
         </p:nvSpPr>
         <p:spPr>
           <a:xfrm>
-            <a:off x="640080" y="2743200"/>
+            <a:off x="640080" y="2560320"/>
             <a:ext cx="310896" cy="310896"/>
           </a:xfrm>
           <a:prstGeom prst="ellipse">
@@ -5743,7 +6623,7 @@
         </p:nvSpPr>
         <p:spPr>
           <a:xfrm>
-            <a:off x="640080" y="2743200"/>
+            <a:off x="640080" y="2560320"/>
             <a:ext cx="310896" cy="310896"/>
           </a:xfrm>
           <a:prstGeom prst="rect">
@@ -5782,8 +6662,8 @@
         </p:nvSpPr>
         <p:spPr>
           <a:xfrm>
-            <a:off x="1097280" y="2697480"/>
-            <a:ext cx="5394960" cy="960120"/>
+            <a:off x="1097280" y="2514600"/>
+            <a:ext cx="5212080" cy="777240"/>
           </a:xfrm>
           <a:prstGeom prst="rect">
             <a:avLst/>
@@ -5807,7 +6687,7 @@
                 <a:ea typeface="Calibri" pitchFamily="34" charset="-122"/>
                 <a:cs typeface="Calibri" pitchFamily="34" charset="-120"/>
               </a:rPr>
-              <a:t>Abra o curso e mova para </a:t>
+              <a:t>Em Ações de Status, escolha </a:t>
             </a:r>
             <a:pPr indent="0" marL="0">
               <a:buNone/>
@@ -5821,7 +6701,7 @@
                 <a:ea typeface="Calibri" pitchFamily="34" charset="-122"/>
                 <a:cs typeface="Calibri" pitchFamily="34" charset="-120"/>
               </a:rPr>
-              <a:t>Em Revisão</a:t>
+              <a:t>Projeto Aprovado</a:t>
             </a:r>
             <a:pPr indent="0" marL="0">
               <a:buNone/>
@@ -5835,7 +6715,7 @@
                 <a:ea typeface="Calibri" pitchFamily="34" charset="-122"/>
                 <a:cs typeface="Calibri" pitchFamily="34" charset="-120"/>
               </a:rPr>
-              <a:t> (sinaliza que a análise começou);</a:t>
+              <a:t>;</a:t>
             </a:r>
             <a:endParaRPr lang="en-US" sz="1400" dirty="0"/>
           </a:p>
@@ -5849,7 +6729,7 @@
         </p:nvSpPr>
         <p:spPr>
           <a:xfrm>
-            <a:off x="640080" y="3703320"/>
+            <a:off x="640080" y="3337560"/>
             <a:ext cx="310896" cy="310896"/>
           </a:xfrm>
           <a:prstGeom prst="ellipse">
@@ -5869,7 +6749,7 @@
         </p:nvSpPr>
         <p:spPr>
           <a:xfrm>
-            <a:off x="640080" y="3703320"/>
+            <a:off x="640080" y="3337560"/>
             <a:ext cx="310896" cy="310896"/>
           </a:xfrm>
           <a:prstGeom prst="rect">
@@ -5908,8 +6788,8 @@
         </p:nvSpPr>
         <p:spPr>
           <a:xfrm>
-            <a:off x="1097280" y="3657600"/>
-            <a:ext cx="5394960" cy="960120"/>
+            <a:off x="1097280" y="3291840"/>
+            <a:ext cx="5212080" cy="777240"/>
           </a:xfrm>
           <a:prstGeom prst="rect">
             <a:avLst/>
@@ -5933,7 +6813,7 @@
                 <a:ea typeface="Calibri" pitchFamily="34" charset="-122"/>
                 <a:cs typeface="Calibri" pitchFamily="34" charset="-120"/>
               </a:rPr>
-              <a:t>Analise: Backlog, Checklist, </a:t>
+              <a:t>Informe a </a:t>
             </a:r>
             <a:pPr indent="0" marL="0">
               <a:buNone/>
@@ -5941,27 +6821,27 @@
             <a:r>
               <a:rPr lang="en-US" sz="1400" b="1" dirty="0">
                 <a:solidFill>
+                  <a:srgbClr val="22D3EE"/>
+                </a:solidFill>
+                <a:latin typeface="Calibri" pitchFamily="34" charset="0"/>
+                <a:ea typeface="Calibri" pitchFamily="34" charset="-122"/>
+                <a:cs typeface="Calibri" pitchFamily="34" charset="-120"/>
+              </a:rPr>
+              <a:t>carga horária</a:t>
+            </a:r>
+            <a:pPr indent="0" marL="0">
+              <a:buNone/>
+            </a:pPr>
+            <a:r>
+              <a:rPr lang="en-US" sz="1400" dirty="0">
+                <a:solidFill>
                   <a:srgbClr val="E8EEF7"/>
                 </a:solidFill>
                 <a:latin typeface="Calibri" pitchFamily="34" charset="0"/>
                 <a:ea typeface="Calibri" pitchFamily="34" charset="-122"/>
                 <a:cs typeface="Calibri" pitchFamily="34" charset="-120"/>
               </a:rPr>
-              <a:t>Arquivos na ordem oficial</a:t>
-            </a:r>
-            <a:pPr indent="0" marL="0">
-              <a:buNone/>
-            </a:pPr>
-            <a:r>
-              <a:rPr lang="en-US" sz="1400" dirty="0">
-                <a:solidFill>
-                  <a:srgbClr val="E8EEF7"/>
-                </a:solidFill>
-                <a:latin typeface="Calibri" pitchFamily="34" charset="0"/>
-                <a:ea typeface="Calibri" pitchFamily="34" charset="-122"/>
-                <a:cs typeface="Calibri" pitchFamily="34" charset="-120"/>
-              </a:rPr>
-              <a:t> (botão Baixar todos em ZIP) e Links Externos;</a:t>
+              <a:t> (10, 20, 30 ou 40 horas) — é obrigatória;</a:t>
             </a:r>
             <a:endParaRPr lang="en-US" sz="1400" dirty="0"/>
           </a:p>
@@ -5975,7 +6855,7 @@
         </p:nvSpPr>
         <p:spPr>
           <a:xfrm>
-            <a:off x="640080" y="4663440"/>
+            <a:off x="640080" y="4114800"/>
             <a:ext cx="310896" cy="310896"/>
           </a:xfrm>
           <a:prstGeom prst="ellipse">
@@ -5995,7 +6875,7 @@
         </p:nvSpPr>
         <p:spPr>
           <a:xfrm>
-            <a:off x="640080" y="4663440"/>
+            <a:off x="640080" y="4114800"/>
             <a:ext cx="310896" cy="310896"/>
           </a:xfrm>
           <a:prstGeom prst="rect">
@@ -6034,8 +6914,8 @@
         </p:nvSpPr>
         <p:spPr>
           <a:xfrm>
-            <a:off x="1097280" y="4617720"/>
-            <a:ext cx="5394960" cy="960120"/>
+            <a:off x="1097280" y="4069080"/>
+            <a:ext cx="5212080" cy="777240"/>
           </a:xfrm>
           <a:prstGeom prst="rect">
             <a:avLst/>
@@ -6059,7 +6939,7 @@
                 <a:ea typeface="Calibri" pitchFamily="34" charset="-122"/>
                 <a:cs typeface="Calibri" pitchFamily="34" charset="-120"/>
               </a:rPr>
-              <a:t>Decida: </a:t>
+              <a:t>Clique em </a:t>
             </a:r>
             <a:pPr indent="0" marL="0">
               <a:buNone/>
@@ -6067,13 +6947,13 @@
             <a:r>
               <a:rPr lang="en-US" sz="1400" b="1" dirty="0">
                 <a:solidFill>
-                  <a:srgbClr val="34D399"/>
-                </a:solidFill>
-                <a:latin typeface="Calibri" pitchFamily="34" charset="0"/>
-                <a:ea typeface="Calibri" pitchFamily="34" charset="-122"/>
-                <a:cs typeface="Calibri" pitchFamily="34" charset="-120"/>
-              </a:rPr>
-              <a:t>Aprovado</a:t>
+                  <a:srgbClr val="E8EEF7"/>
+                </a:solidFill>
+                <a:latin typeface="Calibri" pitchFamily="34" charset="0"/>
+                <a:ea typeface="Calibri" pitchFamily="34" charset="-122"/>
+                <a:cs typeface="Calibri" pitchFamily="34" charset="-120"/>
+              </a:rPr>
+              <a:t>Atualizar Status</a:t>
             </a:r>
             <a:pPr indent="0" marL="0">
               <a:buNone/>
@@ -6087,35 +6967,7 @@
                 <a:ea typeface="Calibri" pitchFamily="34" charset="-122"/>
                 <a:cs typeface="Calibri" pitchFamily="34" charset="-120"/>
               </a:rPr>
-              <a:t> ou </a:t>
-            </a:r>
-            <a:pPr indent="0" marL="0">
-              <a:buNone/>
-            </a:pPr>
-            <a:r>
-              <a:rPr lang="en-US" sz="1400" b="1" dirty="0">
-                <a:solidFill>
-                  <a:srgbClr val="FBBF24"/>
-                </a:solidFill>
-                <a:latin typeface="Calibri" pitchFamily="34" charset="0"/>
-                <a:ea typeface="Calibri" pitchFamily="34" charset="-122"/>
-                <a:cs typeface="Calibri" pitchFamily="34" charset="-120"/>
-              </a:rPr>
-              <a:t>Recusar com relatório</a:t>
-            </a:r>
-            <a:pPr indent="0" marL="0">
-              <a:buNone/>
-            </a:pPr>
-            <a:r>
-              <a:rPr lang="en-US" sz="1400" dirty="0">
-                <a:solidFill>
-                  <a:srgbClr val="E8EEF7"/>
-                </a:solidFill>
-                <a:latin typeface="Calibri" pitchFamily="34" charset="0"/>
-                <a:ea typeface="Calibri" pitchFamily="34" charset="-122"/>
-                <a:cs typeface="Calibri" pitchFamily="34" charset="-120"/>
-              </a:rPr>
-              <a:t> (próximo slide).</a:t>
+              <a:t> e confirme.</a:t>
             </a:r>
             <a:endParaRPr lang="en-US" sz="1400" dirty="0"/>
           </a:p>
@@ -6129,12 +6981,12 @@
         </p:nvSpPr>
         <p:spPr>
           <a:xfrm>
-            <a:off x="6766560" y="1783080"/>
-            <a:ext cx="4846320" cy="3463114"/>
+            <a:off x="640080" y="5029200"/>
+            <a:ext cx="5669280" cy="1097280"/>
           </a:xfrm>
           <a:prstGeom prst="roundRect">
             <a:avLst>
-              <a:gd name="adj" fmla="val 2376"/>
+              <a:gd name="adj" fmla="val 7500"/>
             </a:avLst>
           </a:prstGeom>
           <a:solidFill>
@@ -6148,9 +7000,117 @@
           </a:ln>
         </p:spPr>
       </p:sp>
+      <p:sp>
+        <p:nvSpPr>
+          <p:cNvPr id="17" name="Text 15"/>
+          <p:cNvSpPr/>
+          <p:nvPr/>
+        </p:nvSpPr>
+        <p:spPr>
+          <a:xfrm>
+            <a:off x="841248" y="5175504"/>
+            <a:ext cx="5266944" cy="329184"/>
+          </a:xfrm>
+          <a:prstGeom prst="rect">
+            <a:avLst/>
+          </a:prstGeom>
+          <a:noFill/>
+          <a:ln/>
+        </p:spPr>
+        <p:txBody>
+          <a:bodyPr wrap="square" lIns="0" tIns="0" rIns="0" bIns="0" rtlCol="0" anchor="ctr"/>
+          <a:lstStyle/>
+          <a:p>
+            <a:pPr indent="0" marL="0">
+              <a:buNone/>
+            </a:pPr>
+            <a:r>
+              <a:rPr lang="en-US" sz="1400" b="1" dirty="0">
+                <a:solidFill>
+                  <a:srgbClr val="22D3EE"/>
+                </a:solidFill>
+                <a:latin typeface="Calibri" pitchFamily="34" charset="0"/>
+                <a:ea typeface="Calibri" pitchFamily="34" charset="-122"/>
+                <a:cs typeface="Calibri" pitchFamily="34" charset="-120"/>
+              </a:rPr>
+              <a:t>O que o sistema faz</a:t>
+            </a:r>
+            <a:endParaRPr lang="en-US" sz="1400" dirty="0"/>
+          </a:p>
+        </p:txBody>
+      </p:sp>
+      <p:sp>
+        <p:nvSpPr>
+          <p:cNvPr id="18" name="Text 16"/>
+          <p:cNvSpPr/>
+          <p:nvPr/>
+        </p:nvSpPr>
+        <p:spPr>
+          <a:xfrm>
+            <a:off x="841248" y="5504688"/>
+            <a:ext cx="5266944" cy="493776"/>
+          </a:xfrm>
+          <a:prstGeom prst="rect">
+            <a:avLst/>
+          </a:prstGeom>
+          <a:noFill/>
+          <a:ln/>
+        </p:spPr>
+        <p:txBody>
+          <a:bodyPr wrap="square" lIns="0" tIns="0" rIns="0" bIns="0" rtlCol="0" anchor="t"/>
+          <a:lstStyle/>
+          <a:p>
+            <a:pPr indent="0" marL="0">
+              <a:lnSpc>
+                <a:spcPct val="112000"/>
+              </a:lnSpc>
+              <a:buNone/>
+            </a:pPr>
+            <a:r>
+              <a:rPr lang="en-US" sz="1250" dirty="0">
+                <a:solidFill>
+                  <a:srgbClr val="E8EEF7"/>
+                </a:solidFill>
+                <a:latin typeface="Calibri" pitchFamily="34" charset="0"/>
+                <a:ea typeface="Calibri" pitchFamily="34" charset="-122"/>
+                <a:cs typeface="Calibri" pitchFamily="34" charset="-120"/>
+              </a:rPr>
+              <a:t>Grava a carga horária oficial, monta a identificação do curso e avisa MB e TI por e-mail.</a:t>
+            </a:r>
+            <a:endParaRPr lang="en-US" sz="1250" dirty="0"/>
+          </a:p>
+        </p:txBody>
+      </p:sp>
+      <p:sp>
+        <p:nvSpPr>
+          <p:cNvPr id="19" name="Shape 17"/>
+          <p:cNvSpPr/>
+          <p:nvPr/>
+        </p:nvSpPr>
+        <p:spPr>
+          <a:xfrm>
+            <a:off x="6675120" y="1737360"/>
+            <a:ext cx="4937760" cy="4244862"/>
+          </a:xfrm>
+          <a:prstGeom prst="roundRect">
+            <a:avLst>
+              <a:gd name="adj" fmla="val 1939"/>
+            </a:avLst>
+          </a:prstGeom>
+          <a:solidFill>
+            <a:srgbClr val="10233F"/>
+          </a:solidFill>
+          <a:ln w="12700">
+            <a:solidFill>
+              <a:srgbClr val="1D3A5F"/>
+            </a:solidFill>
+            <a:prstDash val="solid"/>
+          </a:ln>
+        </p:spPr>
+      </p:sp>
       <p:pic>
         <p:nvPicPr>
-          <p:cNvPr id="17" name="Image 0" descr="/home/user/AutoriaSCS-Scrum-cursos/docs/tutoriais/img/ti-acoes-revisao.png">    </p:cNvPr>
+          <p:cNvPr id="20" name="Image 0" descr="/home/user/AutoriaSCS-Scrum-cursos/docs/tutoriais/img/ti-projeto-aprovado.png">    </p:cNvPr>
           <p:cNvPicPr>
             <a:picLocks noChangeAspect="1"/>
           </p:cNvPicPr>
@@ -6164,8 +7124,8 @@
         </p:blipFill>
         <p:spPr>
           <a:xfrm>
-            <a:off x="6876288" y="1892808"/>
-            <a:ext cx="4626864" cy="3243658"/>
+            <a:off x="6784848" y="1847088"/>
+            <a:ext cx="4718304" cy="4025406"/>
           </a:xfrm>
           <a:prstGeom prst="rect">
             <a:avLst/>
@@ -6174,7 +7134,7 @@
       </p:pic>
       <p:sp>
         <p:nvSpPr>
-          <p:cNvPr id="18" name="Text 15"/>
+          <p:cNvPr id="21" name="Text 18"/>
           <p:cNvSpPr/>
           <p:nvPr/>
         </p:nvSpPr>
@@ -6213,7 +7173,7 @@
       </p:sp>
       <p:sp>
         <p:nvSpPr>
-          <p:cNvPr id="19" name="Text 16"/>
+          <p:cNvPr id="22" name="Text 19"/>
           <p:cNvSpPr/>
           <p:nvPr/>
         </p:nvSpPr>
@@ -6244,7 +7204,7 @@
                 <a:ea typeface="Calibri" pitchFamily="34" charset="-122"/>
                 <a:cs typeface="Calibri" pitchFamily="34" charset="-120"/>
               </a:rPr>
-              <a:t>5 / 11</a:t>
+              <a:t>5 / 12</a:t>
             </a:r>
             <a:endParaRPr lang="en-US" sz="950" dirty="0"/>
           </a:p>
@@ -6291,7 +7251,7 @@
         <p:spPr>
           <a:xfrm>
             <a:off x="548640" y="320040"/>
-            <a:ext cx="5486400" cy="292608"/>
+            <a:ext cx="7315200" cy="292608"/>
           </a:xfrm>
           <a:prstGeom prst="rect">
             <a:avLst/>
@@ -6315,7 +7275,7 @@
                 <a:ea typeface="Calibri" pitchFamily="34" charset="-122"/>
                 <a:cs typeface="Calibri" pitchFamily="34" charset="-120"/>
               </a:rPr>
-              <a:t>REVISÃO</a:t>
+              <a:t>PRIMEIRA DECISÃO DA TI</a:t>
             </a:r>
             <a:endParaRPr lang="en-US" sz="1200" dirty="0"/>
           </a:p>
@@ -6354,7 +7314,7 @@
                 <a:ea typeface="Calibri" pitchFamily="34" charset="-122"/>
                 <a:cs typeface="Calibri" pitchFamily="34" charset="-120"/>
               </a:rPr>
-              <a:t>4. Recusar com relatório</a:t>
+              <a:t>3.1 A identificação oficial do curso</a:t>
             </a:r>
             <a:endParaRPr lang="en-US" sz="3000" dirty="0"/>
           </a:p>
@@ -6368,488 +7328,12 @@
         </p:nvSpPr>
         <p:spPr>
           <a:xfrm>
-            <a:off x="640080" y="1783080"/>
-            <a:ext cx="310896" cy="310896"/>
-          </a:xfrm>
-          <a:prstGeom prst="ellipse">
-            <a:avLst/>
-          </a:prstGeom>
-          <a:solidFill>
-            <a:srgbClr val="22D3EE"/>
-          </a:solidFill>
-          <a:ln/>
-        </p:spPr>
-      </p:sp>
-      <p:sp>
-        <p:nvSpPr>
-          <p:cNvPr id="5" name="Text 3"/>
-          <p:cNvSpPr/>
-          <p:nvPr/>
-        </p:nvSpPr>
-        <p:spPr>
-          <a:xfrm>
-            <a:off x="640080" y="1783080"/>
-            <a:ext cx="310896" cy="310896"/>
-          </a:xfrm>
-          <a:prstGeom prst="rect">
-            <a:avLst/>
-          </a:prstGeom>
-          <a:noFill/>
-          <a:ln/>
-        </p:spPr>
-        <p:txBody>
-          <a:bodyPr wrap="square" lIns="0" tIns="0" rIns="0" bIns="0" rtlCol="0" anchor="ctr"/>
-          <a:lstStyle/>
-          <a:p>
-            <a:pPr algn="ctr" indent="0" marL="0">
-              <a:buNone/>
-            </a:pPr>
-            <a:r>
-              <a:rPr lang="en-US" sz="1300" b="1" dirty="0">
-                <a:solidFill>
-                  <a:srgbClr val="07101F"/>
-                </a:solidFill>
-                <a:latin typeface="Calibri" pitchFamily="34" charset="0"/>
-                <a:ea typeface="Calibri" pitchFamily="34" charset="-122"/>
-                <a:cs typeface="Calibri" pitchFamily="34" charset="-120"/>
-              </a:rPr>
-              <a:t>1</a:t>
-            </a:r>
-            <a:endParaRPr lang="en-US" sz="1300" dirty="0"/>
-          </a:p>
-        </p:txBody>
-      </p:sp>
-      <p:sp>
-        <p:nvSpPr>
-          <p:cNvPr id="6" name="Text 4"/>
-          <p:cNvSpPr/>
-          <p:nvPr/>
-        </p:nvSpPr>
-        <p:spPr>
-          <a:xfrm>
-            <a:off x="1097280" y="1737360"/>
-            <a:ext cx="5029200" cy="914400"/>
-          </a:xfrm>
-          <a:prstGeom prst="rect">
-            <a:avLst/>
-          </a:prstGeom>
-          <a:noFill/>
-          <a:ln/>
-        </p:spPr>
-        <p:txBody>
-          <a:bodyPr wrap="square" lIns="0" tIns="0" rIns="0" bIns="0" rtlCol="0" anchor="t"/>
-          <a:lstStyle/>
-          <a:p>
-            <a:pPr indent="0" marL="0">
-              <a:buNone/>
-            </a:pPr>
-            <a:r>
-              <a:rPr lang="en-US" sz="1400" dirty="0">
-                <a:solidFill>
-                  <a:srgbClr val="E8EEF7"/>
-                </a:solidFill>
-                <a:latin typeface="Calibri" pitchFamily="34" charset="0"/>
-                <a:ea typeface="Calibri" pitchFamily="34" charset="-122"/>
-                <a:cs typeface="Calibri" pitchFamily="34" charset="-120"/>
-              </a:rPr>
-              <a:t>Clique no botão vermelho </a:t>
-            </a:r>
-            <a:pPr indent="0" marL="0">
-              <a:buNone/>
-            </a:pPr>
-            <a:r>
-              <a:rPr lang="en-US" sz="1400" b="1" dirty="0">
-                <a:solidFill>
-                  <a:srgbClr val="E8EEF7"/>
-                </a:solidFill>
-                <a:latin typeface="Calibri" pitchFamily="34" charset="0"/>
-                <a:ea typeface="Calibri" pitchFamily="34" charset="-122"/>
-                <a:cs typeface="Calibri" pitchFamily="34" charset="-120"/>
-              </a:rPr>
-              <a:t>Recusar com relatório</a:t>
-            </a:r>
-            <a:pPr indent="0" marL="0">
-              <a:buNone/>
-            </a:pPr>
-            <a:r>
-              <a:rPr lang="en-US" sz="1400" dirty="0">
-                <a:solidFill>
-                  <a:srgbClr val="E8EEF7"/>
-                </a:solidFill>
-                <a:latin typeface="Calibri" pitchFamily="34" charset="0"/>
-                <a:ea typeface="Calibri" pitchFamily="34" charset="-122"/>
-                <a:cs typeface="Calibri" pitchFamily="34" charset="-120"/>
-              </a:rPr>
-              <a:t>;</a:t>
-            </a:r>
-            <a:endParaRPr lang="en-US" sz="1400" dirty="0"/>
-          </a:p>
-        </p:txBody>
-      </p:sp>
-      <p:sp>
-        <p:nvSpPr>
-          <p:cNvPr id="7" name="Shape 5"/>
-          <p:cNvSpPr/>
-          <p:nvPr/>
-        </p:nvSpPr>
-        <p:spPr>
-          <a:xfrm>
-            <a:off x="640080" y="2697480"/>
-            <a:ext cx="310896" cy="310896"/>
-          </a:xfrm>
-          <a:prstGeom prst="ellipse">
-            <a:avLst/>
-          </a:prstGeom>
-          <a:solidFill>
-            <a:srgbClr val="22D3EE"/>
-          </a:solidFill>
-          <a:ln/>
-        </p:spPr>
-      </p:sp>
-      <p:sp>
-        <p:nvSpPr>
-          <p:cNvPr id="8" name="Text 6"/>
-          <p:cNvSpPr/>
-          <p:nvPr/>
-        </p:nvSpPr>
-        <p:spPr>
-          <a:xfrm>
-            <a:off x="640080" y="2697480"/>
-            <a:ext cx="310896" cy="310896"/>
-          </a:xfrm>
-          <a:prstGeom prst="rect">
-            <a:avLst/>
-          </a:prstGeom>
-          <a:noFill/>
-          <a:ln/>
-        </p:spPr>
-        <p:txBody>
-          <a:bodyPr wrap="square" lIns="0" tIns="0" rIns="0" bIns="0" rtlCol="0" anchor="ctr"/>
-          <a:lstStyle/>
-          <a:p>
-            <a:pPr algn="ctr" indent="0" marL="0">
-              <a:buNone/>
-            </a:pPr>
-            <a:r>
-              <a:rPr lang="en-US" sz="1300" b="1" dirty="0">
-                <a:solidFill>
-                  <a:srgbClr val="07101F"/>
-                </a:solidFill>
-                <a:latin typeface="Calibri" pitchFamily="34" charset="0"/>
-                <a:ea typeface="Calibri" pitchFamily="34" charset="-122"/>
-                <a:cs typeface="Calibri" pitchFamily="34" charset="-120"/>
-              </a:rPr>
-              <a:t>2</a:t>
-            </a:r>
-            <a:endParaRPr lang="en-US" sz="1300" dirty="0"/>
-          </a:p>
-        </p:txBody>
-      </p:sp>
-      <p:sp>
-        <p:nvSpPr>
-          <p:cNvPr id="9" name="Text 7"/>
-          <p:cNvSpPr/>
-          <p:nvPr/>
-        </p:nvSpPr>
-        <p:spPr>
-          <a:xfrm>
-            <a:off x="1097280" y="2651760"/>
-            <a:ext cx="5029200" cy="914400"/>
-          </a:xfrm>
-          <a:prstGeom prst="rect">
-            <a:avLst/>
-          </a:prstGeom>
-          <a:noFill/>
-          <a:ln/>
-        </p:spPr>
-        <p:txBody>
-          <a:bodyPr wrap="square" lIns="0" tIns="0" rIns="0" bIns="0" rtlCol="0" anchor="t"/>
-          <a:lstStyle/>
-          <a:p>
-            <a:pPr indent="0" marL="0">
-              <a:buNone/>
-            </a:pPr>
-            <a:r>
-              <a:rPr lang="en-US" sz="1400" dirty="0">
-                <a:solidFill>
-                  <a:srgbClr val="E8EEF7"/>
-                </a:solidFill>
-                <a:latin typeface="Calibri" pitchFamily="34" charset="0"/>
-                <a:ea typeface="Calibri" pitchFamily="34" charset="-122"/>
-                <a:cs typeface="Calibri" pitchFamily="34" charset="-120"/>
-              </a:rPr>
-              <a:t>Em cada linha escolha o </a:t>
-            </a:r>
-            <a:pPr indent="0" marL="0">
-              <a:buNone/>
-            </a:pPr>
-            <a:r>
-              <a:rPr lang="en-US" sz="1400" b="1" dirty="0">
-                <a:solidFill>
-                  <a:srgbClr val="22D3EE"/>
-                </a:solidFill>
-                <a:latin typeface="Calibri" pitchFamily="34" charset="0"/>
-                <a:ea typeface="Calibri" pitchFamily="34" charset="-122"/>
-                <a:cs typeface="Calibri" pitchFamily="34" charset="-120"/>
-              </a:rPr>
-              <a:t>Tipo</a:t>
-            </a:r>
-            <a:pPr indent="0" marL="0">
-              <a:buNone/>
-            </a:pPr>
-            <a:r>
-              <a:rPr lang="en-US" sz="1400" dirty="0">
-                <a:solidFill>
-                  <a:srgbClr val="E8EEF7"/>
-                </a:solidFill>
-                <a:latin typeface="Calibri" pitchFamily="34" charset="0"/>
-                <a:ea typeface="Calibri" pitchFamily="34" charset="-122"/>
-                <a:cs typeface="Calibri" pitchFamily="34" charset="-120"/>
-              </a:rPr>
-              <a:t>: Técnico, Pedagógico, ABNT ou Outro;</a:t>
-            </a:r>
-            <a:endParaRPr lang="en-US" sz="1400" dirty="0"/>
-          </a:p>
-        </p:txBody>
-      </p:sp>
-      <p:sp>
-        <p:nvSpPr>
-          <p:cNvPr id="10" name="Shape 8"/>
-          <p:cNvSpPr/>
-          <p:nvPr/>
-        </p:nvSpPr>
-        <p:spPr>
-          <a:xfrm>
-            <a:off x="640080" y="3611880"/>
-            <a:ext cx="310896" cy="310896"/>
-          </a:xfrm>
-          <a:prstGeom prst="ellipse">
-            <a:avLst/>
-          </a:prstGeom>
-          <a:solidFill>
-            <a:srgbClr val="22D3EE"/>
-          </a:solidFill>
-          <a:ln/>
-        </p:spPr>
-      </p:sp>
-      <p:sp>
-        <p:nvSpPr>
-          <p:cNvPr id="11" name="Text 9"/>
-          <p:cNvSpPr/>
-          <p:nvPr/>
-        </p:nvSpPr>
-        <p:spPr>
-          <a:xfrm>
-            <a:off x="640080" y="3611880"/>
-            <a:ext cx="310896" cy="310896"/>
-          </a:xfrm>
-          <a:prstGeom prst="rect">
-            <a:avLst/>
-          </a:prstGeom>
-          <a:noFill/>
-          <a:ln/>
-        </p:spPr>
-        <p:txBody>
-          <a:bodyPr wrap="square" lIns="0" tIns="0" rIns="0" bIns="0" rtlCol="0" anchor="ctr"/>
-          <a:lstStyle/>
-          <a:p>
-            <a:pPr algn="ctr" indent="0" marL="0">
-              <a:buNone/>
-            </a:pPr>
-            <a:r>
-              <a:rPr lang="en-US" sz="1300" b="1" dirty="0">
-                <a:solidFill>
-                  <a:srgbClr val="07101F"/>
-                </a:solidFill>
-                <a:latin typeface="Calibri" pitchFamily="34" charset="0"/>
-                <a:ea typeface="Calibri" pitchFamily="34" charset="-122"/>
-                <a:cs typeface="Calibri" pitchFamily="34" charset="-120"/>
-              </a:rPr>
-              <a:t>3</a:t>
-            </a:r>
-            <a:endParaRPr lang="en-US" sz="1300" dirty="0"/>
-          </a:p>
-        </p:txBody>
-      </p:sp>
-      <p:sp>
-        <p:nvSpPr>
-          <p:cNvPr id="12" name="Text 10"/>
-          <p:cNvSpPr/>
-          <p:nvPr/>
-        </p:nvSpPr>
-        <p:spPr>
-          <a:xfrm>
-            <a:off x="1097280" y="3566160"/>
-            <a:ext cx="5029200" cy="914400"/>
-          </a:xfrm>
-          <a:prstGeom prst="rect">
-            <a:avLst/>
-          </a:prstGeom>
-          <a:noFill/>
-          <a:ln/>
-        </p:spPr>
-        <p:txBody>
-          <a:bodyPr wrap="square" lIns="0" tIns="0" rIns="0" bIns="0" rtlCol="0" anchor="t"/>
-          <a:lstStyle/>
-          <a:p>
-            <a:pPr indent="0" marL="0">
-              <a:buNone/>
-            </a:pPr>
-            <a:r>
-              <a:rPr lang="en-US" sz="1400" dirty="0">
-                <a:solidFill>
-                  <a:srgbClr val="E8EEF7"/>
-                </a:solidFill>
-                <a:latin typeface="Calibri" pitchFamily="34" charset="0"/>
-                <a:ea typeface="Calibri" pitchFamily="34" charset="-122"/>
-                <a:cs typeface="Calibri" pitchFamily="34" charset="-120"/>
-              </a:rPr>
-              <a:t>Descreva o ajuste com precisão (ex.: "Slide 12 do Módulo 3: corrigir o ano da referência");</a:t>
-            </a:r>
-            <a:endParaRPr lang="en-US" sz="1400" dirty="0"/>
-          </a:p>
-        </p:txBody>
-      </p:sp>
-      <p:sp>
-        <p:nvSpPr>
-          <p:cNvPr id="13" name="Shape 11"/>
-          <p:cNvSpPr/>
-          <p:nvPr/>
-        </p:nvSpPr>
-        <p:spPr>
-          <a:xfrm>
-            <a:off x="640080" y="4526280"/>
-            <a:ext cx="310896" cy="310896"/>
-          </a:xfrm>
-          <a:prstGeom prst="ellipse">
-            <a:avLst/>
-          </a:prstGeom>
-          <a:solidFill>
-            <a:srgbClr val="22D3EE"/>
-          </a:solidFill>
-          <a:ln/>
-        </p:spPr>
-      </p:sp>
-      <p:sp>
-        <p:nvSpPr>
-          <p:cNvPr id="14" name="Text 12"/>
-          <p:cNvSpPr/>
-          <p:nvPr/>
-        </p:nvSpPr>
-        <p:spPr>
-          <a:xfrm>
-            <a:off x="640080" y="4526280"/>
-            <a:ext cx="310896" cy="310896"/>
-          </a:xfrm>
-          <a:prstGeom prst="rect">
-            <a:avLst/>
-          </a:prstGeom>
-          <a:noFill/>
-          <a:ln/>
-        </p:spPr>
-        <p:txBody>
-          <a:bodyPr wrap="square" lIns="0" tIns="0" rIns="0" bIns="0" rtlCol="0" anchor="ctr"/>
-          <a:lstStyle/>
-          <a:p>
-            <a:pPr algn="ctr" indent="0" marL="0">
-              <a:buNone/>
-            </a:pPr>
-            <a:r>
-              <a:rPr lang="en-US" sz="1300" b="1" dirty="0">
-                <a:solidFill>
-                  <a:srgbClr val="07101F"/>
-                </a:solidFill>
-                <a:latin typeface="Calibri" pitchFamily="34" charset="0"/>
-                <a:ea typeface="Calibri" pitchFamily="34" charset="-122"/>
-                <a:cs typeface="Calibri" pitchFamily="34" charset="-120"/>
-              </a:rPr>
-              <a:t>4</a:t>
-            </a:r>
-            <a:endParaRPr lang="en-US" sz="1300" dirty="0"/>
-          </a:p>
-        </p:txBody>
-      </p:sp>
-      <p:sp>
-        <p:nvSpPr>
-          <p:cNvPr id="15" name="Text 13"/>
-          <p:cNvSpPr/>
-          <p:nvPr/>
-        </p:nvSpPr>
-        <p:spPr>
-          <a:xfrm>
-            <a:off x="1097280" y="4480560"/>
-            <a:ext cx="5029200" cy="914400"/>
-          </a:xfrm>
-          <a:prstGeom prst="rect">
-            <a:avLst/>
-          </a:prstGeom>
-          <a:noFill/>
-          <a:ln/>
-        </p:spPr>
-        <p:txBody>
-          <a:bodyPr wrap="square" lIns="0" tIns="0" rIns="0" bIns="0" rtlCol="0" anchor="t"/>
-          <a:lstStyle/>
-          <a:p>
-            <a:pPr indent="0" marL="0">
-              <a:buNone/>
-            </a:pPr>
-            <a:r>
-              <a:rPr lang="en-US" sz="1400" dirty="0">
-                <a:solidFill>
-                  <a:srgbClr val="E8EEF7"/>
-                </a:solidFill>
-                <a:latin typeface="Calibri" pitchFamily="34" charset="0"/>
-                <a:ea typeface="Calibri" pitchFamily="34" charset="-122"/>
-                <a:cs typeface="Calibri" pitchFamily="34" charset="-120"/>
-              </a:rPr>
-              <a:t>Linhas em branco são ignoradas. Clique em </a:t>
-            </a:r>
-            <a:pPr indent="0" marL="0">
-              <a:buNone/>
-            </a:pPr>
-            <a:r>
-              <a:rPr lang="en-US" sz="1400" b="1" dirty="0">
-                <a:solidFill>
-                  <a:srgbClr val="E8EEF7"/>
-                </a:solidFill>
-                <a:latin typeface="Calibri" pitchFamily="34" charset="0"/>
-                <a:ea typeface="Calibri" pitchFamily="34" charset="-122"/>
-                <a:cs typeface="Calibri" pitchFamily="34" charset="-120"/>
-              </a:rPr>
-              <a:t>Confirmar Recusa</a:t>
-            </a:r>
-            <a:pPr indent="0" marL="0">
-              <a:buNone/>
-            </a:pPr>
-            <a:r>
-              <a:rPr lang="en-US" sz="1400" dirty="0">
-                <a:solidFill>
-                  <a:srgbClr val="E8EEF7"/>
-                </a:solidFill>
-                <a:latin typeface="Calibri" pitchFamily="34" charset="0"/>
-                <a:ea typeface="Calibri" pitchFamily="34" charset="-122"/>
-                <a:cs typeface="Calibri" pitchFamily="34" charset="-120"/>
-              </a:rPr>
-              <a:t>.</a:t>
-            </a:r>
-            <a:endParaRPr lang="en-US" sz="1400" dirty="0"/>
-          </a:p>
-        </p:txBody>
-      </p:sp>
-      <p:sp>
-        <p:nvSpPr>
-          <p:cNvPr id="16" name="Shape 14"/>
-          <p:cNvSpPr/>
-          <p:nvPr/>
-        </p:nvSpPr>
-        <p:spPr>
-          <a:xfrm>
-            <a:off x="640080" y="5212080"/>
-            <a:ext cx="5486400" cy="1005840"/>
+            <a:off x="972651" y="1508760"/>
+            <a:ext cx="10307659" cy="1828800"/>
           </a:xfrm>
           <a:prstGeom prst="roundRect">
             <a:avLst>
-              <a:gd name="adj" fmla="val 8182"/>
+              <a:gd name="adj" fmla="val 4500"/>
             </a:avLst>
           </a:prstGeom>
           <a:solidFill>
@@ -6863,101 +7347,110 @@
           </a:ln>
         </p:spPr>
       </p:sp>
-      <p:sp>
-        <p:nvSpPr>
-          <p:cNvPr id="17" name="Text 15"/>
-          <p:cNvSpPr/>
-          <p:nvPr/>
-        </p:nvSpPr>
-        <p:spPr>
-          <a:xfrm>
-            <a:off x="841248" y="5358384"/>
-            <a:ext cx="5084064" cy="329184"/>
-          </a:xfrm>
-          <a:prstGeom prst="rect">
-            <a:avLst/>
-          </a:prstGeom>
-          <a:noFill/>
-          <a:ln/>
-        </p:spPr>
-        <p:txBody>
-          <a:bodyPr wrap="square" lIns="0" tIns="0" rIns="0" bIns="0" rtlCol="0" anchor="ctr"/>
-          <a:lstStyle/>
-          <a:p>
-            <a:pPr indent="0" marL="0">
-              <a:buNone/>
-            </a:pPr>
-            <a:r>
-              <a:rPr lang="en-US" sz="1400" b="1" dirty="0">
-                <a:solidFill>
-                  <a:srgbClr val="22D3EE"/>
-                </a:solidFill>
-                <a:latin typeface="Calibri" pitchFamily="34" charset="0"/>
-                <a:ea typeface="Calibri" pitchFamily="34" charset="-122"/>
-                <a:cs typeface="Calibri" pitchFamily="34" charset="-120"/>
-              </a:rPr>
-              <a:t>Tudo numa operação só</a:t>
-            </a:r>
-            <a:endParaRPr lang="en-US" sz="1400" dirty="0"/>
-          </a:p>
-        </p:txBody>
-      </p:sp>
-      <p:sp>
-        <p:nvSpPr>
-          <p:cNvPr id="18" name="Text 16"/>
-          <p:cNvSpPr/>
-          <p:nvPr/>
-        </p:nvSpPr>
-        <p:spPr>
-          <a:xfrm>
-            <a:off x="841248" y="5687568"/>
-            <a:ext cx="5084064" cy="402336"/>
-          </a:xfrm>
-          <a:prstGeom prst="rect">
-            <a:avLst/>
-          </a:prstGeom>
-          <a:noFill/>
-          <a:ln/>
-        </p:spPr>
-        <p:txBody>
-          <a:bodyPr wrap="square" lIns="0" tIns="0" rIns="0" bIns="0" rtlCol="0" anchor="t"/>
-          <a:lstStyle/>
-          <a:p>
-            <a:pPr indent="0" marL="0">
-              <a:lnSpc>
-                <a:spcPct val="112000"/>
-              </a:lnSpc>
-              <a:buNone/>
-            </a:pPr>
-            <a:r>
-              <a:rPr lang="en-US" sz="1250" dirty="0">
-                <a:solidFill>
-                  <a:srgbClr val="E8EEF7"/>
-                </a:solidFill>
-                <a:latin typeface="Calibri" pitchFamily="34" charset="0"/>
-                <a:ea typeface="Calibri" pitchFamily="34" charset="-122"/>
-                <a:cs typeface="Calibri" pitchFamily="34" charset="-120"/>
-              </a:rPr>
-              <a:t>Registra os apontamentos, muda o status e envia ao formador o e-mail com a lista completa.</a:t>
-            </a:r>
-            <a:endParaRPr lang="en-US" sz="1250" dirty="0"/>
-          </a:p>
-        </p:txBody>
-      </p:sp>
-      <p:sp>
-        <p:nvSpPr>
-          <p:cNvPr id="19" name="Shape 17"/>
-          <p:cNvSpPr/>
-          <p:nvPr/>
-        </p:nvSpPr>
-        <p:spPr>
-          <a:xfrm>
-            <a:off x="6672598" y="1554480"/>
-            <a:ext cx="4759925" cy="4663440"/>
+      <p:pic>
+        <p:nvPicPr>
+          <p:cNvPr id="5" name="Image 0" descr="/home/user/AutoriaSCS-Scrum-cursos/docs/tutoriais/img/curso-identificacao.png">    </p:cNvPr>
+          <p:cNvPicPr>
+            <a:picLocks noChangeAspect="1"/>
+          </p:cNvPicPr>
+          <p:nvPr/>
+        </p:nvPicPr>
+        <p:blipFill>
+          <a:blip r:embed="rId1"/>
+          <a:stretch>
+            <a:fillRect/>
+          </a:stretch>
+        </p:blipFill>
+        <p:spPr>
+          <a:xfrm>
+            <a:off x="1082379" y="1618488"/>
+            <a:ext cx="10088203" cy="1609344"/>
+          </a:xfrm>
+          <a:prstGeom prst="rect">
+            <a:avLst/>
+          </a:prstGeom>
+        </p:spPr>
+      </p:pic>
+      <p:sp>
+        <p:nvSpPr>
+          <p:cNvPr id="6" name="Shape 3"/>
+          <p:cNvSpPr/>
+          <p:nvPr/>
+        </p:nvSpPr>
+        <p:spPr>
+          <a:xfrm>
+            <a:off x="640080" y="3566160"/>
+            <a:ext cx="10972800" cy="914400"/>
           </a:xfrm>
           <a:prstGeom prst="roundRect">
             <a:avLst>
-              <a:gd name="adj" fmla="val 1765"/>
+              <a:gd name="adj" fmla="val 9000"/>
+            </a:avLst>
+          </a:prstGeom>
+          <a:solidFill>
+            <a:srgbClr val="07101F"/>
+          </a:solidFill>
+          <a:ln w="12700">
+            <a:solidFill>
+              <a:srgbClr val="1D3A5F"/>
+            </a:solidFill>
+            <a:prstDash val="solid"/>
+          </a:ln>
+        </p:spPr>
+      </p:sp>
+      <p:sp>
+        <p:nvSpPr>
+          <p:cNvPr id="7" name="Text 4"/>
+          <p:cNvSpPr/>
+          <p:nvPr/>
+        </p:nvSpPr>
+        <p:spPr>
+          <a:xfrm>
+            <a:off x="640080" y="3566160"/>
+            <a:ext cx="10972800" cy="914400"/>
+          </a:xfrm>
+          <a:prstGeom prst="rect">
+            <a:avLst/>
+          </a:prstGeom>
+          <a:noFill/>
+          <a:ln/>
+        </p:spPr>
+        <p:txBody>
+          <a:bodyPr wrap="square" lIns="0" tIns="0" rIns="0" bIns="0" rtlCol="0" anchor="ctr"/>
+          <a:lstStyle/>
+          <a:p>
+            <a:pPr algn="ctr" indent="0" marL="0">
+              <a:buNone/>
+            </a:pPr>
+            <a:r>
+              <a:rPr lang="en-US" sz="2000" b="1" dirty="0">
+                <a:solidFill>
+                  <a:srgbClr val="22D3EE"/>
+                </a:solidFill>
+                <a:latin typeface="Calibri" pitchFamily="34" charset="0"/>
+                <a:ea typeface="Calibri" pitchFamily="34" charset="-122"/>
+                <a:cs typeface="Calibri" pitchFamily="34" charset="-120"/>
+              </a:rPr>
+              <a:t>Nome do curso  -  Nome dos formadores  -  Carga Horária do curso</a:t>
+            </a:r>
+            <a:endParaRPr lang="en-US" sz="2000" dirty="0"/>
+          </a:p>
+        </p:txBody>
+      </p:sp>
+      <p:sp>
+        <p:nvSpPr>
+          <p:cNvPr id="8" name="Shape 5"/>
+          <p:cNvSpPr/>
+          <p:nvPr/>
+        </p:nvSpPr>
+        <p:spPr>
+          <a:xfrm>
+            <a:off x="640080" y="4663440"/>
+            <a:ext cx="5394960" cy="1371600"/>
+          </a:xfrm>
+          <a:prstGeom prst="roundRect">
+            <a:avLst>
+              <a:gd name="adj" fmla="val 6000"/>
             </a:avLst>
           </a:prstGeom>
           <a:solidFill>
@@ -6971,33 +7464,198 @@
           </a:ln>
         </p:spPr>
       </p:sp>
-      <p:pic>
-        <p:nvPicPr>
-          <p:cNvPr id="20" name="Image 0" descr="/home/user/AutoriaSCS-Scrum-cursos/docs/tutoriais/img/ti-modal-recusa.png">    </p:cNvPr>
-          <p:cNvPicPr>
-            <a:picLocks noChangeAspect="1"/>
-          </p:cNvPicPr>
-          <p:nvPr/>
-        </p:nvPicPr>
-        <p:blipFill>
-          <a:blip r:embed="rId1"/>
-          <a:stretch>
-            <a:fillRect/>
-          </a:stretch>
-        </p:blipFill>
-        <p:spPr>
-          <a:xfrm>
-            <a:off x="6782326" y="1664208"/>
-            <a:ext cx="4540469" cy="4443984"/>
-          </a:xfrm>
-          <a:prstGeom prst="rect">
-            <a:avLst/>
-          </a:prstGeom>
-        </p:spPr>
-      </p:pic>
-      <p:sp>
-        <p:nvSpPr>
-          <p:cNvPr id="21" name="Text 18"/>
+      <p:sp>
+        <p:nvSpPr>
+          <p:cNvPr id="9" name="Text 6"/>
+          <p:cNvSpPr/>
+          <p:nvPr/>
+        </p:nvSpPr>
+        <p:spPr>
+          <a:xfrm>
+            <a:off x="841248" y="4809744"/>
+            <a:ext cx="4992624" cy="329184"/>
+          </a:xfrm>
+          <a:prstGeom prst="rect">
+            <a:avLst/>
+          </a:prstGeom>
+          <a:noFill/>
+          <a:ln/>
+        </p:spPr>
+        <p:txBody>
+          <a:bodyPr wrap="square" lIns="0" tIns="0" rIns="0" bIns="0" rtlCol="0" anchor="ctr"/>
+          <a:lstStyle/>
+          <a:p>
+            <a:pPr indent="0" marL="0">
+              <a:buNone/>
+            </a:pPr>
+            <a:r>
+              <a:rPr lang="en-US" sz="1400" b="1" dirty="0">
+                <a:solidFill>
+                  <a:srgbClr val="22D3EE"/>
+                </a:solidFill>
+                <a:latin typeface="Calibri" pitchFamily="34" charset="0"/>
+                <a:ea typeface="Calibri" pitchFamily="34" charset="-122"/>
+                <a:cs typeface="Calibri" pitchFamily="34" charset="-120"/>
+              </a:rPr>
+              <a:t>Onde ela aparece</a:t>
+            </a:r>
+            <a:endParaRPr lang="en-US" sz="1400" dirty="0"/>
+          </a:p>
+        </p:txBody>
+      </p:sp>
+      <p:sp>
+        <p:nvSpPr>
+          <p:cNvPr id="10" name="Text 7"/>
+          <p:cNvSpPr/>
+          <p:nvPr/>
+        </p:nvSpPr>
+        <p:spPr>
+          <a:xfrm>
+            <a:off x="841248" y="5138928"/>
+            <a:ext cx="4992624" cy="768096"/>
+          </a:xfrm>
+          <a:prstGeom prst="rect">
+            <a:avLst/>
+          </a:prstGeom>
+          <a:noFill/>
+          <a:ln/>
+        </p:spPr>
+        <p:txBody>
+          <a:bodyPr wrap="square" lIns="0" tIns="0" rIns="0" bIns="0" rtlCol="0" anchor="t"/>
+          <a:lstStyle/>
+          <a:p>
+            <a:pPr indent="0" marL="0">
+              <a:lnSpc>
+                <a:spcPct val="112000"/>
+              </a:lnSpc>
+              <a:buNone/>
+            </a:pPr>
+            <a:r>
+              <a:rPr lang="en-US" sz="1300" dirty="0">
+                <a:solidFill>
+                  <a:srgbClr val="E8EEF7"/>
+                </a:solidFill>
+                <a:latin typeface="Calibri" pitchFamily="34" charset="0"/>
+                <a:ea typeface="Calibri" pitchFamily="34" charset="-122"/>
+                <a:cs typeface="Calibri" pitchFamily="34" charset="-120"/>
+              </a:rPr>
+              <a:t>No topo da página do curso, no e-mail enviado à MB e à TI, e como nome do pacote ZIP de materiais.</a:t>
+            </a:r>
+            <a:endParaRPr lang="en-US" sz="1300" dirty="0"/>
+          </a:p>
+        </p:txBody>
+      </p:sp>
+      <p:sp>
+        <p:nvSpPr>
+          <p:cNvPr id="11" name="Shape 8"/>
+          <p:cNvSpPr/>
+          <p:nvPr/>
+        </p:nvSpPr>
+        <p:spPr>
+          <a:xfrm>
+            <a:off x="6217920" y="4663440"/>
+            <a:ext cx="5394960" cy="1371600"/>
+          </a:xfrm>
+          <a:prstGeom prst="roundRect">
+            <a:avLst>
+              <a:gd name="adj" fmla="val 6000"/>
+            </a:avLst>
+          </a:prstGeom>
+          <a:solidFill>
+            <a:srgbClr val="10233F"/>
+          </a:solidFill>
+          <a:ln w="12700">
+            <a:solidFill>
+              <a:srgbClr val="1D3A5F"/>
+            </a:solidFill>
+            <a:prstDash val="solid"/>
+          </a:ln>
+        </p:spPr>
+      </p:sp>
+      <p:sp>
+        <p:nvSpPr>
+          <p:cNvPr id="12" name="Text 9"/>
+          <p:cNvSpPr/>
+          <p:nvPr/>
+        </p:nvSpPr>
+        <p:spPr>
+          <a:xfrm>
+            <a:off x="6419088" y="4809744"/>
+            <a:ext cx="4992624" cy="329184"/>
+          </a:xfrm>
+          <a:prstGeom prst="rect">
+            <a:avLst/>
+          </a:prstGeom>
+          <a:noFill/>
+          <a:ln/>
+        </p:spPr>
+        <p:txBody>
+          <a:bodyPr wrap="square" lIns="0" tIns="0" rIns="0" bIns="0" rtlCol="0" anchor="ctr"/>
+          <a:lstStyle/>
+          <a:p>
+            <a:pPr indent="0" marL="0">
+              <a:buNone/>
+            </a:pPr>
+            <a:r>
+              <a:rPr lang="en-US" sz="1400" b="1" dirty="0">
+                <a:solidFill>
+                  <a:srgbClr val="22D3EE"/>
+                </a:solidFill>
+                <a:latin typeface="Calibri" pitchFamily="34" charset="0"/>
+                <a:ea typeface="Calibri" pitchFamily="34" charset="-122"/>
+                <a:cs typeface="Calibri" pitchFamily="34" charset="-120"/>
+              </a:rPr>
+              <a:t>Para que serve</a:t>
+            </a:r>
+            <a:endParaRPr lang="en-US" sz="1400" dirty="0"/>
+          </a:p>
+        </p:txBody>
+      </p:sp>
+      <p:sp>
+        <p:nvSpPr>
+          <p:cNvPr id="13" name="Text 10"/>
+          <p:cNvSpPr/>
+          <p:nvPr/>
+        </p:nvSpPr>
+        <p:spPr>
+          <a:xfrm>
+            <a:off x="6419088" y="5138928"/>
+            <a:ext cx="4992624" cy="768096"/>
+          </a:xfrm>
+          <a:prstGeom prst="rect">
+            <a:avLst/>
+          </a:prstGeom>
+          <a:noFill/>
+          <a:ln/>
+        </p:spPr>
+        <p:txBody>
+          <a:bodyPr wrap="square" lIns="0" tIns="0" rIns="0" bIns="0" rtlCol="0" anchor="t"/>
+          <a:lstStyle/>
+          <a:p>
+            <a:pPr indent="0" marL="0">
+              <a:lnSpc>
+                <a:spcPct val="112000"/>
+              </a:lnSpc>
+              <a:buNone/>
+            </a:pPr>
+            <a:r>
+              <a:rPr lang="en-US" sz="1300" dirty="0">
+                <a:solidFill>
+                  <a:srgbClr val="E8EEF7"/>
+                </a:solidFill>
+                <a:latin typeface="Calibri" pitchFamily="34" charset="0"/>
+                <a:ea typeface="Calibri" pitchFamily="34" charset="-122"/>
+                <a:cs typeface="Calibri" pitchFamily="34" charset="-120"/>
+              </a:rPr>
+              <a:t>É o nome padronizado da pasta do curso — a MB Estúdios usa exatamente esse texto.</a:t>
+            </a:r>
+            <a:endParaRPr lang="en-US" sz="1300" dirty="0"/>
+          </a:p>
+        </p:txBody>
+      </p:sp>
+      <p:sp>
+        <p:nvSpPr>
+          <p:cNvPr id="14" name="Text 11"/>
           <p:cNvSpPr/>
           <p:nvPr/>
         </p:nvSpPr>
@@ -7036,7 +7694,7 @@
       </p:sp>
       <p:sp>
         <p:nvSpPr>
-          <p:cNvPr id="22" name="Text 19"/>
+          <p:cNvPr id="15" name="Text 12"/>
           <p:cNvSpPr/>
           <p:nvPr/>
         </p:nvSpPr>
@@ -7067,7 +7725,7 @@
                 <a:ea typeface="Calibri" pitchFamily="34" charset="-122"/>
                 <a:cs typeface="Calibri" pitchFamily="34" charset="-120"/>
               </a:rPr>
-              <a:t>6 / 11</a:t>
+              <a:t>6 / 12</a:t>
             </a:r>
             <a:endParaRPr lang="en-US" sz="950" dirty="0"/>
           </a:p>
@@ -7138,7 +7796,7 @@
                 <a:ea typeface="Calibri" pitchFamily="34" charset="-122"/>
                 <a:cs typeface="Calibri" pitchFamily="34" charset="-120"/>
               </a:rPr>
-              <a:t>FLUXO</a:t>
+              <a:t>REVISÃO</a:t>
             </a:r>
             <a:endParaRPr lang="en-US" sz="1200" dirty="0"/>
           </a:p>
@@ -7177,7 +7835,7 @@
                 <a:ea typeface="Calibri" pitchFamily="34" charset="-122"/>
                 <a:cs typeface="Calibri" pitchFamily="34" charset="-120"/>
               </a:rPr>
-              <a:t>5. Aprovar e encaminhar à MB</a:t>
+              <a:t>4. Revisar um curso</a:t>
             </a:r>
             <a:endParaRPr lang="en-US" sz="3000" dirty="0"/>
           </a:p>
@@ -7185,25 +7843,98 @@
       </p:sp>
       <p:sp>
         <p:nvSpPr>
-          <p:cNvPr id="4" name="Text 2"/>
-          <p:cNvSpPr/>
-          <p:nvPr/>
-        </p:nvSpPr>
-        <p:spPr>
-          <a:xfrm>
-            <a:off x="640080" y="1645920"/>
-            <a:ext cx="7315200" cy="320040"/>
-          </a:xfrm>
-          <a:prstGeom prst="rect">
-            <a:avLst/>
-          </a:prstGeom>
-          <a:noFill/>
-          <a:ln/>
-        </p:spPr>
-        <p:txBody>
-          <a:bodyPr wrap="square" lIns="0" tIns="0" rIns="0" bIns="0" rtlCol="0" anchor="ctr"/>
-          <a:lstStyle/>
-          <a:p>
+          <p:cNvPr id="4" name="Shape 2"/>
+          <p:cNvSpPr/>
+          <p:nvPr/>
+        </p:nvSpPr>
+        <p:spPr>
+          <a:xfrm>
+            <a:off x="640080" y="1828800"/>
+            <a:ext cx="310896" cy="310896"/>
+          </a:xfrm>
+          <a:prstGeom prst="ellipse">
+            <a:avLst/>
+          </a:prstGeom>
+          <a:solidFill>
+            <a:srgbClr val="22D3EE"/>
+          </a:solidFill>
+          <a:ln/>
+        </p:spPr>
+      </p:sp>
+      <p:sp>
+        <p:nvSpPr>
+          <p:cNvPr id="5" name="Text 3"/>
+          <p:cNvSpPr/>
+          <p:nvPr/>
+        </p:nvSpPr>
+        <p:spPr>
+          <a:xfrm>
+            <a:off x="640080" y="1828800"/>
+            <a:ext cx="310896" cy="310896"/>
+          </a:xfrm>
+          <a:prstGeom prst="rect">
+            <a:avLst/>
+          </a:prstGeom>
+          <a:noFill/>
+          <a:ln/>
+        </p:spPr>
+        <p:txBody>
+          <a:bodyPr wrap="square" lIns="0" tIns="0" rIns="0" bIns="0" rtlCol="0" anchor="ctr"/>
+          <a:lstStyle/>
+          <a:p>
+            <a:pPr algn="ctr" indent="0" marL="0">
+              <a:buNone/>
+            </a:pPr>
+            <a:r>
+              <a:rPr lang="en-US" sz="1300" b="1" dirty="0">
+                <a:solidFill>
+                  <a:srgbClr val="07101F"/>
+                </a:solidFill>
+                <a:latin typeface="Calibri" pitchFamily="34" charset="0"/>
+                <a:ea typeface="Calibri" pitchFamily="34" charset="-122"/>
+                <a:cs typeface="Calibri" pitchFamily="34" charset="-120"/>
+              </a:rPr>
+              <a:t>1</a:t>
+            </a:r>
+            <a:endParaRPr lang="en-US" sz="1300" dirty="0"/>
+          </a:p>
+        </p:txBody>
+      </p:sp>
+      <p:sp>
+        <p:nvSpPr>
+          <p:cNvPr id="6" name="Text 4"/>
+          <p:cNvSpPr/>
+          <p:nvPr/>
+        </p:nvSpPr>
+        <p:spPr>
+          <a:xfrm>
+            <a:off x="1097280" y="1783080"/>
+            <a:ext cx="5394960" cy="1097280"/>
+          </a:xfrm>
+          <a:prstGeom prst="rect">
+            <a:avLst/>
+          </a:prstGeom>
+          <a:noFill/>
+          <a:ln/>
+        </p:spPr>
+        <p:txBody>
+          <a:bodyPr wrap="square" lIns="0" tIns="0" rIns="0" bIns="0" rtlCol="0" anchor="t"/>
+          <a:lstStyle/>
+          <a:p>
+            <a:pPr indent="0" marL="0">
+              <a:buNone/>
+            </a:pPr>
+            <a:r>
+              <a:rPr lang="en-US" sz="1400" dirty="0">
+                <a:solidFill>
+                  <a:srgbClr val="E8EEF7"/>
+                </a:solidFill>
+                <a:latin typeface="Calibri" pitchFamily="34" charset="0"/>
+                <a:ea typeface="Calibri" pitchFamily="34" charset="-122"/>
+                <a:cs typeface="Calibri" pitchFamily="34" charset="-120"/>
+              </a:rPr>
+              <a:t>O formador move para </a:t>
+            </a:r>
             <a:pPr indent="0" marL="0">
               <a:buNone/>
             </a:pPr>
@@ -7216,7 +7947,21 @@
                 <a:ea typeface="Calibri" pitchFamily="34" charset="-122"/>
                 <a:cs typeface="Calibri" pitchFamily="34" charset="-120"/>
               </a:rPr>
-              <a:t>O ciclo da revisão</a:t>
+              <a:t>Pronto para Análise</a:t>
+            </a:r>
+            <a:pPr indent="0" marL="0">
+              <a:buNone/>
+            </a:pPr>
+            <a:r>
+              <a:rPr lang="en-US" sz="1400" dirty="0">
+                <a:solidFill>
+                  <a:srgbClr val="E8EEF7"/>
+                </a:solidFill>
+                <a:latin typeface="Calibri" pitchFamily="34" charset="0"/>
+                <a:ea typeface="Calibri" pitchFamily="34" charset="-122"/>
+                <a:cs typeface="Calibri" pitchFamily="34" charset="-120"/>
+              </a:rPr>
+              <a:t> → a TI recebe e-mail;</a:t>
             </a:r>
             <a:endParaRPr lang="en-US" sz="1400" dirty="0"/>
           </a:p>
@@ -7224,24 +7969,430 @@
       </p:sp>
       <p:sp>
         <p:nvSpPr>
-          <p:cNvPr id="5" name="Shape 3"/>
-          <p:cNvSpPr/>
-          <p:nvPr/>
-        </p:nvSpPr>
-        <p:spPr>
-          <a:xfrm>
-            <a:off x="640080" y="2011680"/>
-            <a:ext cx="1784909" cy="402336"/>
+          <p:cNvPr id="7" name="Shape 5"/>
+          <p:cNvSpPr/>
+          <p:nvPr/>
+        </p:nvSpPr>
+        <p:spPr>
+          <a:xfrm>
+            <a:off x="640080" y="2926080"/>
+            <a:ext cx="310896" cy="310896"/>
+          </a:xfrm>
+          <a:prstGeom prst="ellipse">
+            <a:avLst/>
+          </a:prstGeom>
+          <a:solidFill>
+            <a:srgbClr val="22D3EE"/>
+          </a:solidFill>
+          <a:ln/>
+        </p:spPr>
+      </p:sp>
+      <p:sp>
+        <p:nvSpPr>
+          <p:cNvPr id="8" name="Text 6"/>
+          <p:cNvSpPr/>
+          <p:nvPr/>
+        </p:nvSpPr>
+        <p:spPr>
+          <a:xfrm>
+            <a:off x="640080" y="2926080"/>
+            <a:ext cx="310896" cy="310896"/>
+          </a:xfrm>
+          <a:prstGeom prst="rect">
+            <a:avLst/>
+          </a:prstGeom>
+          <a:noFill/>
+          <a:ln/>
+        </p:spPr>
+        <p:txBody>
+          <a:bodyPr wrap="square" lIns="0" tIns="0" rIns="0" bIns="0" rtlCol="0" anchor="ctr"/>
+          <a:lstStyle/>
+          <a:p>
+            <a:pPr algn="ctr" indent="0" marL="0">
+              <a:buNone/>
+            </a:pPr>
+            <a:r>
+              <a:rPr lang="en-US" sz="1300" b="1" dirty="0">
+                <a:solidFill>
+                  <a:srgbClr val="07101F"/>
+                </a:solidFill>
+                <a:latin typeface="Calibri" pitchFamily="34" charset="0"/>
+                <a:ea typeface="Calibri" pitchFamily="34" charset="-122"/>
+                <a:cs typeface="Calibri" pitchFamily="34" charset="-120"/>
+              </a:rPr>
+              <a:t>2</a:t>
+            </a:r>
+            <a:endParaRPr lang="en-US" sz="1300" dirty="0"/>
+          </a:p>
+        </p:txBody>
+      </p:sp>
+      <p:sp>
+        <p:nvSpPr>
+          <p:cNvPr id="9" name="Text 7"/>
+          <p:cNvSpPr/>
+          <p:nvPr/>
+        </p:nvSpPr>
+        <p:spPr>
+          <a:xfrm>
+            <a:off x="1097280" y="2880360"/>
+            <a:ext cx="5394960" cy="1097280"/>
+          </a:xfrm>
+          <a:prstGeom prst="rect">
+            <a:avLst/>
+          </a:prstGeom>
+          <a:noFill/>
+          <a:ln/>
+        </p:spPr>
+        <p:txBody>
+          <a:bodyPr wrap="square" lIns="0" tIns="0" rIns="0" bIns="0" rtlCol="0" anchor="t"/>
+          <a:lstStyle/>
+          <a:p>
+            <a:pPr indent="0" marL="0">
+              <a:buNone/>
+            </a:pPr>
+            <a:r>
+              <a:rPr lang="en-US" sz="1400" dirty="0">
+                <a:solidFill>
+                  <a:srgbClr val="E8EEF7"/>
+                </a:solidFill>
+                <a:latin typeface="Calibri" pitchFamily="34" charset="0"/>
+                <a:ea typeface="Calibri" pitchFamily="34" charset="-122"/>
+                <a:cs typeface="Calibri" pitchFamily="34" charset="-120"/>
+              </a:rPr>
+              <a:t>Abra o curso e mova para </a:t>
+            </a:r>
+            <a:pPr indent="0" marL="0">
+              <a:buNone/>
+            </a:pPr>
+            <a:r>
+              <a:rPr lang="en-US" sz="1400" b="1" dirty="0">
+                <a:solidFill>
+                  <a:srgbClr val="22D3EE"/>
+                </a:solidFill>
+                <a:latin typeface="Calibri" pitchFamily="34" charset="0"/>
+                <a:ea typeface="Calibri" pitchFamily="34" charset="-122"/>
+                <a:cs typeface="Calibri" pitchFamily="34" charset="-120"/>
+              </a:rPr>
+              <a:t>Em Revisão</a:t>
+            </a:r>
+            <a:pPr indent="0" marL="0">
+              <a:buNone/>
+            </a:pPr>
+            <a:r>
+              <a:rPr lang="en-US" sz="1400" dirty="0">
+                <a:solidFill>
+                  <a:srgbClr val="E8EEF7"/>
+                </a:solidFill>
+                <a:latin typeface="Calibri" pitchFamily="34" charset="0"/>
+                <a:ea typeface="Calibri" pitchFamily="34" charset="-122"/>
+                <a:cs typeface="Calibri" pitchFamily="34" charset="-120"/>
+              </a:rPr>
+              <a:t>;</a:t>
+            </a:r>
+            <a:endParaRPr lang="en-US" sz="1400" dirty="0"/>
+          </a:p>
+        </p:txBody>
+      </p:sp>
+      <p:sp>
+        <p:nvSpPr>
+          <p:cNvPr id="10" name="Shape 8"/>
+          <p:cNvSpPr/>
+          <p:nvPr/>
+        </p:nvSpPr>
+        <p:spPr>
+          <a:xfrm>
+            <a:off x="640080" y="4023360"/>
+            <a:ext cx="310896" cy="310896"/>
+          </a:xfrm>
+          <a:prstGeom prst="ellipse">
+            <a:avLst/>
+          </a:prstGeom>
+          <a:solidFill>
+            <a:srgbClr val="22D3EE"/>
+          </a:solidFill>
+          <a:ln/>
+        </p:spPr>
+      </p:sp>
+      <p:sp>
+        <p:nvSpPr>
+          <p:cNvPr id="11" name="Text 9"/>
+          <p:cNvSpPr/>
+          <p:nvPr/>
+        </p:nvSpPr>
+        <p:spPr>
+          <a:xfrm>
+            <a:off x="640080" y="4023360"/>
+            <a:ext cx="310896" cy="310896"/>
+          </a:xfrm>
+          <a:prstGeom prst="rect">
+            <a:avLst/>
+          </a:prstGeom>
+          <a:noFill/>
+          <a:ln/>
+        </p:spPr>
+        <p:txBody>
+          <a:bodyPr wrap="square" lIns="0" tIns="0" rIns="0" bIns="0" rtlCol="0" anchor="ctr"/>
+          <a:lstStyle/>
+          <a:p>
+            <a:pPr algn="ctr" indent="0" marL="0">
+              <a:buNone/>
+            </a:pPr>
+            <a:r>
+              <a:rPr lang="en-US" sz="1300" b="1" dirty="0">
+                <a:solidFill>
+                  <a:srgbClr val="07101F"/>
+                </a:solidFill>
+                <a:latin typeface="Calibri" pitchFamily="34" charset="0"/>
+                <a:ea typeface="Calibri" pitchFamily="34" charset="-122"/>
+                <a:cs typeface="Calibri" pitchFamily="34" charset="-120"/>
+              </a:rPr>
+              <a:t>3</a:t>
+            </a:r>
+            <a:endParaRPr lang="en-US" sz="1300" dirty="0"/>
+          </a:p>
+        </p:txBody>
+      </p:sp>
+      <p:sp>
+        <p:nvSpPr>
+          <p:cNvPr id="12" name="Text 10"/>
+          <p:cNvSpPr/>
+          <p:nvPr/>
+        </p:nvSpPr>
+        <p:spPr>
+          <a:xfrm>
+            <a:off x="1097280" y="3977640"/>
+            <a:ext cx="5394960" cy="1097280"/>
+          </a:xfrm>
+          <a:prstGeom prst="rect">
+            <a:avLst/>
+          </a:prstGeom>
+          <a:noFill/>
+          <a:ln/>
+        </p:spPr>
+        <p:txBody>
+          <a:bodyPr wrap="square" lIns="0" tIns="0" rIns="0" bIns="0" rtlCol="0" anchor="t"/>
+          <a:lstStyle/>
+          <a:p>
+            <a:pPr indent="0" marL="0">
+              <a:buNone/>
+            </a:pPr>
+            <a:r>
+              <a:rPr lang="en-US" sz="1400" dirty="0">
+                <a:solidFill>
+                  <a:srgbClr val="E8EEF7"/>
+                </a:solidFill>
+                <a:latin typeface="Calibri" pitchFamily="34" charset="0"/>
+                <a:ea typeface="Calibri" pitchFamily="34" charset="-122"/>
+                <a:cs typeface="Calibri" pitchFamily="34" charset="-120"/>
+              </a:rPr>
+              <a:t>Analise: Backlog, Checklist, </a:t>
+            </a:r>
+            <a:pPr indent="0" marL="0">
+              <a:buNone/>
+            </a:pPr>
+            <a:r>
+              <a:rPr lang="en-US" sz="1400" b="1" dirty="0">
+                <a:solidFill>
+                  <a:srgbClr val="E8EEF7"/>
+                </a:solidFill>
+                <a:latin typeface="Calibri" pitchFamily="34" charset="0"/>
+                <a:ea typeface="Calibri" pitchFamily="34" charset="-122"/>
+                <a:cs typeface="Calibri" pitchFamily="34" charset="-120"/>
+              </a:rPr>
+              <a:t>Arquivos na ordem oficial</a:t>
+            </a:r>
+            <a:pPr indent="0" marL="0">
+              <a:buNone/>
+            </a:pPr>
+            <a:r>
+              <a:rPr lang="en-US" sz="1400" dirty="0">
+                <a:solidFill>
+                  <a:srgbClr val="E8EEF7"/>
+                </a:solidFill>
+                <a:latin typeface="Calibri" pitchFamily="34" charset="0"/>
+                <a:ea typeface="Calibri" pitchFamily="34" charset="-122"/>
+                <a:cs typeface="Calibri" pitchFamily="34" charset="-120"/>
+              </a:rPr>
+              <a:t> (botão Baixar todos em ZIP) e Links Externos;</a:t>
+            </a:r>
+            <a:endParaRPr lang="en-US" sz="1400" dirty="0"/>
+          </a:p>
+        </p:txBody>
+      </p:sp>
+      <p:sp>
+        <p:nvSpPr>
+          <p:cNvPr id="13" name="Shape 11"/>
+          <p:cNvSpPr/>
+          <p:nvPr/>
+        </p:nvSpPr>
+        <p:spPr>
+          <a:xfrm>
+            <a:off x="640080" y="5120640"/>
+            <a:ext cx="310896" cy="310896"/>
+          </a:xfrm>
+          <a:prstGeom prst="ellipse">
+            <a:avLst/>
+          </a:prstGeom>
+          <a:solidFill>
+            <a:srgbClr val="22D3EE"/>
+          </a:solidFill>
+          <a:ln/>
+        </p:spPr>
+      </p:sp>
+      <p:sp>
+        <p:nvSpPr>
+          <p:cNvPr id="14" name="Text 12"/>
+          <p:cNvSpPr/>
+          <p:nvPr/>
+        </p:nvSpPr>
+        <p:spPr>
+          <a:xfrm>
+            <a:off x="640080" y="5120640"/>
+            <a:ext cx="310896" cy="310896"/>
+          </a:xfrm>
+          <a:prstGeom prst="rect">
+            <a:avLst/>
+          </a:prstGeom>
+          <a:noFill/>
+          <a:ln/>
+        </p:spPr>
+        <p:txBody>
+          <a:bodyPr wrap="square" lIns="0" tIns="0" rIns="0" bIns="0" rtlCol="0" anchor="ctr"/>
+          <a:lstStyle/>
+          <a:p>
+            <a:pPr algn="ctr" indent="0" marL="0">
+              <a:buNone/>
+            </a:pPr>
+            <a:r>
+              <a:rPr lang="en-US" sz="1300" b="1" dirty="0">
+                <a:solidFill>
+                  <a:srgbClr val="07101F"/>
+                </a:solidFill>
+                <a:latin typeface="Calibri" pitchFamily="34" charset="0"/>
+                <a:ea typeface="Calibri" pitchFamily="34" charset="-122"/>
+                <a:cs typeface="Calibri" pitchFamily="34" charset="-120"/>
+              </a:rPr>
+              <a:t>4</a:t>
+            </a:r>
+            <a:endParaRPr lang="en-US" sz="1300" dirty="0"/>
+          </a:p>
+        </p:txBody>
+      </p:sp>
+      <p:sp>
+        <p:nvSpPr>
+          <p:cNvPr id="15" name="Text 13"/>
+          <p:cNvSpPr/>
+          <p:nvPr/>
+        </p:nvSpPr>
+        <p:spPr>
+          <a:xfrm>
+            <a:off x="1097280" y="5074920"/>
+            <a:ext cx="5394960" cy="1097280"/>
+          </a:xfrm>
+          <a:prstGeom prst="rect">
+            <a:avLst/>
+          </a:prstGeom>
+          <a:noFill/>
+          <a:ln/>
+        </p:spPr>
+        <p:txBody>
+          <a:bodyPr wrap="square" lIns="0" tIns="0" rIns="0" bIns="0" rtlCol="0" anchor="t"/>
+          <a:lstStyle/>
+          <a:p>
+            <a:pPr indent="0" marL="0">
+              <a:buNone/>
+            </a:pPr>
+            <a:r>
+              <a:rPr lang="en-US" sz="1400" dirty="0">
+                <a:solidFill>
+                  <a:srgbClr val="E8EEF7"/>
+                </a:solidFill>
+                <a:latin typeface="Calibri" pitchFamily="34" charset="0"/>
+                <a:ea typeface="Calibri" pitchFamily="34" charset="-122"/>
+                <a:cs typeface="Calibri" pitchFamily="34" charset="-120"/>
+              </a:rPr>
+              <a:t>Decida: </a:t>
+            </a:r>
+            <a:pPr indent="0" marL="0">
+              <a:buNone/>
+            </a:pPr>
+            <a:r>
+              <a:rPr lang="en-US" sz="1400" b="1" dirty="0">
+                <a:solidFill>
+                  <a:srgbClr val="34D399"/>
+                </a:solidFill>
+                <a:latin typeface="Calibri" pitchFamily="34" charset="0"/>
+                <a:ea typeface="Calibri" pitchFamily="34" charset="-122"/>
+                <a:cs typeface="Calibri" pitchFamily="34" charset="-120"/>
+              </a:rPr>
+              <a:t>Aprovado</a:t>
+            </a:r>
+            <a:pPr indent="0" marL="0">
+              <a:buNone/>
+            </a:pPr>
+            <a:r>
+              <a:rPr lang="en-US" sz="1400" dirty="0">
+                <a:solidFill>
+                  <a:srgbClr val="E8EEF7"/>
+                </a:solidFill>
+                <a:latin typeface="Calibri" pitchFamily="34" charset="0"/>
+                <a:ea typeface="Calibri" pitchFamily="34" charset="-122"/>
+                <a:cs typeface="Calibri" pitchFamily="34" charset="-120"/>
+              </a:rPr>
+              <a:t> ou </a:t>
+            </a:r>
+            <a:pPr indent="0" marL="0">
+              <a:buNone/>
+            </a:pPr>
+            <a:r>
+              <a:rPr lang="en-US" sz="1400" b="1" dirty="0">
+                <a:solidFill>
+                  <a:srgbClr val="FBBF24"/>
+                </a:solidFill>
+                <a:latin typeface="Calibri" pitchFamily="34" charset="0"/>
+                <a:ea typeface="Calibri" pitchFamily="34" charset="-122"/>
+                <a:cs typeface="Calibri" pitchFamily="34" charset="-120"/>
+              </a:rPr>
+              <a:t>Recusar com relatório</a:t>
+            </a:r>
+            <a:pPr indent="0" marL="0">
+              <a:buNone/>
+            </a:pPr>
+            <a:r>
+              <a:rPr lang="en-US" sz="1400" dirty="0">
+                <a:solidFill>
+                  <a:srgbClr val="E8EEF7"/>
+                </a:solidFill>
+                <a:latin typeface="Calibri" pitchFamily="34" charset="0"/>
+                <a:ea typeface="Calibri" pitchFamily="34" charset="-122"/>
+                <a:cs typeface="Calibri" pitchFamily="34" charset="-120"/>
+              </a:rPr>
+              <a:t>.</a:t>
+            </a:r>
+            <a:endParaRPr lang="en-US" sz="1400" dirty="0"/>
+          </a:p>
+        </p:txBody>
+      </p:sp>
+      <p:sp>
+        <p:nvSpPr>
+          <p:cNvPr id="16" name="Shape 14"/>
+          <p:cNvSpPr/>
+          <p:nvPr/>
+        </p:nvSpPr>
+        <p:spPr>
+          <a:xfrm>
+            <a:off x="6766560" y="1691640"/>
+            <a:ext cx="4846320" cy="3463114"/>
           </a:xfrm>
           <a:prstGeom prst="roundRect">
             <a:avLst>
-              <a:gd name="adj" fmla="val 50000"/>
+              <a:gd name="adj" fmla="val 2376"/>
             </a:avLst>
           </a:prstGeom>
           <a:solidFill>
             <a:srgbClr val="10233F"/>
           </a:solidFill>
-          <a:ln w="15240">
+          <a:ln w="12700">
             <a:solidFill>
               <a:srgbClr val="1D3A5F"/>
             </a:solidFill>
@@ -7249,985 +8400,33 @@
           </a:ln>
         </p:spPr>
       </p:sp>
-      <p:sp>
-        <p:nvSpPr>
-          <p:cNvPr id="6" name="Text 4"/>
-          <p:cNvSpPr/>
-          <p:nvPr/>
-        </p:nvSpPr>
-        <p:spPr>
-          <a:xfrm>
-            <a:off x="640080" y="2011680"/>
-            <a:ext cx="1784909" cy="402336"/>
-          </a:xfrm>
-          <a:prstGeom prst="rect">
-            <a:avLst/>
-          </a:prstGeom>
-          <a:noFill/>
-          <a:ln/>
-        </p:spPr>
-        <p:txBody>
-          <a:bodyPr wrap="square" lIns="0" tIns="0" rIns="0" bIns="0" rtlCol="0" anchor="ctr"/>
-          <a:lstStyle/>
-          <a:p>
-            <a:pPr algn="ctr" indent="0" marL="0">
-              <a:buNone/>
-            </a:pPr>
-            <a:r>
-              <a:rPr lang="en-US" sz="1250" dirty="0">
-                <a:solidFill>
-                  <a:srgbClr val="E8EEF7"/>
-                </a:solidFill>
-                <a:latin typeface="Calibri" pitchFamily="34" charset="0"/>
-                <a:ea typeface="Calibri" pitchFamily="34" charset="-122"/>
-                <a:cs typeface="Calibri" pitchFamily="34" charset="-120"/>
-              </a:rPr>
-              <a:t>Pronto para Análise</a:t>
-            </a:r>
-            <a:endParaRPr lang="en-US" sz="1250" dirty="0"/>
-          </a:p>
-        </p:txBody>
-      </p:sp>
-      <p:sp>
-        <p:nvSpPr>
-          <p:cNvPr id="7" name="Text 5"/>
-          <p:cNvSpPr/>
-          <p:nvPr/>
-        </p:nvSpPr>
-        <p:spPr>
-          <a:xfrm>
-            <a:off x="2461565" y="2011680"/>
-            <a:ext cx="274320" cy="402336"/>
-          </a:xfrm>
-          <a:prstGeom prst="rect">
-            <a:avLst/>
-          </a:prstGeom>
-          <a:noFill/>
-          <a:ln/>
-        </p:spPr>
-        <p:txBody>
-          <a:bodyPr wrap="square" lIns="0" tIns="0" rIns="0" bIns="0" rtlCol="0" anchor="ctr"/>
-          <a:lstStyle/>
-          <a:p>
-            <a:pPr algn="ctr" indent="0" marL="0">
-              <a:buNone/>
-            </a:pPr>
-            <a:r>
-              <a:rPr lang="en-US" sz="1500" b="1" dirty="0">
-                <a:solidFill>
-                  <a:srgbClr val="06B6D4"/>
-                </a:solidFill>
-                <a:latin typeface="Calibri" pitchFamily="34" charset="0"/>
-                <a:ea typeface="Calibri" pitchFamily="34" charset="-122"/>
-                <a:cs typeface="Calibri" pitchFamily="34" charset="-120"/>
-              </a:rPr>
-              <a:t>→</a:t>
-            </a:r>
-            <a:endParaRPr lang="en-US" sz="1500" dirty="0"/>
-          </a:p>
-        </p:txBody>
-      </p:sp>
-      <p:sp>
-        <p:nvSpPr>
-          <p:cNvPr id="8" name="Shape 6"/>
-          <p:cNvSpPr/>
-          <p:nvPr/>
-        </p:nvSpPr>
-        <p:spPr>
-          <a:xfrm>
-            <a:off x="2772461" y="2011680"/>
-            <a:ext cx="1060704" cy="402336"/>
-          </a:xfrm>
-          <a:prstGeom prst="roundRect">
-            <a:avLst>
-              <a:gd name="adj" fmla="val 50000"/>
-            </a:avLst>
-          </a:prstGeom>
-          <a:solidFill>
-            <a:srgbClr val="10233F"/>
-          </a:solidFill>
-          <a:ln w="15240">
-            <a:solidFill>
-              <a:srgbClr val="1D3A5F"/>
-            </a:solidFill>
-            <a:prstDash val="solid"/>
-          </a:ln>
-        </p:spPr>
-      </p:sp>
-      <p:sp>
-        <p:nvSpPr>
-          <p:cNvPr id="9" name="Text 7"/>
-          <p:cNvSpPr/>
-          <p:nvPr/>
-        </p:nvSpPr>
-        <p:spPr>
-          <a:xfrm>
-            <a:off x="2772461" y="2011680"/>
-            <a:ext cx="1060704" cy="402336"/>
-          </a:xfrm>
-          <a:prstGeom prst="rect">
-            <a:avLst/>
-          </a:prstGeom>
-          <a:noFill/>
-          <a:ln/>
-        </p:spPr>
-        <p:txBody>
-          <a:bodyPr wrap="square" lIns="0" tIns="0" rIns="0" bIns="0" rtlCol="0" anchor="ctr"/>
-          <a:lstStyle/>
-          <a:p>
-            <a:pPr algn="ctr" indent="0" marL="0">
-              <a:buNone/>
-            </a:pPr>
-            <a:r>
-              <a:rPr lang="en-US" sz="1250" dirty="0">
-                <a:solidFill>
-                  <a:srgbClr val="E8EEF7"/>
-                </a:solidFill>
-                <a:latin typeface="Calibri" pitchFamily="34" charset="0"/>
-                <a:ea typeface="Calibri" pitchFamily="34" charset="-122"/>
-                <a:cs typeface="Calibri" pitchFamily="34" charset="-120"/>
-              </a:rPr>
-              <a:t>Em Revisão</a:t>
-            </a:r>
-            <a:endParaRPr lang="en-US" sz="1250" dirty="0"/>
-          </a:p>
-        </p:txBody>
-      </p:sp>
-      <p:sp>
-        <p:nvSpPr>
-          <p:cNvPr id="10" name="Text 8"/>
-          <p:cNvSpPr/>
-          <p:nvPr/>
-        </p:nvSpPr>
-        <p:spPr>
-          <a:xfrm>
-            <a:off x="3869741" y="2011680"/>
-            <a:ext cx="274320" cy="402336"/>
-          </a:xfrm>
-          <a:prstGeom prst="rect">
-            <a:avLst/>
-          </a:prstGeom>
-          <a:noFill/>
-          <a:ln/>
-        </p:spPr>
-        <p:txBody>
-          <a:bodyPr wrap="square" lIns="0" tIns="0" rIns="0" bIns="0" rtlCol="0" anchor="ctr"/>
-          <a:lstStyle/>
-          <a:p>
-            <a:pPr algn="ctr" indent="0" marL="0">
-              <a:buNone/>
-            </a:pPr>
-            <a:r>
-              <a:rPr lang="en-US" sz="1500" b="1" dirty="0">
-                <a:solidFill>
-                  <a:srgbClr val="06B6D4"/>
-                </a:solidFill>
-                <a:latin typeface="Calibri" pitchFamily="34" charset="0"/>
-                <a:ea typeface="Calibri" pitchFamily="34" charset="-122"/>
-                <a:cs typeface="Calibri" pitchFamily="34" charset="-120"/>
-              </a:rPr>
-              <a:t>→</a:t>
-            </a:r>
-            <a:endParaRPr lang="en-US" sz="1500" dirty="0"/>
-          </a:p>
-        </p:txBody>
-      </p:sp>
-      <p:sp>
-        <p:nvSpPr>
-          <p:cNvPr id="11" name="Shape 9"/>
-          <p:cNvSpPr/>
-          <p:nvPr/>
-        </p:nvSpPr>
-        <p:spPr>
-          <a:xfrm>
-            <a:off x="4180637" y="2011680"/>
-            <a:ext cx="899770" cy="402336"/>
-          </a:xfrm>
-          <a:prstGeom prst="roundRect">
-            <a:avLst>
-              <a:gd name="adj" fmla="val 50000"/>
-            </a:avLst>
-          </a:prstGeom>
-          <a:solidFill>
-            <a:srgbClr val="10233F"/>
-          </a:solidFill>
-          <a:ln w="15240">
-            <a:solidFill>
-              <a:srgbClr val="1D3A5F"/>
-            </a:solidFill>
-            <a:prstDash val="solid"/>
-          </a:ln>
-        </p:spPr>
-      </p:sp>
-      <p:sp>
-        <p:nvSpPr>
-          <p:cNvPr id="12" name="Text 10"/>
-          <p:cNvSpPr/>
-          <p:nvPr/>
-        </p:nvSpPr>
-        <p:spPr>
-          <a:xfrm>
-            <a:off x="4180637" y="2011680"/>
-            <a:ext cx="899770" cy="402336"/>
-          </a:xfrm>
-          <a:prstGeom prst="rect">
-            <a:avLst/>
-          </a:prstGeom>
-          <a:noFill/>
-          <a:ln/>
-        </p:spPr>
-        <p:txBody>
-          <a:bodyPr wrap="square" lIns="0" tIns="0" rIns="0" bIns="0" rtlCol="0" anchor="ctr"/>
-          <a:lstStyle/>
-          <a:p>
-            <a:pPr algn="ctr" indent="0" marL="0">
-              <a:buNone/>
-            </a:pPr>
-            <a:r>
-              <a:rPr lang="en-US" sz="1250" dirty="0">
-                <a:solidFill>
-                  <a:srgbClr val="E8EEF7"/>
-                </a:solidFill>
-                <a:latin typeface="Calibri" pitchFamily="34" charset="0"/>
-                <a:ea typeface="Calibri" pitchFamily="34" charset="-122"/>
-                <a:cs typeface="Calibri" pitchFamily="34" charset="-120"/>
-              </a:rPr>
-              <a:t>Aprovado</a:t>
-            </a:r>
-            <a:endParaRPr lang="en-US" sz="1250" dirty="0"/>
-          </a:p>
-        </p:txBody>
-      </p:sp>
-      <p:sp>
-        <p:nvSpPr>
-          <p:cNvPr id="13" name="Text 11"/>
-          <p:cNvSpPr/>
-          <p:nvPr/>
-        </p:nvSpPr>
-        <p:spPr>
-          <a:xfrm>
-            <a:off x="5116982" y="2011680"/>
-            <a:ext cx="274320" cy="402336"/>
-          </a:xfrm>
-          <a:prstGeom prst="rect">
-            <a:avLst/>
-          </a:prstGeom>
-          <a:noFill/>
-          <a:ln/>
-        </p:spPr>
-        <p:txBody>
-          <a:bodyPr wrap="square" lIns="0" tIns="0" rIns="0" bIns="0" rtlCol="0" anchor="ctr"/>
-          <a:lstStyle/>
-          <a:p>
-            <a:pPr algn="ctr" indent="0" marL="0">
-              <a:buNone/>
-            </a:pPr>
-            <a:r>
-              <a:rPr lang="en-US" sz="1500" b="1" dirty="0">
-                <a:solidFill>
-                  <a:srgbClr val="06B6D4"/>
-                </a:solidFill>
-                <a:latin typeface="Calibri" pitchFamily="34" charset="0"/>
-                <a:ea typeface="Calibri" pitchFamily="34" charset="-122"/>
-                <a:cs typeface="Calibri" pitchFamily="34" charset="-120"/>
-              </a:rPr>
-              <a:t>→</a:t>
-            </a:r>
-            <a:endParaRPr lang="en-US" sz="1500" dirty="0"/>
-          </a:p>
-        </p:txBody>
-      </p:sp>
-      <p:sp>
-        <p:nvSpPr>
-          <p:cNvPr id="14" name="Shape 12"/>
-          <p:cNvSpPr/>
-          <p:nvPr/>
-        </p:nvSpPr>
-        <p:spPr>
-          <a:xfrm>
-            <a:off x="5427878" y="2011680"/>
-            <a:ext cx="1945843" cy="402336"/>
-          </a:xfrm>
-          <a:prstGeom prst="roundRect">
-            <a:avLst>
-              <a:gd name="adj" fmla="val 50000"/>
-            </a:avLst>
-          </a:prstGeom>
-          <a:solidFill>
-            <a:srgbClr val="10233F"/>
-          </a:solidFill>
-          <a:ln w="15240">
-            <a:solidFill>
-              <a:srgbClr val="1D3A5F"/>
-            </a:solidFill>
-            <a:prstDash val="solid"/>
-          </a:ln>
-        </p:spPr>
-      </p:sp>
-      <p:sp>
-        <p:nvSpPr>
-          <p:cNvPr id="15" name="Text 13"/>
-          <p:cNvSpPr/>
-          <p:nvPr/>
-        </p:nvSpPr>
-        <p:spPr>
-          <a:xfrm>
-            <a:off x="5427878" y="2011680"/>
-            <a:ext cx="1945843" cy="402336"/>
-          </a:xfrm>
-          <a:prstGeom prst="rect">
-            <a:avLst/>
-          </a:prstGeom>
-          <a:noFill/>
-          <a:ln/>
-        </p:spPr>
-        <p:txBody>
-          <a:bodyPr wrap="square" lIns="0" tIns="0" rIns="0" bIns="0" rtlCol="0" anchor="ctr"/>
-          <a:lstStyle/>
-          <a:p>
-            <a:pPr algn="ctr" indent="0" marL="0">
-              <a:buNone/>
-            </a:pPr>
-            <a:r>
-              <a:rPr lang="en-US" sz="1250" dirty="0">
-                <a:solidFill>
-                  <a:srgbClr val="E8EEF7"/>
-                </a:solidFill>
-                <a:latin typeface="Calibri" pitchFamily="34" charset="0"/>
-                <a:ea typeface="Calibri" pitchFamily="34" charset="-122"/>
-                <a:cs typeface="Calibri" pitchFamily="34" charset="-120"/>
-              </a:rPr>
-              <a:t>Enviado para Inserção</a:t>
-            </a:r>
-            <a:endParaRPr lang="en-US" sz="1250" dirty="0"/>
-          </a:p>
-        </p:txBody>
-      </p:sp>
-      <p:sp>
-        <p:nvSpPr>
-          <p:cNvPr id="16" name="Text 14"/>
-          <p:cNvSpPr/>
-          <p:nvPr/>
-        </p:nvSpPr>
-        <p:spPr>
-          <a:xfrm>
-            <a:off x="640080" y="2606040"/>
-            <a:ext cx="10972800" cy="365760"/>
-          </a:xfrm>
-          <a:prstGeom prst="rect">
-            <a:avLst/>
-          </a:prstGeom>
-          <a:noFill/>
-          <a:ln/>
-        </p:spPr>
-        <p:txBody>
-          <a:bodyPr wrap="square" lIns="0" tIns="0" rIns="0" bIns="0" rtlCol="0" anchor="ctr"/>
-          <a:lstStyle/>
-          <a:p>
-            <a:pPr indent="0" marL="0">
-              <a:buNone/>
-            </a:pPr>
-            <a:r>
-              <a:rPr lang="en-US" sz="1250" dirty="0">
-                <a:solidFill>
-                  <a:srgbClr val="8BAAC8"/>
-                </a:solidFill>
-                <a:latin typeface="Calibri" pitchFamily="34" charset="0"/>
-                <a:ea typeface="Calibri" pitchFamily="34" charset="-122"/>
-                <a:cs typeface="Calibri" pitchFamily="34" charset="-120"/>
-              </a:rPr>
-              <a:t>Se recusar: o formador ajusta e devolve como "Pronto para Nova Análise" — mova de novo para "Em Revisão" e repita.</a:t>
-            </a:r>
-            <a:endParaRPr lang="en-US" sz="1250" dirty="0"/>
-          </a:p>
-        </p:txBody>
-      </p:sp>
-      <p:sp>
-        <p:nvSpPr>
-          <p:cNvPr id="17" name="Text 15"/>
-          <p:cNvSpPr/>
-          <p:nvPr/>
-        </p:nvSpPr>
-        <p:spPr>
-          <a:xfrm>
-            <a:off x="640080" y="3246120"/>
-            <a:ext cx="6035040" cy="457200"/>
-          </a:xfrm>
-          <a:prstGeom prst="rect">
-            <a:avLst/>
-          </a:prstGeom>
-          <a:noFill/>
-          <a:ln/>
-        </p:spPr>
-        <p:txBody>
-          <a:bodyPr wrap="square" lIns="0" tIns="0" rIns="0" bIns="0" rtlCol="0" anchor="ctr"/>
-          <a:lstStyle/>
-          <a:p>
-            <a:pPr indent="0" marL="0">
-              <a:buNone/>
-            </a:pPr>
-            <a:r>
-              <a:rPr lang="en-US" sz="1250" b="1" dirty="0">
-                <a:solidFill>
-                  <a:srgbClr val="22D3EE"/>
-                </a:solidFill>
-                <a:latin typeface="Calibri" pitchFamily="34" charset="0"/>
-                <a:ea typeface="Calibri" pitchFamily="34" charset="-122"/>
-                <a:cs typeface="Calibri" pitchFamily="34" charset="-120"/>
-              </a:rPr>
-              <a:t>Pronto para Análise → Em Revisão</a:t>
-            </a:r>
-            <a:endParaRPr lang="en-US" sz="1250" dirty="0"/>
-          </a:p>
-        </p:txBody>
-      </p:sp>
-      <p:sp>
-        <p:nvSpPr>
-          <p:cNvPr id="18" name="Text 16"/>
-          <p:cNvSpPr/>
-          <p:nvPr/>
-        </p:nvSpPr>
-        <p:spPr>
-          <a:xfrm>
-            <a:off x="6766560" y="3246120"/>
-            <a:ext cx="4846320" cy="457200"/>
-          </a:xfrm>
-          <a:prstGeom prst="rect">
-            <a:avLst/>
-          </a:prstGeom>
-          <a:noFill/>
-          <a:ln/>
-        </p:spPr>
-        <p:txBody>
-          <a:bodyPr wrap="square" lIns="0" tIns="0" rIns="0" bIns="0" rtlCol="0" anchor="ctr"/>
-          <a:lstStyle/>
-          <a:p>
-            <a:pPr indent="0" marL="0">
-              <a:buNone/>
-            </a:pPr>
-            <a:r>
-              <a:rPr lang="en-US" sz="1250" dirty="0">
-                <a:solidFill>
-                  <a:srgbClr val="E8EEF7"/>
-                </a:solidFill>
-                <a:latin typeface="Calibri" pitchFamily="34" charset="0"/>
-                <a:ea typeface="Calibri" pitchFamily="34" charset="-122"/>
-                <a:cs typeface="Calibri" pitchFamily="34" charset="-120"/>
-              </a:rPr>
-              <a:t>Ao iniciar a análise</a:t>
-            </a:r>
-            <a:endParaRPr lang="en-US" sz="1250" dirty="0"/>
-          </a:p>
-        </p:txBody>
-      </p:sp>
-      <p:sp>
-        <p:nvSpPr>
-          <p:cNvPr id="19" name="Shape 17"/>
-          <p:cNvSpPr/>
-          <p:nvPr/>
-        </p:nvSpPr>
-        <p:spPr>
-          <a:xfrm>
-            <a:off x="640080" y="3721608"/>
-            <a:ext cx="10972800" cy="0"/>
-          </a:xfrm>
-          <a:prstGeom prst="line">
-            <a:avLst/>
-          </a:prstGeom>
-          <a:noFill/>
-          <a:ln w="9525">
-            <a:solidFill>
-              <a:srgbClr val="1D3A5F"/>
-            </a:solidFill>
-            <a:prstDash val="solid"/>
-          </a:ln>
-        </p:spPr>
-      </p:sp>
-      <p:sp>
-        <p:nvSpPr>
-          <p:cNvPr id="20" name="Text 18"/>
-          <p:cNvSpPr/>
-          <p:nvPr/>
-        </p:nvSpPr>
-        <p:spPr>
-          <a:xfrm>
-            <a:off x="640080" y="3749040"/>
-            <a:ext cx="6035040" cy="457200"/>
-          </a:xfrm>
-          <a:prstGeom prst="rect">
-            <a:avLst/>
-          </a:prstGeom>
-          <a:noFill/>
-          <a:ln/>
-        </p:spPr>
-        <p:txBody>
-          <a:bodyPr wrap="square" lIns="0" tIns="0" rIns="0" bIns="0" rtlCol="0" anchor="ctr"/>
-          <a:lstStyle/>
-          <a:p>
-            <a:pPr indent="0" marL="0">
-              <a:buNone/>
-            </a:pPr>
-            <a:r>
-              <a:rPr lang="en-US" sz="1250" b="1" dirty="0">
-                <a:solidFill>
-                  <a:srgbClr val="22D3EE"/>
-                </a:solidFill>
-                <a:latin typeface="Calibri" pitchFamily="34" charset="0"/>
-                <a:ea typeface="Calibri" pitchFamily="34" charset="-122"/>
-                <a:cs typeface="Calibri" pitchFamily="34" charset="-120"/>
-              </a:rPr>
-              <a:t>Pronto para Nova Análise → Em Revisão</a:t>
-            </a:r>
-            <a:endParaRPr lang="en-US" sz="1250" dirty="0"/>
-          </a:p>
-        </p:txBody>
-      </p:sp>
-      <p:sp>
-        <p:nvSpPr>
-          <p:cNvPr id="21" name="Text 19"/>
-          <p:cNvSpPr/>
-          <p:nvPr/>
-        </p:nvSpPr>
-        <p:spPr>
-          <a:xfrm>
-            <a:off x="6766560" y="3749040"/>
-            <a:ext cx="4846320" cy="457200"/>
-          </a:xfrm>
-          <a:prstGeom prst="rect">
-            <a:avLst/>
-          </a:prstGeom>
-          <a:noFill/>
-          <a:ln/>
-        </p:spPr>
-        <p:txBody>
-          <a:bodyPr wrap="square" lIns="0" tIns="0" rIns="0" bIns="0" rtlCol="0" anchor="ctr"/>
-          <a:lstStyle/>
-          <a:p>
-            <a:pPr indent="0" marL="0">
-              <a:buNone/>
-            </a:pPr>
-            <a:r>
-              <a:rPr lang="en-US" sz="1250" dirty="0">
-                <a:solidFill>
-                  <a:srgbClr val="E8EEF7"/>
-                </a:solidFill>
-                <a:latin typeface="Calibri" pitchFamily="34" charset="0"/>
-                <a:ea typeface="Calibri" pitchFamily="34" charset="-122"/>
-                <a:cs typeface="Calibri" pitchFamily="34" charset="-120"/>
-              </a:rPr>
-              <a:t>Ao iniciar a reanálise</a:t>
-            </a:r>
-            <a:endParaRPr lang="en-US" sz="1250" dirty="0"/>
-          </a:p>
-        </p:txBody>
-      </p:sp>
-      <p:sp>
-        <p:nvSpPr>
-          <p:cNvPr id="22" name="Shape 20"/>
-          <p:cNvSpPr/>
-          <p:nvPr/>
-        </p:nvSpPr>
-        <p:spPr>
-          <a:xfrm>
-            <a:off x="640080" y="4224528"/>
-            <a:ext cx="10972800" cy="0"/>
-          </a:xfrm>
-          <a:prstGeom prst="line">
-            <a:avLst/>
-          </a:prstGeom>
-          <a:noFill/>
-          <a:ln w="9525">
-            <a:solidFill>
-              <a:srgbClr val="1D3A5F"/>
-            </a:solidFill>
-            <a:prstDash val="solid"/>
-          </a:ln>
-        </p:spPr>
-      </p:sp>
-      <p:sp>
-        <p:nvSpPr>
-          <p:cNvPr id="23" name="Text 21"/>
-          <p:cNvSpPr/>
-          <p:nvPr/>
-        </p:nvSpPr>
-        <p:spPr>
-          <a:xfrm>
-            <a:off x="640080" y="4251960"/>
-            <a:ext cx="6035040" cy="457200"/>
-          </a:xfrm>
-          <a:prstGeom prst="rect">
-            <a:avLst/>
-          </a:prstGeom>
-          <a:noFill/>
-          <a:ln/>
-        </p:spPr>
-        <p:txBody>
-          <a:bodyPr wrap="square" lIns="0" tIns="0" rIns="0" bIns="0" rtlCol="0" anchor="ctr"/>
-          <a:lstStyle/>
-          <a:p>
-            <a:pPr indent="0" marL="0">
-              <a:buNone/>
-            </a:pPr>
-            <a:r>
-              <a:rPr lang="en-US" sz="1250" b="1" dirty="0">
-                <a:solidFill>
-                  <a:srgbClr val="22D3EE"/>
-                </a:solidFill>
-                <a:latin typeface="Calibri" pitchFamily="34" charset="0"/>
-                <a:ea typeface="Calibri" pitchFamily="34" charset="-122"/>
-                <a:cs typeface="Calibri" pitchFamily="34" charset="-120"/>
-              </a:rPr>
-              <a:t>Em Revisão → Aprovado</a:t>
-            </a:r>
-            <a:endParaRPr lang="en-US" sz="1250" dirty="0"/>
-          </a:p>
-        </p:txBody>
-      </p:sp>
-      <p:sp>
-        <p:nvSpPr>
-          <p:cNvPr id="24" name="Text 22"/>
-          <p:cNvSpPr/>
-          <p:nvPr/>
-        </p:nvSpPr>
-        <p:spPr>
-          <a:xfrm>
-            <a:off x="6766560" y="4251960"/>
-            <a:ext cx="4846320" cy="457200"/>
-          </a:xfrm>
-          <a:prstGeom prst="rect">
-            <a:avLst/>
-          </a:prstGeom>
-          <a:noFill/>
-          <a:ln/>
-        </p:spPr>
-        <p:txBody>
-          <a:bodyPr wrap="square" lIns="0" tIns="0" rIns="0" bIns="0" rtlCol="0" anchor="ctr"/>
-          <a:lstStyle/>
-          <a:p>
-            <a:pPr indent="0" marL="0">
-              <a:buNone/>
-            </a:pPr>
-            <a:r>
-              <a:rPr lang="en-US" sz="1250" dirty="0">
-                <a:solidFill>
-                  <a:srgbClr val="E8EEF7"/>
-                </a:solidFill>
-                <a:latin typeface="Calibri" pitchFamily="34" charset="0"/>
-                <a:ea typeface="Calibri" pitchFamily="34" charset="-122"/>
-                <a:cs typeface="Calibri" pitchFamily="34" charset="-120"/>
-              </a:rPr>
-              <a:t>Material aprovado</a:t>
-            </a:r>
-            <a:endParaRPr lang="en-US" sz="1250" dirty="0"/>
-          </a:p>
-        </p:txBody>
-      </p:sp>
-      <p:sp>
-        <p:nvSpPr>
-          <p:cNvPr id="25" name="Shape 23"/>
-          <p:cNvSpPr/>
-          <p:nvPr/>
-        </p:nvSpPr>
-        <p:spPr>
-          <a:xfrm>
-            <a:off x="640080" y="4727448"/>
-            <a:ext cx="10972800" cy="0"/>
-          </a:xfrm>
-          <a:prstGeom prst="line">
-            <a:avLst/>
-          </a:prstGeom>
-          <a:noFill/>
-          <a:ln w="9525">
-            <a:solidFill>
-              <a:srgbClr val="1D3A5F"/>
-            </a:solidFill>
-            <a:prstDash val="solid"/>
-          </a:ln>
-        </p:spPr>
-      </p:sp>
-      <p:sp>
-        <p:nvSpPr>
-          <p:cNvPr id="26" name="Text 24"/>
-          <p:cNvSpPr/>
-          <p:nvPr/>
-        </p:nvSpPr>
-        <p:spPr>
-          <a:xfrm>
-            <a:off x="640080" y="4754880"/>
-            <a:ext cx="6035040" cy="457200"/>
-          </a:xfrm>
-          <a:prstGeom prst="rect">
-            <a:avLst/>
-          </a:prstGeom>
-          <a:noFill/>
-          <a:ln/>
-        </p:spPr>
-        <p:txBody>
-          <a:bodyPr wrap="square" lIns="0" tIns="0" rIns="0" bIns="0" rtlCol="0" anchor="ctr"/>
-          <a:lstStyle/>
-          <a:p>
-            <a:pPr indent="0" marL="0">
-              <a:buNone/>
-            </a:pPr>
-            <a:r>
-              <a:rPr lang="en-US" sz="1250" b="1" dirty="0">
-                <a:solidFill>
-                  <a:srgbClr val="22D3EE"/>
-                </a:solidFill>
-                <a:latin typeface="Calibri" pitchFamily="34" charset="0"/>
-                <a:ea typeface="Calibri" pitchFamily="34" charset="-122"/>
-                <a:cs typeface="Calibri" pitchFamily="34" charset="-120"/>
-              </a:rPr>
-              <a:t>Em Revisão → Recusado - Ajustes Necessários</a:t>
-            </a:r>
-            <a:endParaRPr lang="en-US" sz="1250" dirty="0"/>
-          </a:p>
-        </p:txBody>
-      </p:sp>
-      <p:sp>
-        <p:nvSpPr>
-          <p:cNvPr id="27" name="Text 25"/>
-          <p:cNvSpPr/>
-          <p:nvPr/>
-        </p:nvSpPr>
-        <p:spPr>
-          <a:xfrm>
-            <a:off x="6766560" y="4754880"/>
-            <a:ext cx="4846320" cy="457200"/>
-          </a:xfrm>
-          <a:prstGeom prst="rect">
-            <a:avLst/>
-          </a:prstGeom>
-          <a:noFill/>
-          <a:ln/>
-        </p:spPr>
-        <p:txBody>
-          <a:bodyPr wrap="square" lIns="0" tIns="0" rIns="0" bIns="0" rtlCol="0" anchor="ctr"/>
-          <a:lstStyle/>
-          <a:p>
-            <a:pPr indent="0" marL="0">
-              <a:buNone/>
-            </a:pPr>
-            <a:r>
-              <a:rPr lang="en-US" sz="1250" dirty="0">
-                <a:solidFill>
-                  <a:srgbClr val="E8EEF7"/>
-                </a:solidFill>
-                <a:latin typeface="Calibri" pitchFamily="34" charset="0"/>
-                <a:ea typeface="Calibri" pitchFamily="34" charset="-122"/>
-                <a:cs typeface="Calibri" pitchFamily="34" charset="-120"/>
-              </a:rPr>
-              <a:t>Pelo botão "Recusar com relatório"</a:t>
-            </a:r>
-            <a:endParaRPr lang="en-US" sz="1250" dirty="0"/>
-          </a:p>
-        </p:txBody>
-      </p:sp>
-      <p:sp>
-        <p:nvSpPr>
-          <p:cNvPr id="28" name="Shape 26"/>
-          <p:cNvSpPr/>
-          <p:nvPr/>
-        </p:nvSpPr>
-        <p:spPr>
-          <a:xfrm>
-            <a:off x="640080" y="5230368"/>
-            <a:ext cx="10972800" cy="0"/>
-          </a:xfrm>
-          <a:prstGeom prst="line">
-            <a:avLst/>
-          </a:prstGeom>
-          <a:noFill/>
-          <a:ln w="9525">
-            <a:solidFill>
-              <a:srgbClr val="1D3A5F"/>
-            </a:solidFill>
-            <a:prstDash val="solid"/>
-          </a:ln>
-        </p:spPr>
-      </p:sp>
-      <p:sp>
-        <p:nvSpPr>
-          <p:cNvPr id="29" name="Text 27"/>
-          <p:cNvSpPr/>
-          <p:nvPr/>
-        </p:nvSpPr>
-        <p:spPr>
-          <a:xfrm>
-            <a:off x="640080" y="5257800"/>
-            <a:ext cx="6035040" cy="457200"/>
-          </a:xfrm>
-          <a:prstGeom prst="rect">
-            <a:avLst/>
-          </a:prstGeom>
-          <a:noFill/>
-          <a:ln/>
-        </p:spPr>
-        <p:txBody>
-          <a:bodyPr wrap="square" lIns="0" tIns="0" rIns="0" bIns="0" rtlCol="0" anchor="ctr"/>
-          <a:lstStyle/>
-          <a:p>
-            <a:pPr indent="0" marL="0">
-              <a:buNone/>
-            </a:pPr>
-            <a:r>
-              <a:rPr lang="en-US" sz="1250" b="1" dirty="0">
-                <a:solidFill>
-                  <a:srgbClr val="22D3EE"/>
-                </a:solidFill>
-                <a:latin typeface="Calibri" pitchFamily="34" charset="0"/>
-                <a:ea typeface="Calibri" pitchFamily="34" charset="-122"/>
-                <a:cs typeface="Calibri" pitchFamily="34" charset="-120"/>
-              </a:rPr>
-              <a:t>Aprovado → Enviado para Inserção</a:t>
-            </a:r>
-            <a:endParaRPr lang="en-US" sz="1250" dirty="0"/>
-          </a:p>
-        </p:txBody>
-      </p:sp>
-      <p:sp>
-        <p:nvSpPr>
-          <p:cNvPr id="30" name="Text 28"/>
-          <p:cNvSpPr/>
-          <p:nvPr/>
-        </p:nvSpPr>
-        <p:spPr>
-          <a:xfrm>
-            <a:off x="6766560" y="5257800"/>
-            <a:ext cx="4846320" cy="457200"/>
-          </a:xfrm>
-          <a:prstGeom prst="rect">
-            <a:avLst/>
-          </a:prstGeom>
-          <a:noFill/>
-          <a:ln/>
-        </p:spPr>
-        <p:txBody>
-          <a:bodyPr wrap="square" lIns="0" tIns="0" rIns="0" bIns="0" rtlCol="0" anchor="ctr"/>
-          <a:lstStyle/>
-          <a:p>
-            <a:pPr indent="0" marL="0">
-              <a:buNone/>
-            </a:pPr>
-            <a:r>
-              <a:rPr lang="en-US" sz="1250" dirty="0">
-                <a:solidFill>
-                  <a:srgbClr val="E8EEF7"/>
-                </a:solidFill>
-                <a:latin typeface="Calibri" pitchFamily="34" charset="0"/>
-                <a:ea typeface="Calibri" pitchFamily="34" charset="-122"/>
-                <a:cs typeface="Calibri" pitchFamily="34" charset="-120"/>
-              </a:rPr>
-              <a:t>Encaminha à MB Estúdios (ela recebe e-mail)</a:t>
-            </a:r>
-            <a:endParaRPr lang="en-US" sz="1250" dirty="0"/>
-          </a:p>
-        </p:txBody>
-      </p:sp>
-      <p:sp>
-        <p:nvSpPr>
-          <p:cNvPr id="31" name="Shape 29"/>
-          <p:cNvSpPr/>
-          <p:nvPr/>
-        </p:nvSpPr>
-        <p:spPr>
-          <a:xfrm>
-            <a:off x="640080" y="5733288"/>
-            <a:ext cx="10972800" cy="0"/>
-          </a:xfrm>
-          <a:prstGeom prst="line">
-            <a:avLst/>
-          </a:prstGeom>
-          <a:noFill/>
-          <a:ln w="9525">
-            <a:solidFill>
-              <a:srgbClr val="1D3A5F"/>
-            </a:solidFill>
-            <a:prstDash val="solid"/>
-          </a:ln>
-        </p:spPr>
-      </p:sp>
-      <p:sp>
-        <p:nvSpPr>
-          <p:cNvPr id="32" name="Text 30"/>
-          <p:cNvSpPr/>
-          <p:nvPr/>
-        </p:nvSpPr>
-        <p:spPr>
-          <a:xfrm>
-            <a:off x="640080" y="5760720"/>
-            <a:ext cx="6035040" cy="457200"/>
-          </a:xfrm>
-          <a:prstGeom prst="rect">
-            <a:avLst/>
-          </a:prstGeom>
-          <a:noFill/>
-          <a:ln/>
-        </p:spPr>
-        <p:txBody>
-          <a:bodyPr wrap="square" lIns="0" tIns="0" rIns="0" bIns="0" rtlCol="0" anchor="ctr"/>
-          <a:lstStyle/>
-          <a:p>
-            <a:pPr indent="0" marL="0">
-              <a:buNone/>
-            </a:pPr>
-            <a:r>
-              <a:rPr lang="en-US" sz="1250" b="1" dirty="0">
-                <a:solidFill>
-                  <a:srgbClr val="22D3EE"/>
-                </a:solidFill>
-                <a:latin typeface="Calibri" pitchFamily="34" charset="0"/>
-                <a:ea typeface="Calibri" pitchFamily="34" charset="-122"/>
-                <a:cs typeface="Calibri" pitchFamily="34" charset="-120"/>
-              </a:rPr>
-              <a:t>Validado → Pronto para Publicação</a:t>
-            </a:r>
-            <a:endParaRPr lang="en-US" sz="1250" dirty="0"/>
-          </a:p>
-        </p:txBody>
-      </p:sp>
-      <p:sp>
-        <p:nvSpPr>
-          <p:cNvPr id="33" name="Text 31"/>
-          <p:cNvSpPr/>
-          <p:nvPr/>
-        </p:nvSpPr>
-        <p:spPr>
-          <a:xfrm>
-            <a:off x="6766560" y="5760720"/>
-            <a:ext cx="4846320" cy="457200"/>
-          </a:xfrm>
-          <a:prstGeom prst="rect">
-            <a:avLst/>
-          </a:prstGeom>
-          <a:noFill/>
-          <a:ln/>
-        </p:spPr>
-        <p:txBody>
-          <a:bodyPr wrap="square" lIns="0" tIns="0" rIns="0" bIns="0" rtlCol="0" anchor="ctr"/>
-          <a:lstStyle/>
-          <a:p>
-            <a:pPr indent="0" marL="0">
-              <a:buNone/>
-            </a:pPr>
-            <a:r>
-              <a:rPr lang="en-US" sz="1250" dirty="0">
-                <a:solidFill>
-                  <a:srgbClr val="E8EEF7"/>
-                </a:solidFill>
-                <a:latin typeface="Calibri" pitchFamily="34" charset="0"/>
-                <a:ea typeface="Calibri" pitchFamily="34" charset="-122"/>
-                <a:cs typeface="Calibri" pitchFamily="34" charset="-120"/>
-              </a:rPr>
-              <a:t>Com a data de publicação (próximo slide)</a:t>
-            </a:r>
-            <a:endParaRPr lang="en-US" sz="1250" dirty="0"/>
-          </a:p>
-        </p:txBody>
-      </p:sp>
-      <p:sp>
-        <p:nvSpPr>
-          <p:cNvPr id="34" name="Text 32"/>
+      <p:pic>
+        <p:nvPicPr>
+          <p:cNvPr id="17" name="Image 0" descr="/home/user/AutoriaSCS-Scrum-cursos/docs/tutoriais/img/ti-acoes-revisao.png">    </p:cNvPr>
+          <p:cNvPicPr>
+            <a:picLocks noChangeAspect="1"/>
+          </p:cNvPicPr>
+          <p:nvPr/>
+        </p:nvPicPr>
+        <p:blipFill>
+          <a:blip r:embed="rId1"/>
+          <a:stretch>
+            <a:fillRect/>
+          </a:stretch>
+        </p:blipFill>
+        <p:spPr>
+          <a:xfrm>
+            <a:off x="6876288" y="1801368"/>
+            <a:ext cx="4626864" cy="3243658"/>
+          </a:xfrm>
+          <a:prstGeom prst="rect">
+            <a:avLst/>
+          </a:prstGeom>
+        </p:spPr>
+      </p:pic>
+      <p:sp>
+        <p:nvSpPr>
+          <p:cNvPr id="18" name="Text 15"/>
           <p:cNvSpPr/>
           <p:nvPr/>
         </p:nvSpPr>
@@ -8266,7 +8465,7 @@
       </p:sp>
       <p:sp>
         <p:nvSpPr>
-          <p:cNvPr id="35" name="Text 33"/>
+          <p:cNvPr id="19" name="Text 16"/>
           <p:cNvSpPr/>
           <p:nvPr/>
         </p:nvSpPr>
@@ -8297,7 +8496,7 @@
                 <a:ea typeface="Calibri" pitchFamily="34" charset="-122"/>
                 <a:cs typeface="Calibri" pitchFamily="34" charset="-120"/>
               </a:rPr>
-              <a:t>7 / 11</a:t>
+              <a:t>7 / 12</a:t>
             </a:r>
             <a:endParaRPr lang="en-US" sz="950" dirty="0"/>
           </a:p>
@@ -8368,7 +8567,7 @@
                 <a:ea typeface="Calibri" pitchFamily="34" charset="-122"/>
                 <a:cs typeface="Calibri" pitchFamily="34" charset="-120"/>
               </a:rPr>
-              <a:t>RETA FINAL</a:t>
+              <a:t>REVISÃO</a:t>
             </a:r>
             <a:endParaRPr lang="en-US" sz="1200" dirty="0"/>
           </a:p>
@@ -8407,7 +8606,7 @@
                 <a:ea typeface="Calibri" pitchFamily="34" charset="-122"/>
                 <a:cs typeface="Calibri" pitchFamily="34" charset="-120"/>
               </a:rPr>
-              <a:t>6. Agendar a publicação — a data é obrigatória</a:t>
+              <a:t>5. Recusar com relatório</a:t>
             </a:r>
             <a:endParaRPr lang="en-US" sz="3000" dirty="0"/>
           </a:p>
@@ -8481,7 +8680,7 @@
         <p:spPr>
           <a:xfrm>
             <a:off x="1097280" y="1737360"/>
-            <a:ext cx="5394960" cy="914400"/>
+            <a:ext cx="5029200" cy="914400"/>
           </a:xfrm>
           <a:prstGeom prst="rect">
             <a:avLst/>
@@ -8505,7 +8704,7 @@
                 <a:ea typeface="Calibri" pitchFamily="34" charset="-122"/>
                 <a:cs typeface="Calibri" pitchFamily="34" charset="-120"/>
               </a:rPr>
-              <a:t>O formador confere o curso montado e marca </a:t>
+              <a:t>Clique no botão vermelho </a:t>
             </a:r>
             <a:pPr indent="0" marL="0">
               <a:buNone/>
@@ -8519,7 +8718,7 @@
                 <a:ea typeface="Calibri" pitchFamily="34" charset="-122"/>
                 <a:cs typeface="Calibri" pitchFamily="34" charset="-120"/>
               </a:rPr>
-              <a:t>Validado</a:t>
+              <a:t>Recusar com relatório</a:t>
             </a:r>
             <a:pPr indent="0" marL="0">
               <a:buNone/>
@@ -8607,7 +8806,7 @@
         <p:spPr>
           <a:xfrm>
             <a:off x="1097280" y="2651760"/>
-            <a:ext cx="5394960" cy="914400"/>
+            <a:ext cx="5029200" cy="914400"/>
           </a:xfrm>
           <a:prstGeom prst="rect">
             <a:avLst/>
@@ -8631,7 +8830,7 @@
                 <a:ea typeface="Calibri" pitchFamily="34" charset="-122"/>
                 <a:cs typeface="Calibri" pitchFamily="34" charset="-120"/>
               </a:rPr>
-              <a:t>Abra o curso e escolha </a:t>
+              <a:t>Escolha o </a:t>
             </a:r>
             <a:pPr indent="0" marL="0">
               <a:buNone/>
@@ -8645,7 +8844,7 @@
                 <a:ea typeface="Calibri" pitchFamily="34" charset="-122"/>
                 <a:cs typeface="Calibri" pitchFamily="34" charset="-120"/>
               </a:rPr>
-              <a:t>Pronto para Publicação</a:t>
+              <a:t>Tipo</a:t>
             </a:r>
             <a:pPr indent="0" marL="0">
               <a:buNone/>
@@ -8659,7 +8858,7 @@
                 <a:ea typeface="Calibri" pitchFamily="34" charset="-122"/>
                 <a:cs typeface="Calibri" pitchFamily="34" charset="-120"/>
               </a:rPr>
-              <a:t>;</a:t>
+              <a:t>: Técnico, Pedagógico, ABNT ou Outro;</a:t>
             </a:r>
             <a:endParaRPr lang="en-US" sz="1400" dirty="0"/>
           </a:p>
@@ -8733,7 +8932,7 @@
         <p:spPr>
           <a:xfrm>
             <a:off x="1097280" y="3566160"/>
-            <a:ext cx="5394960" cy="914400"/>
+            <a:ext cx="5029200" cy="914400"/>
           </a:xfrm>
           <a:prstGeom prst="rect">
             <a:avLst/>
@@ -8757,35 +8956,7 @@
                 <a:ea typeface="Calibri" pitchFamily="34" charset="-122"/>
                 <a:cs typeface="Calibri" pitchFamily="34" charset="-120"/>
               </a:rPr>
-              <a:t>Aparece o campo </a:t>
-            </a:r>
-            <a:pPr indent="0" marL="0">
-              <a:buNone/>
-            </a:pPr>
-            <a:r>
-              <a:rPr lang="en-US" sz="1400" b="1" dirty="0">
-                <a:solidFill>
-                  <a:srgbClr val="E8EEF7"/>
-                </a:solidFill>
-                <a:latin typeface="Calibri" pitchFamily="34" charset="0"/>
-                <a:ea typeface="Calibri" pitchFamily="34" charset="-122"/>
-                <a:cs typeface="Calibri" pitchFamily="34" charset="-120"/>
-              </a:rPr>
-              <a:t>Data de entrada na plataforma</a:t>
-            </a:r>
-            <a:pPr indent="0" marL="0">
-              <a:buNone/>
-            </a:pPr>
-            <a:r>
-              <a:rPr lang="en-US" sz="1400" dirty="0">
-                <a:solidFill>
-                  <a:srgbClr val="E8EEF7"/>
-                </a:solidFill>
-                <a:latin typeface="Calibri" pitchFamily="34" charset="0"/>
-                <a:ea typeface="Calibri" pitchFamily="34" charset="-122"/>
-                <a:cs typeface="Calibri" pitchFamily="34" charset="-120"/>
-              </a:rPr>
-              <a:t> — clique e escolha no calendário;</a:t>
+              <a:t>Descreva o ajuste com precisão;</a:t>
             </a:r>
             <a:endParaRPr lang="en-US" sz="1400" dirty="0"/>
           </a:p>
@@ -8859,7 +9030,7 @@
         <p:spPr>
           <a:xfrm>
             <a:off x="1097280" y="4480560"/>
-            <a:ext cx="5394960" cy="914400"/>
+            <a:ext cx="5029200" cy="914400"/>
           </a:xfrm>
           <a:prstGeom prst="rect">
             <a:avLst/>
@@ -8883,7 +9054,7 @@
                 <a:ea typeface="Calibri" pitchFamily="34" charset="-122"/>
                 <a:cs typeface="Calibri" pitchFamily="34" charset="-120"/>
               </a:rPr>
-              <a:t>Clique em </a:t>
+              <a:t>Linhas em branco são ignoradas. Clique em </a:t>
             </a:r>
             <a:pPr indent="0" marL="0">
               <a:buNone/>
@@ -8891,13 +9062,13 @@
             <a:r>
               <a:rPr lang="en-US" sz="1400" b="1" dirty="0">
                 <a:solidFill>
-                  <a:srgbClr val="22D3EE"/>
-                </a:solidFill>
-                <a:latin typeface="Calibri" pitchFamily="34" charset="0"/>
-                <a:ea typeface="Calibri" pitchFamily="34" charset="-122"/>
-                <a:cs typeface="Calibri" pitchFamily="34" charset="-120"/>
-              </a:rPr>
-              <a:t>Atualizar Status</a:t>
+                  <a:srgbClr val="E8EEF7"/>
+                </a:solidFill>
+                <a:latin typeface="Calibri" pitchFamily="34" charset="0"/>
+                <a:ea typeface="Calibri" pitchFamily="34" charset="-122"/>
+                <a:cs typeface="Calibri" pitchFamily="34" charset="-120"/>
+              </a:rPr>
+              <a:t>Confirmar Recusa</a:t>
             </a:r>
             <a:pPr indent="0" marL="0">
               <a:buNone/>
@@ -8911,7 +9082,7 @@
                 <a:ea typeface="Calibri" pitchFamily="34" charset="-122"/>
                 <a:cs typeface="Calibri" pitchFamily="34" charset="-120"/>
               </a:rPr>
-              <a:t>. Formador e MB recebem a data por e-mail.</a:t>
+              <a:t>.</a:t>
             </a:r>
             <a:endParaRPr lang="en-US" sz="1400" dirty="0"/>
           </a:p>
@@ -8926,7 +9097,7 @@
         <p:spPr>
           <a:xfrm>
             <a:off x="640080" y="5212080"/>
-            <a:ext cx="5852160" cy="1005840"/>
+            <a:ext cx="5486400" cy="1005840"/>
           </a:xfrm>
           <a:prstGeom prst="roundRect">
             <a:avLst>
@@ -8953,7 +9124,7 @@
         <p:spPr>
           <a:xfrm>
             <a:off x="841248" y="5358384"/>
-            <a:ext cx="5449824" cy="329184"/>
+            <a:ext cx="5084064" cy="329184"/>
           </a:xfrm>
           <a:prstGeom prst="rect">
             <a:avLst/>
@@ -8977,7 +9148,7 @@
                 <a:ea typeface="Calibri" pitchFamily="34" charset="-122"/>
                 <a:cs typeface="Calibri" pitchFamily="34" charset="-120"/>
               </a:rPr>
-              <a:t>Depois disso</a:t>
+              <a:t>Tudo numa operação só</a:t>
             </a:r>
             <a:endParaRPr lang="en-US" sz="1400" dirty="0"/>
           </a:p>
@@ -8992,7 +9163,7 @@
         <p:spPr>
           <a:xfrm>
             <a:off x="841248" y="5687568"/>
-            <a:ext cx="5449824" cy="402336"/>
+            <a:ext cx="5084064" cy="402336"/>
           </a:xfrm>
           <a:prstGeom prst="rect">
             <a:avLst/>
@@ -9019,7 +9190,7 @@
                 <a:ea typeface="Calibri" pitchFamily="34" charset="-122"/>
                 <a:cs typeface="Calibri" pitchFamily="34" charset="-120"/>
               </a:rPr>
-              <a:t>A MB publica na data e marca "Publicado" — fim do fluxo.</a:t>
+              <a:t>Registra os apontamentos, muda o status e envia ao formador o e-mail com a lista completa.</a:t>
             </a:r>
             <a:endParaRPr lang="en-US" sz="1250" dirty="0"/>
           </a:p>
@@ -9033,12 +9204,12 @@
         </p:nvSpPr>
         <p:spPr>
           <a:xfrm>
-            <a:off x="6858000" y="2011680"/>
-            <a:ext cx="4754880" cy="2072549"/>
+            <a:off x="6672598" y="1554480"/>
+            <a:ext cx="4759925" cy="4663440"/>
           </a:xfrm>
           <a:prstGeom prst="roundRect">
             <a:avLst>
-              <a:gd name="adj" fmla="val 3971"/>
+              <a:gd name="adj" fmla="val 1765"/>
             </a:avLst>
           </a:prstGeom>
           <a:solidFill>
@@ -9054,7 +9225,7 @@
       </p:sp>
       <p:pic>
         <p:nvPicPr>
-          <p:cNvPr id="20" name="Image 0" descr="/home/user/AutoriaSCS-Scrum-cursos/docs/tutoriais/img/ti-data-publicacao.png">    </p:cNvPr>
+          <p:cNvPr id="20" name="Image 0" descr="/home/user/AutoriaSCS-Scrum-cursos/docs/tutoriais/img/ti-modal-recusa.png">    </p:cNvPr>
           <p:cNvPicPr>
             <a:picLocks noChangeAspect="1"/>
           </p:cNvPicPr>
@@ -9068,8 +9239,8 @@
         </p:blipFill>
         <p:spPr>
           <a:xfrm>
-            <a:off x="6967728" y="2121408"/>
-            <a:ext cx="4535424" cy="1853093"/>
+            <a:off x="6782326" y="1664208"/>
+            <a:ext cx="4540469" cy="4443984"/>
           </a:xfrm>
           <a:prstGeom prst="rect">
             <a:avLst/>
@@ -9148,7 +9319,7 @@
                 <a:ea typeface="Calibri" pitchFamily="34" charset="-122"/>
                 <a:cs typeface="Calibri" pitchFamily="34" charset="-120"/>
               </a:rPr>
-              <a:t>8 / 11</a:t>
+              <a:t>8 / 12</a:t>
             </a:r>
             <a:endParaRPr lang="en-US" sz="950" dirty="0"/>
           </a:p>
@@ -9219,7 +9390,7 @@
                 <a:ea typeface="Calibri" pitchFamily="34" charset="-122"/>
                 <a:cs typeface="Calibri" pitchFamily="34" charset="-120"/>
               </a:rPr>
-              <a:t>APOIO</a:t>
+              <a:t>FLUXO</a:t>
             </a:r>
             <a:endParaRPr lang="en-US" sz="1200" dirty="0"/>
           </a:p>
@@ -9258,7 +9429,7 @@
                 <a:ea typeface="Calibri" pitchFamily="34" charset="-122"/>
                 <a:cs typeface="Calibri" pitchFamily="34" charset="-120"/>
               </a:rPr>
-              <a:t>7. Biblioteca de Modelos</a:t>
+              <a:t>6. Resumo das suas movimentações</a:t>
             </a:r>
             <a:endParaRPr lang="en-US" sz="3000" dirty="0"/>
           </a:p>
@@ -9266,24 +9437,98 @@
       </p:sp>
       <p:sp>
         <p:nvSpPr>
-          <p:cNvPr id="4" name="Shape 2"/>
-          <p:cNvSpPr/>
-          <p:nvPr/>
-        </p:nvSpPr>
-        <p:spPr>
-          <a:xfrm>
-            <a:off x="640080" y="1554480"/>
-            <a:ext cx="5760720" cy="1349134"/>
-          </a:xfrm>
-          <a:prstGeom prst="roundRect">
-            <a:avLst>
-              <a:gd name="adj" fmla="val 6100"/>
-            </a:avLst>
-          </a:prstGeom>
-          <a:solidFill>
-            <a:srgbClr val="10233F"/>
-          </a:solidFill>
-          <a:ln w="12700">
+          <p:cNvPr id="4" name="Text 2"/>
+          <p:cNvSpPr/>
+          <p:nvPr/>
+        </p:nvSpPr>
+        <p:spPr>
+          <a:xfrm>
+            <a:off x="640080" y="1691640"/>
+            <a:ext cx="6035040" cy="548640"/>
+          </a:xfrm>
+          <a:prstGeom prst="rect">
+            <a:avLst/>
+          </a:prstGeom>
+          <a:noFill/>
+          <a:ln/>
+        </p:spPr>
+        <p:txBody>
+          <a:bodyPr wrap="square" lIns="0" tIns="0" rIns="0" bIns="0" rtlCol="0" anchor="ctr"/>
+          <a:lstStyle/>
+          <a:p>
+            <a:pPr indent="0" marL="0">
+              <a:buNone/>
+            </a:pPr>
+            <a:r>
+              <a:rPr lang="en-US" sz="1300" b="1" dirty="0">
+                <a:solidFill>
+                  <a:srgbClr val="22D3EE"/>
+                </a:solidFill>
+                <a:latin typeface="Calibri" pitchFamily="34" charset="0"/>
+                <a:ea typeface="Calibri" pitchFamily="34" charset="-122"/>
+                <a:cs typeface="Calibri" pitchFamily="34" charset="-120"/>
+              </a:rPr>
+              <a:t>Curso Proposto → Projeto Aprovado</a:t>
+            </a:r>
+            <a:endParaRPr lang="en-US" sz="1300" dirty="0"/>
+          </a:p>
+        </p:txBody>
+      </p:sp>
+      <p:sp>
+        <p:nvSpPr>
+          <p:cNvPr id="5" name="Text 3"/>
+          <p:cNvSpPr/>
+          <p:nvPr/>
+        </p:nvSpPr>
+        <p:spPr>
+          <a:xfrm>
+            <a:off x="6766560" y="1691640"/>
+            <a:ext cx="4846320" cy="548640"/>
+          </a:xfrm>
+          <a:prstGeom prst="rect">
+            <a:avLst/>
+          </a:prstGeom>
+          <a:noFill/>
+          <a:ln/>
+        </p:spPr>
+        <p:txBody>
+          <a:bodyPr wrap="square" lIns="0" tIns="0" rIns="0" bIns="0" rtlCol="0" anchor="ctr"/>
+          <a:lstStyle/>
+          <a:p>
+            <a:pPr indent="0" marL="0">
+              <a:buNone/>
+            </a:pPr>
+            <a:r>
+              <a:rPr lang="en-US" sz="1300" dirty="0">
+                <a:solidFill>
+                  <a:srgbClr val="E8EEF7"/>
+                </a:solidFill>
+                <a:latin typeface="Calibri" pitchFamily="34" charset="0"/>
+                <a:ea typeface="Calibri" pitchFamily="34" charset="-122"/>
+                <a:cs typeface="Calibri" pitchFamily="34" charset="-120"/>
+              </a:rPr>
+              <a:t>Aprovação do projeto (com a carga horária)</a:t>
+            </a:r>
+            <a:endParaRPr lang="en-US" sz="1300" dirty="0"/>
+          </a:p>
+        </p:txBody>
+      </p:sp>
+      <p:sp>
+        <p:nvSpPr>
+          <p:cNvPr id="6" name="Shape 4"/>
+          <p:cNvSpPr/>
+          <p:nvPr/>
+        </p:nvSpPr>
+        <p:spPr>
+          <a:xfrm>
+            <a:off x="640080" y="2267712"/>
+            <a:ext cx="10972800" cy="0"/>
+          </a:xfrm>
+          <a:prstGeom prst="line">
+            <a:avLst/>
+          </a:prstGeom>
+          <a:noFill/>
+          <a:ln w="9525">
             <a:solidFill>
               <a:srgbClr val="1D3A5F"/>
             </a:solidFill>
@@ -9291,50 +9536,100 @@
           </a:ln>
         </p:spPr>
       </p:sp>
-      <p:pic>
-        <p:nvPicPr>
-          <p:cNvPr id="5" name="Image 0" descr="/home/user/AutoriaSCS-Scrum-cursos/docs/tutoriais/img/modelos-publicar.png">    </p:cNvPr>
-          <p:cNvPicPr>
-            <a:picLocks noChangeAspect="1"/>
-          </p:cNvPicPr>
-          <p:nvPr/>
-        </p:nvPicPr>
-        <p:blipFill>
-          <a:blip r:embed="rId1"/>
-          <a:stretch>
-            <a:fillRect/>
-          </a:stretch>
-        </p:blipFill>
-        <p:spPr>
-          <a:xfrm>
-            <a:off x="749808" y="1664208"/>
-            <a:ext cx="5541264" cy="1129678"/>
-          </a:xfrm>
-          <a:prstGeom prst="rect">
-            <a:avLst/>
-          </a:prstGeom>
-        </p:spPr>
-      </p:pic>
-      <p:sp>
-        <p:nvSpPr>
-          <p:cNvPr id="6" name="Shape 3"/>
-          <p:cNvSpPr/>
-          <p:nvPr/>
-        </p:nvSpPr>
-        <p:spPr>
-          <a:xfrm>
-            <a:off x="6675120" y="1554480"/>
-            <a:ext cx="4937760" cy="822960"/>
-          </a:xfrm>
-          <a:prstGeom prst="roundRect">
-            <a:avLst>
-              <a:gd name="adj" fmla="val 10000"/>
-            </a:avLst>
-          </a:prstGeom>
-          <a:solidFill>
-            <a:srgbClr val="10233F"/>
-          </a:solidFill>
-          <a:ln w="12700">
+      <p:sp>
+        <p:nvSpPr>
+          <p:cNvPr id="7" name="Text 5"/>
+          <p:cNvSpPr/>
+          <p:nvPr/>
+        </p:nvSpPr>
+        <p:spPr>
+          <a:xfrm>
+            <a:off x="640080" y="2313432"/>
+            <a:ext cx="6035040" cy="548640"/>
+          </a:xfrm>
+          <a:prstGeom prst="rect">
+            <a:avLst/>
+          </a:prstGeom>
+          <a:noFill/>
+          <a:ln/>
+        </p:spPr>
+        <p:txBody>
+          <a:bodyPr wrap="square" lIns="0" tIns="0" rIns="0" bIns="0" rtlCol="0" anchor="ctr"/>
+          <a:lstStyle/>
+          <a:p>
+            <a:pPr indent="0" marL="0">
+              <a:buNone/>
+            </a:pPr>
+            <a:r>
+              <a:rPr lang="en-US" sz="1300" b="1" dirty="0">
+                <a:solidFill>
+                  <a:srgbClr val="22D3EE"/>
+                </a:solidFill>
+                <a:latin typeface="Calibri" pitchFamily="34" charset="0"/>
+                <a:ea typeface="Calibri" pitchFamily="34" charset="-122"/>
+                <a:cs typeface="Calibri" pitchFamily="34" charset="-120"/>
+              </a:rPr>
+              <a:t>Pronto para Análise → Em Revisão</a:t>
+            </a:r>
+            <a:endParaRPr lang="en-US" sz="1300" dirty="0"/>
+          </a:p>
+        </p:txBody>
+      </p:sp>
+      <p:sp>
+        <p:nvSpPr>
+          <p:cNvPr id="8" name="Text 6"/>
+          <p:cNvSpPr/>
+          <p:nvPr/>
+        </p:nvSpPr>
+        <p:spPr>
+          <a:xfrm>
+            <a:off x="6766560" y="2313432"/>
+            <a:ext cx="4846320" cy="548640"/>
+          </a:xfrm>
+          <a:prstGeom prst="rect">
+            <a:avLst/>
+          </a:prstGeom>
+          <a:noFill/>
+          <a:ln/>
+        </p:spPr>
+        <p:txBody>
+          <a:bodyPr wrap="square" lIns="0" tIns="0" rIns="0" bIns="0" rtlCol="0" anchor="ctr"/>
+          <a:lstStyle/>
+          <a:p>
+            <a:pPr indent="0" marL="0">
+              <a:buNone/>
+            </a:pPr>
+            <a:r>
+              <a:rPr lang="en-US" sz="1300" dirty="0">
+                <a:solidFill>
+                  <a:srgbClr val="E8EEF7"/>
+                </a:solidFill>
+                <a:latin typeface="Calibri" pitchFamily="34" charset="0"/>
+                <a:ea typeface="Calibri" pitchFamily="34" charset="-122"/>
+                <a:cs typeface="Calibri" pitchFamily="34" charset="-120"/>
+              </a:rPr>
+              <a:t>Ao iniciar a análise</a:t>
+            </a:r>
+            <a:endParaRPr lang="en-US" sz="1300" dirty="0"/>
+          </a:p>
+        </p:txBody>
+      </p:sp>
+      <p:sp>
+        <p:nvSpPr>
+          <p:cNvPr id="9" name="Shape 7"/>
+          <p:cNvSpPr/>
+          <p:nvPr/>
+        </p:nvSpPr>
+        <p:spPr>
+          <a:xfrm>
+            <a:off x="640080" y="2889504"/>
+            <a:ext cx="10972800" cy="0"/>
+          </a:xfrm>
+          <a:prstGeom prst="line">
+            <a:avLst/>
+          </a:prstGeom>
+          <a:noFill/>
+          <a:ln w="9525">
             <a:solidFill>
               <a:srgbClr val="1D3A5F"/>
             </a:solidFill>
@@ -9344,30 +9639,30 @@
       </p:sp>
       <p:sp>
         <p:nvSpPr>
-          <p:cNvPr id="7" name="Text 4"/>
-          <p:cNvSpPr/>
-          <p:nvPr/>
-        </p:nvSpPr>
-        <p:spPr>
-          <a:xfrm>
-            <a:off x="6876288" y="1700784"/>
-            <a:ext cx="4535424" cy="329184"/>
-          </a:xfrm>
-          <a:prstGeom prst="rect">
-            <a:avLst/>
-          </a:prstGeom>
-          <a:noFill/>
-          <a:ln/>
-        </p:spPr>
-        <p:txBody>
-          <a:bodyPr wrap="square" lIns="0" tIns="0" rIns="0" bIns="0" rtlCol="0" anchor="ctr"/>
-          <a:lstStyle/>
-          <a:p>
-            <a:pPr indent="0" marL="0">
-              <a:buNone/>
-            </a:pPr>
-            <a:r>
-              <a:rPr lang="en-US" sz="1250" b="1" dirty="0">
+          <p:cNvPr id="10" name="Text 8"/>
+          <p:cNvSpPr/>
+          <p:nvPr/>
+        </p:nvSpPr>
+        <p:spPr>
+          <a:xfrm>
+            <a:off x="640080" y="2935224"/>
+            <a:ext cx="6035040" cy="548640"/>
+          </a:xfrm>
+          <a:prstGeom prst="rect">
+            <a:avLst/>
+          </a:prstGeom>
+          <a:noFill/>
+          <a:ln/>
+        </p:spPr>
+        <p:txBody>
+          <a:bodyPr wrap="square" lIns="0" tIns="0" rIns="0" bIns="0" rtlCol="0" anchor="ctr"/>
+          <a:lstStyle/>
+          <a:p>
+            <a:pPr indent="0" marL="0">
+              <a:buNone/>
+            </a:pPr>
+            <a:r>
+              <a:rPr lang="en-US" sz="1300" b="1" dirty="0">
                 <a:solidFill>
                   <a:srgbClr val="22D3EE"/>
                 </a:solidFill>
@@ -9375,41 +9670,38 @@
                 <a:ea typeface="Calibri" pitchFamily="34" charset="-122"/>
                 <a:cs typeface="Calibri" pitchFamily="34" charset="-120"/>
               </a:rPr>
-              <a:t>Título e Categoria</a:t>
-            </a:r>
-            <a:endParaRPr lang="en-US" sz="1250" dirty="0"/>
-          </a:p>
-        </p:txBody>
-      </p:sp>
-      <p:sp>
-        <p:nvSpPr>
-          <p:cNvPr id="8" name="Text 5"/>
-          <p:cNvSpPr/>
-          <p:nvPr/>
-        </p:nvSpPr>
-        <p:spPr>
-          <a:xfrm>
-            <a:off x="6876288" y="2029968"/>
-            <a:ext cx="4535424" cy="219456"/>
-          </a:xfrm>
-          <a:prstGeom prst="rect">
-            <a:avLst/>
-          </a:prstGeom>
-          <a:noFill/>
-          <a:ln/>
-        </p:spPr>
-        <p:txBody>
-          <a:bodyPr wrap="square" lIns="0" tIns="0" rIns="0" bIns="0" rtlCol="0" anchor="t"/>
-          <a:lstStyle/>
-          <a:p>
-            <a:pPr indent="0" marL="0">
-              <a:lnSpc>
-                <a:spcPct val="112000"/>
-              </a:lnSpc>
-              <a:buNone/>
-            </a:pPr>
-            <a:r>
-              <a:rPr lang="en-US" sz="1150" dirty="0">
+              <a:t>Pronto para Nova Análise → Em Revisão</a:t>
+            </a:r>
+            <a:endParaRPr lang="en-US" sz="1300" dirty="0"/>
+          </a:p>
+        </p:txBody>
+      </p:sp>
+      <p:sp>
+        <p:nvSpPr>
+          <p:cNvPr id="11" name="Text 9"/>
+          <p:cNvSpPr/>
+          <p:nvPr/>
+        </p:nvSpPr>
+        <p:spPr>
+          <a:xfrm>
+            <a:off x="6766560" y="2935224"/>
+            <a:ext cx="4846320" cy="548640"/>
+          </a:xfrm>
+          <a:prstGeom prst="rect">
+            <a:avLst/>
+          </a:prstGeom>
+          <a:noFill/>
+          <a:ln/>
+        </p:spPr>
+        <p:txBody>
+          <a:bodyPr wrap="square" lIns="0" tIns="0" rIns="0" bIns="0" rtlCol="0" anchor="ctr"/>
+          <a:lstStyle/>
+          <a:p>
+            <a:pPr indent="0" marL="0">
+              <a:buNone/>
+            </a:pPr>
+            <a:r>
+              <a:rPr lang="en-US" sz="1300" dirty="0">
                 <a:solidFill>
                   <a:srgbClr val="E8EEF7"/>
                 </a:solidFill>
@@ -9417,32 +9709,28 @@
                 <a:ea typeface="Calibri" pitchFamily="34" charset="-122"/>
                 <a:cs typeface="Calibri" pitchFamily="34" charset="-120"/>
               </a:rPr>
-              <a:t>Nome do template e o tipo (Slides, Estrutura, Guia...)</a:t>
-            </a:r>
-            <a:endParaRPr lang="en-US" sz="1150" dirty="0"/>
-          </a:p>
-        </p:txBody>
-      </p:sp>
-      <p:sp>
-        <p:nvSpPr>
-          <p:cNvPr id="9" name="Shape 6"/>
-          <p:cNvSpPr/>
-          <p:nvPr/>
-        </p:nvSpPr>
-        <p:spPr>
-          <a:xfrm>
-            <a:off x="6675120" y="2487168"/>
-            <a:ext cx="4937760" cy="822960"/>
-          </a:xfrm>
-          <a:prstGeom prst="roundRect">
-            <a:avLst>
-              <a:gd name="adj" fmla="val 10000"/>
-            </a:avLst>
-          </a:prstGeom>
-          <a:solidFill>
-            <a:srgbClr val="10233F"/>
-          </a:solidFill>
-          <a:ln w="12700">
+              <a:t>Ao iniciar a reanálise</a:t>
+            </a:r>
+            <a:endParaRPr lang="en-US" sz="1300" dirty="0"/>
+          </a:p>
+        </p:txBody>
+      </p:sp>
+      <p:sp>
+        <p:nvSpPr>
+          <p:cNvPr id="12" name="Shape 10"/>
+          <p:cNvSpPr/>
+          <p:nvPr/>
+        </p:nvSpPr>
+        <p:spPr>
+          <a:xfrm>
+            <a:off x="640080" y="3511296"/>
+            <a:ext cx="10972800" cy="0"/>
+          </a:xfrm>
+          <a:prstGeom prst="line">
+            <a:avLst/>
+          </a:prstGeom>
+          <a:noFill/>
+          <a:ln w="9525">
             <a:solidFill>
               <a:srgbClr val="1D3A5F"/>
             </a:solidFill>
@@ -9452,30 +9740,30 @@
       </p:sp>
       <p:sp>
         <p:nvSpPr>
-          <p:cNvPr id="10" name="Text 7"/>
-          <p:cNvSpPr/>
-          <p:nvPr/>
-        </p:nvSpPr>
-        <p:spPr>
-          <a:xfrm>
-            <a:off x="6876288" y="2633472"/>
-            <a:ext cx="4535424" cy="329184"/>
-          </a:xfrm>
-          <a:prstGeom prst="rect">
-            <a:avLst/>
-          </a:prstGeom>
-          <a:noFill/>
-          <a:ln/>
-        </p:spPr>
-        <p:txBody>
-          <a:bodyPr wrap="square" lIns="0" tIns="0" rIns="0" bIns="0" rtlCol="0" anchor="ctr"/>
-          <a:lstStyle/>
-          <a:p>
-            <a:pPr indent="0" marL="0">
-              <a:buNone/>
-            </a:pPr>
-            <a:r>
-              <a:rPr lang="en-US" sz="1250" b="1" dirty="0">
+          <p:cNvPr id="13" name="Text 11"/>
+          <p:cNvSpPr/>
+          <p:nvPr/>
+        </p:nvSpPr>
+        <p:spPr>
+          <a:xfrm>
+            <a:off x="640080" y="3557016"/>
+            <a:ext cx="6035040" cy="548640"/>
+          </a:xfrm>
+          <a:prstGeom prst="rect">
+            <a:avLst/>
+          </a:prstGeom>
+          <a:noFill/>
+          <a:ln/>
+        </p:spPr>
+        <p:txBody>
+          <a:bodyPr wrap="square" lIns="0" tIns="0" rIns="0" bIns="0" rtlCol="0" anchor="ctr"/>
+          <a:lstStyle/>
+          <a:p>
+            <a:pPr indent="0" marL="0">
+              <a:buNone/>
+            </a:pPr>
+            <a:r>
+              <a:rPr lang="en-US" sz="1300" b="1" dirty="0">
                 <a:solidFill>
                   <a:srgbClr val="22D3EE"/>
                 </a:solidFill>
@@ -9483,41 +9771,38 @@
                 <a:ea typeface="Calibri" pitchFamily="34" charset="-122"/>
                 <a:cs typeface="Calibri" pitchFamily="34" charset="-120"/>
               </a:rPr>
-              <a:t>Versão</a:t>
-            </a:r>
-            <a:endParaRPr lang="en-US" sz="1250" dirty="0"/>
-          </a:p>
-        </p:txBody>
-      </p:sp>
-      <p:sp>
-        <p:nvSpPr>
-          <p:cNvPr id="11" name="Text 8"/>
-          <p:cNvSpPr/>
-          <p:nvPr/>
-        </p:nvSpPr>
-        <p:spPr>
-          <a:xfrm>
-            <a:off x="6876288" y="2962656"/>
-            <a:ext cx="4535424" cy="219456"/>
-          </a:xfrm>
-          <a:prstGeom prst="rect">
-            <a:avLst/>
-          </a:prstGeom>
-          <a:noFill/>
-          <a:ln/>
-        </p:spPr>
-        <p:txBody>
-          <a:bodyPr wrap="square" lIns="0" tIns="0" rIns="0" bIns="0" rtlCol="0" anchor="t"/>
-          <a:lstStyle/>
-          <a:p>
-            <a:pPr indent="0" marL="0">
-              <a:lnSpc>
-                <a:spcPct val="112000"/>
-              </a:lnSpc>
-              <a:buNone/>
-            </a:pPr>
-            <a:r>
-              <a:rPr lang="en-US" sz="1150" dirty="0">
+              <a:t>Em Revisão → Aprovado</a:t>
+            </a:r>
+            <a:endParaRPr lang="en-US" sz="1300" dirty="0"/>
+          </a:p>
+        </p:txBody>
+      </p:sp>
+      <p:sp>
+        <p:nvSpPr>
+          <p:cNvPr id="14" name="Text 12"/>
+          <p:cNvSpPr/>
+          <p:nvPr/>
+        </p:nvSpPr>
+        <p:spPr>
+          <a:xfrm>
+            <a:off x="6766560" y="3557016"/>
+            <a:ext cx="4846320" cy="548640"/>
+          </a:xfrm>
+          <a:prstGeom prst="rect">
+            <a:avLst/>
+          </a:prstGeom>
+          <a:noFill/>
+          <a:ln/>
+        </p:spPr>
+        <p:txBody>
+          <a:bodyPr wrap="square" lIns="0" tIns="0" rIns="0" bIns="0" rtlCol="0" anchor="ctr"/>
+          <a:lstStyle/>
+          <a:p>
+            <a:pPr indent="0" marL="0">
+              <a:buNone/>
+            </a:pPr>
+            <a:r>
+              <a:rPr lang="en-US" sz="1300" dirty="0">
                 <a:solidFill>
                   <a:srgbClr val="E8EEF7"/>
                 </a:solidFill>
@@ -9525,32 +9810,28 @@
                 <a:ea typeface="Calibri" pitchFamily="34" charset="-122"/>
                 <a:cs typeface="Calibri" pitchFamily="34" charset="-120"/>
               </a:rPr>
-              <a:t>Ex.: 1.0, 2.1 — o formador sabe qual é a mais nova</a:t>
-            </a:r>
-            <a:endParaRPr lang="en-US" sz="1150" dirty="0"/>
-          </a:p>
-        </p:txBody>
-      </p:sp>
-      <p:sp>
-        <p:nvSpPr>
-          <p:cNvPr id="12" name="Shape 9"/>
-          <p:cNvSpPr/>
-          <p:nvPr/>
-        </p:nvSpPr>
-        <p:spPr>
-          <a:xfrm>
-            <a:off x="6675120" y="3419856"/>
-            <a:ext cx="4937760" cy="822960"/>
-          </a:xfrm>
-          <a:prstGeom prst="roundRect">
-            <a:avLst>
-              <a:gd name="adj" fmla="val 10000"/>
-            </a:avLst>
-          </a:prstGeom>
-          <a:solidFill>
-            <a:srgbClr val="10233F"/>
-          </a:solidFill>
-          <a:ln w="12700">
+              <a:t>Material aprovado</a:t>
+            </a:r>
+            <a:endParaRPr lang="en-US" sz="1300" dirty="0"/>
+          </a:p>
+        </p:txBody>
+      </p:sp>
+      <p:sp>
+        <p:nvSpPr>
+          <p:cNvPr id="15" name="Shape 13"/>
+          <p:cNvSpPr/>
+          <p:nvPr/>
+        </p:nvSpPr>
+        <p:spPr>
+          <a:xfrm>
+            <a:off x="640080" y="4133088"/>
+            <a:ext cx="10972800" cy="0"/>
+          </a:xfrm>
+          <a:prstGeom prst="line">
+            <a:avLst/>
+          </a:prstGeom>
+          <a:noFill/>
+          <a:ln w="9525">
             <a:solidFill>
               <a:srgbClr val="1D3A5F"/>
             </a:solidFill>
@@ -9560,30 +9841,30 @@
       </p:sp>
       <p:sp>
         <p:nvSpPr>
-          <p:cNvPr id="13" name="Text 10"/>
-          <p:cNvSpPr/>
-          <p:nvPr/>
-        </p:nvSpPr>
-        <p:spPr>
-          <a:xfrm>
-            <a:off x="6876288" y="3566160"/>
-            <a:ext cx="4535424" cy="329184"/>
-          </a:xfrm>
-          <a:prstGeom prst="rect">
-            <a:avLst/>
-          </a:prstGeom>
-          <a:noFill/>
-          <a:ln/>
-        </p:spPr>
-        <p:txBody>
-          <a:bodyPr wrap="square" lIns="0" tIns="0" rIns="0" bIns="0" rtlCol="0" anchor="ctr"/>
-          <a:lstStyle/>
-          <a:p>
-            <a:pPr indent="0" marL="0">
-              <a:buNone/>
-            </a:pPr>
-            <a:r>
-              <a:rPr lang="en-US" sz="1250" b="1" dirty="0">
+          <p:cNvPr id="16" name="Text 14"/>
+          <p:cNvSpPr/>
+          <p:nvPr/>
+        </p:nvSpPr>
+        <p:spPr>
+          <a:xfrm>
+            <a:off x="640080" y="4178808"/>
+            <a:ext cx="6035040" cy="548640"/>
+          </a:xfrm>
+          <a:prstGeom prst="rect">
+            <a:avLst/>
+          </a:prstGeom>
+          <a:noFill/>
+          <a:ln/>
+        </p:spPr>
+        <p:txBody>
+          <a:bodyPr wrap="square" lIns="0" tIns="0" rIns="0" bIns="0" rtlCol="0" anchor="ctr"/>
+          <a:lstStyle/>
+          <a:p>
+            <a:pPr indent="0" marL="0">
+              <a:buNone/>
+            </a:pPr>
+            <a:r>
+              <a:rPr lang="en-US" sz="1300" b="1" dirty="0">
                 <a:solidFill>
                   <a:srgbClr val="22D3EE"/>
                 </a:solidFill>
@@ -9591,41 +9872,38 @@
                 <a:ea typeface="Calibri" pitchFamily="34" charset="-122"/>
                 <a:cs typeface="Calibri" pitchFamily="34" charset="-120"/>
               </a:rPr>
-              <a:t>Arquivo</a:t>
-            </a:r>
-            <a:endParaRPr lang="en-US" sz="1250" dirty="0"/>
-          </a:p>
-        </p:txBody>
-      </p:sp>
-      <p:sp>
-        <p:nvSpPr>
-          <p:cNvPr id="14" name="Text 11"/>
-          <p:cNvSpPr/>
-          <p:nvPr/>
-        </p:nvSpPr>
-        <p:spPr>
-          <a:xfrm>
-            <a:off x="6876288" y="3895344"/>
-            <a:ext cx="4535424" cy="219456"/>
-          </a:xfrm>
-          <a:prstGeom prst="rect">
-            <a:avLst/>
-          </a:prstGeom>
-          <a:noFill/>
-          <a:ln/>
-        </p:spPr>
-        <p:txBody>
-          <a:bodyPr wrap="square" lIns="0" tIns="0" rIns="0" bIns="0" rtlCol="0" anchor="t"/>
-          <a:lstStyle/>
-          <a:p>
-            <a:pPr indent="0" marL="0">
-              <a:lnSpc>
-                <a:spcPct val="112000"/>
-              </a:lnSpc>
-              <a:buNone/>
-            </a:pPr>
-            <a:r>
-              <a:rPr lang="en-US" sz="1150" dirty="0">
+              <a:t>Em Revisão → Recusado - Ajustes Necessários</a:t>
+            </a:r>
+            <a:endParaRPr lang="en-US" sz="1300" dirty="0"/>
+          </a:p>
+        </p:txBody>
+      </p:sp>
+      <p:sp>
+        <p:nvSpPr>
+          <p:cNvPr id="17" name="Text 15"/>
+          <p:cNvSpPr/>
+          <p:nvPr/>
+        </p:nvSpPr>
+        <p:spPr>
+          <a:xfrm>
+            <a:off x="6766560" y="4178808"/>
+            <a:ext cx="4846320" cy="548640"/>
+          </a:xfrm>
+          <a:prstGeom prst="rect">
+            <a:avLst/>
+          </a:prstGeom>
+          <a:noFill/>
+          <a:ln/>
+        </p:spPr>
+        <p:txBody>
+          <a:bodyPr wrap="square" lIns="0" tIns="0" rIns="0" bIns="0" rtlCol="0" anchor="ctr"/>
+          <a:lstStyle/>
+          <a:p>
+            <a:pPr indent="0" marL="0">
+              <a:buNone/>
+            </a:pPr>
+            <a:r>
+              <a:rPr lang="en-US" sz="1300" dirty="0">
                 <a:solidFill>
                   <a:srgbClr val="E8EEF7"/>
                 </a:solidFill>
@@ -9633,32 +9911,28 @@
                 <a:ea typeface="Calibri" pitchFamily="34" charset="-122"/>
                 <a:cs typeface="Calibri" pitchFamily="34" charset="-120"/>
               </a:rPr>
-              <a:t>Até 50MB</a:t>
-            </a:r>
-            <a:endParaRPr lang="en-US" sz="1150" dirty="0"/>
-          </a:p>
-        </p:txBody>
-      </p:sp>
-      <p:sp>
-        <p:nvSpPr>
-          <p:cNvPr id="15" name="Shape 12"/>
-          <p:cNvSpPr/>
-          <p:nvPr/>
-        </p:nvSpPr>
-        <p:spPr>
-          <a:xfrm>
-            <a:off x="6675120" y="4352544"/>
-            <a:ext cx="4937760" cy="822960"/>
-          </a:xfrm>
-          <a:prstGeom prst="roundRect">
-            <a:avLst>
-              <a:gd name="adj" fmla="val 10000"/>
-            </a:avLst>
-          </a:prstGeom>
-          <a:solidFill>
-            <a:srgbClr val="10233F"/>
-          </a:solidFill>
-          <a:ln w="12700">
+              <a:t>Pelo botão "Recusar com relatório"</a:t>
+            </a:r>
+            <a:endParaRPr lang="en-US" sz="1300" dirty="0"/>
+          </a:p>
+        </p:txBody>
+      </p:sp>
+      <p:sp>
+        <p:nvSpPr>
+          <p:cNvPr id="18" name="Shape 16"/>
+          <p:cNvSpPr/>
+          <p:nvPr/>
+        </p:nvSpPr>
+        <p:spPr>
+          <a:xfrm>
+            <a:off x="640080" y="4754880"/>
+            <a:ext cx="10972800" cy="0"/>
+          </a:xfrm>
+          <a:prstGeom prst="line">
+            <a:avLst/>
+          </a:prstGeom>
+          <a:noFill/>
+          <a:ln w="9525">
             <a:solidFill>
               <a:srgbClr val="1D3A5F"/>
             </a:solidFill>
@@ -9668,30 +9942,30 @@
       </p:sp>
       <p:sp>
         <p:nvSpPr>
-          <p:cNvPr id="16" name="Text 13"/>
-          <p:cNvSpPr/>
-          <p:nvPr/>
-        </p:nvSpPr>
-        <p:spPr>
-          <a:xfrm>
-            <a:off x="6876288" y="4498848"/>
-            <a:ext cx="4535424" cy="329184"/>
-          </a:xfrm>
-          <a:prstGeom prst="rect">
-            <a:avLst/>
-          </a:prstGeom>
-          <a:noFill/>
-          <a:ln/>
-        </p:spPr>
-        <p:txBody>
-          <a:bodyPr wrap="square" lIns="0" tIns="0" rIns="0" bIns="0" rtlCol="0" anchor="ctr"/>
-          <a:lstStyle/>
-          <a:p>
-            <a:pPr indent="0" marL="0">
-              <a:buNone/>
-            </a:pPr>
-            <a:r>
-              <a:rPr lang="en-US" sz="1250" b="1" dirty="0">
+          <p:cNvPr id="19" name="Text 17"/>
+          <p:cNvSpPr/>
+          <p:nvPr/>
+        </p:nvSpPr>
+        <p:spPr>
+          <a:xfrm>
+            <a:off x="640080" y="4800600"/>
+            <a:ext cx="6035040" cy="548640"/>
+          </a:xfrm>
+          <a:prstGeom prst="rect">
+            <a:avLst/>
+          </a:prstGeom>
+          <a:noFill/>
+          <a:ln/>
+        </p:spPr>
+        <p:txBody>
+          <a:bodyPr wrap="square" lIns="0" tIns="0" rIns="0" bIns="0" rtlCol="0" anchor="ctr"/>
+          <a:lstStyle/>
+          <a:p>
+            <a:pPr indent="0" marL="0">
+              <a:buNone/>
+            </a:pPr>
+            <a:r>
+              <a:rPr lang="en-US" sz="1300" b="1" dirty="0">
                 <a:solidFill>
                   <a:srgbClr val="22D3EE"/>
                 </a:solidFill>
@@ -9699,41 +9973,38 @@
                 <a:ea typeface="Calibri" pitchFamily="34" charset="-122"/>
                 <a:cs typeface="Calibri" pitchFamily="34" charset="-120"/>
               </a:rPr>
-              <a:t>★ Vigente</a:t>
-            </a:r>
-            <a:endParaRPr lang="en-US" sz="1250" dirty="0"/>
-          </a:p>
-        </p:txBody>
-      </p:sp>
-      <p:sp>
-        <p:nvSpPr>
-          <p:cNvPr id="17" name="Text 14"/>
-          <p:cNvSpPr/>
-          <p:nvPr/>
-        </p:nvSpPr>
-        <p:spPr>
-          <a:xfrm>
-            <a:off x="6876288" y="4828032"/>
-            <a:ext cx="4535424" cy="219456"/>
-          </a:xfrm>
-          <a:prstGeom prst="rect">
-            <a:avLst/>
-          </a:prstGeom>
-          <a:noFill/>
-          <a:ln/>
-        </p:spPr>
-        <p:txBody>
-          <a:bodyPr wrap="square" lIns="0" tIns="0" rIns="0" bIns="0" rtlCol="0" anchor="t"/>
-          <a:lstStyle/>
-          <a:p>
-            <a:pPr indent="0" marL="0">
-              <a:lnSpc>
-                <a:spcPct val="112000"/>
-              </a:lnSpc>
-              <a:buNone/>
-            </a:pPr>
-            <a:r>
-              <a:rPr lang="en-US" sz="1150" dirty="0">
+              <a:t>Aprovado → Enviado para Inserção</a:t>
+            </a:r>
+            <a:endParaRPr lang="en-US" sz="1300" dirty="0"/>
+          </a:p>
+        </p:txBody>
+      </p:sp>
+      <p:sp>
+        <p:nvSpPr>
+          <p:cNvPr id="20" name="Text 18"/>
+          <p:cNvSpPr/>
+          <p:nvPr/>
+        </p:nvSpPr>
+        <p:spPr>
+          <a:xfrm>
+            <a:off x="6766560" y="4800600"/>
+            <a:ext cx="4846320" cy="548640"/>
+          </a:xfrm>
+          <a:prstGeom prst="rect">
+            <a:avLst/>
+          </a:prstGeom>
+          <a:noFill/>
+          <a:ln/>
+        </p:spPr>
+        <p:txBody>
+          <a:bodyPr wrap="square" lIns="0" tIns="0" rIns="0" bIns="0" rtlCol="0" anchor="ctr"/>
+          <a:lstStyle/>
+          <a:p>
+            <a:pPr indent="0" marL="0">
+              <a:buNone/>
+            </a:pPr>
+            <a:r>
+              <a:rPr lang="en-US" sz="1300" dirty="0">
                 <a:solidFill>
                   <a:srgbClr val="E8EEF7"/>
                 </a:solidFill>
@@ -9741,32 +10012,28 @@
                 <a:ea typeface="Calibri" pitchFamily="34" charset="-122"/>
                 <a:cs typeface="Calibri" pitchFamily="34" charset="-120"/>
               </a:rPr>
-              <a:t>Marca a versão oficial que os formadores devem usar</a:t>
-            </a:r>
-            <a:endParaRPr lang="en-US" sz="1150" dirty="0"/>
-          </a:p>
-        </p:txBody>
-      </p:sp>
-      <p:sp>
-        <p:nvSpPr>
-          <p:cNvPr id="18" name="Shape 15"/>
-          <p:cNvSpPr/>
-          <p:nvPr/>
-        </p:nvSpPr>
-        <p:spPr>
-          <a:xfrm>
-            <a:off x="6675120" y="5285232"/>
-            <a:ext cx="4937760" cy="822960"/>
-          </a:xfrm>
-          <a:prstGeom prst="roundRect">
-            <a:avLst>
-              <a:gd name="adj" fmla="val 10000"/>
-            </a:avLst>
-          </a:prstGeom>
-          <a:solidFill>
-            <a:srgbClr val="10233F"/>
-          </a:solidFill>
-          <a:ln w="12700">
+              <a:t>Encaminha à MB Estúdios</a:t>
+            </a:r>
+            <a:endParaRPr lang="en-US" sz="1300" dirty="0"/>
+          </a:p>
+        </p:txBody>
+      </p:sp>
+      <p:sp>
+        <p:nvSpPr>
+          <p:cNvPr id="21" name="Shape 19"/>
+          <p:cNvSpPr/>
+          <p:nvPr/>
+        </p:nvSpPr>
+        <p:spPr>
+          <a:xfrm>
+            <a:off x="640080" y="5376672"/>
+            <a:ext cx="10972800" cy="0"/>
+          </a:xfrm>
+          <a:prstGeom prst="line">
+            <a:avLst/>
+          </a:prstGeom>
+          <a:noFill/>
+          <a:ln w="9525">
             <a:solidFill>
               <a:srgbClr val="1D3A5F"/>
             </a:solidFill>
@@ -9776,30 +10043,30 @@
       </p:sp>
       <p:sp>
         <p:nvSpPr>
-          <p:cNvPr id="19" name="Text 16"/>
-          <p:cNvSpPr/>
-          <p:nvPr/>
-        </p:nvSpPr>
-        <p:spPr>
-          <a:xfrm>
-            <a:off x="6876288" y="5431536"/>
-            <a:ext cx="4535424" cy="329184"/>
-          </a:xfrm>
-          <a:prstGeom prst="rect">
-            <a:avLst/>
-          </a:prstGeom>
-          <a:noFill/>
-          <a:ln/>
-        </p:spPr>
-        <p:txBody>
-          <a:bodyPr wrap="square" lIns="0" tIns="0" rIns="0" bIns="0" rtlCol="0" anchor="ctr"/>
-          <a:lstStyle/>
-          <a:p>
-            <a:pPr indent="0" marL="0">
-              <a:buNone/>
-            </a:pPr>
-            <a:r>
-              <a:rPr lang="en-US" sz="1250" b="1" dirty="0">
+          <p:cNvPr id="22" name="Text 20"/>
+          <p:cNvSpPr/>
+          <p:nvPr/>
+        </p:nvSpPr>
+        <p:spPr>
+          <a:xfrm>
+            <a:off x="640080" y="5422392"/>
+            <a:ext cx="6035040" cy="548640"/>
+          </a:xfrm>
+          <a:prstGeom prst="rect">
+            <a:avLst/>
+          </a:prstGeom>
+          <a:noFill/>
+          <a:ln/>
+        </p:spPr>
+        <p:txBody>
+          <a:bodyPr wrap="square" lIns="0" tIns="0" rIns="0" bIns="0" rtlCol="0" anchor="ctr"/>
+          <a:lstStyle/>
+          <a:p>
+            <a:pPr indent="0" marL="0">
+              <a:buNone/>
+            </a:pPr>
+            <a:r>
+              <a:rPr lang="en-US" sz="1300" b="1" dirty="0">
                 <a:solidFill>
                   <a:srgbClr val="22D3EE"/>
                 </a:solidFill>
@@ -9807,41 +10074,38 @@
                 <a:ea typeface="Calibri" pitchFamily="34" charset="-122"/>
                 <a:cs typeface="Calibri" pitchFamily="34" charset="-120"/>
               </a:rPr>
-              <a:t>Desativar / Excluir</a:t>
-            </a:r>
-            <a:endParaRPr lang="en-US" sz="1250" dirty="0"/>
-          </a:p>
-        </p:txBody>
-      </p:sp>
-      <p:sp>
-        <p:nvSpPr>
-          <p:cNvPr id="20" name="Text 17"/>
-          <p:cNvSpPr/>
-          <p:nvPr/>
-        </p:nvSpPr>
-        <p:spPr>
-          <a:xfrm>
-            <a:off x="6876288" y="5760720"/>
-            <a:ext cx="4535424" cy="219456"/>
-          </a:xfrm>
-          <a:prstGeom prst="rect">
-            <a:avLst/>
-          </a:prstGeom>
-          <a:noFill/>
-          <a:ln/>
-        </p:spPr>
-        <p:txBody>
-          <a:bodyPr wrap="square" lIns="0" tIns="0" rIns="0" bIns="0" rtlCol="0" anchor="t"/>
-          <a:lstStyle/>
-          <a:p>
-            <a:pPr indent="0" marL="0">
-              <a:lnSpc>
-                <a:spcPct val="112000"/>
-              </a:lnSpc>
-              <a:buNone/>
-            </a:pPr>
-            <a:r>
-              <a:rPr lang="en-US" sz="1150" dirty="0">
+              <a:t>Validado → Pronto para Publicação</a:t>
+            </a:r>
+            <a:endParaRPr lang="en-US" sz="1300" dirty="0"/>
+          </a:p>
+        </p:txBody>
+      </p:sp>
+      <p:sp>
+        <p:nvSpPr>
+          <p:cNvPr id="23" name="Text 21"/>
+          <p:cNvSpPr/>
+          <p:nvPr/>
+        </p:nvSpPr>
+        <p:spPr>
+          <a:xfrm>
+            <a:off x="6766560" y="5422392"/>
+            <a:ext cx="4846320" cy="548640"/>
+          </a:xfrm>
+          <a:prstGeom prst="rect">
+            <a:avLst/>
+          </a:prstGeom>
+          <a:noFill/>
+          <a:ln/>
+        </p:spPr>
+        <p:txBody>
+          <a:bodyPr wrap="square" lIns="0" tIns="0" rIns="0" bIns="0" rtlCol="0" anchor="ctr"/>
+          <a:lstStyle/>
+          <a:p>
+            <a:pPr indent="0" marL="0">
+              <a:buNone/>
+            </a:pPr>
+            <a:r>
+              <a:rPr lang="en-US" sz="1300" dirty="0">
                 <a:solidFill>
                   <a:srgbClr val="E8EEF7"/>
                 </a:solidFill>
@@ -9849,15 +10113,15 @@
                 <a:ea typeface="Calibri" pitchFamily="34" charset="-122"/>
                 <a:cs typeface="Calibri" pitchFamily="34" charset="-120"/>
               </a:rPr>
-              <a:t>Esconde sem apagar / remove de vez</a:t>
-            </a:r>
-            <a:endParaRPr lang="en-US" sz="1150" dirty="0"/>
-          </a:p>
-        </p:txBody>
-      </p:sp>
-      <p:sp>
-        <p:nvSpPr>
-          <p:cNvPr id="21" name="Text 18"/>
+              <a:t>Com a data de publicação</a:t>
+            </a:r>
+            <a:endParaRPr lang="en-US" sz="1300" dirty="0"/>
+          </a:p>
+        </p:txBody>
+      </p:sp>
+      <p:sp>
+        <p:nvSpPr>
+          <p:cNvPr id="24" name="Text 22"/>
           <p:cNvSpPr/>
           <p:nvPr/>
         </p:nvSpPr>
@@ -9896,7 +10160,7 @@
       </p:sp>
       <p:sp>
         <p:nvSpPr>
-          <p:cNvPr id="22" name="Text 19"/>
+          <p:cNvPr id="25" name="Text 23"/>
           <p:cNvSpPr/>
           <p:nvPr/>
         </p:nvSpPr>
@@ -9927,7 +10191,7 @@
                 <a:ea typeface="Calibri" pitchFamily="34" charset="-122"/>
                 <a:cs typeface="Calibri" pitchFamily="34" charset="-120"/>
               </a:rPr>
-              <a:t>9 / 11</a:t>
+              <a:t>9 / 12</a:t>
             </a:r>
             <a:endParaRPr lang="en-US" sz="950" dirty="0"/>
           </a:p>

--- a/docs/tutoriais/Tutorial-TI.pptx
+++ b/docs/tutoriais/Tutorial-TI.pptx
@@ -3715,12 +3715,12 @@
         </p:nvSpPr>
         <p:spPr>
           <a:xfrm>
-            <a:off x="640080" y="1691640"/>
-            <a:ext cx="10881360" cy="1234440"/>
+            <a:off x="640080" y="1645920"/>
+            <a:ext cx="10881360" cy="1188720"/>
           </a:xfrm>
           <a:prstGeom prst="roundRect">
             <a:avLst>
-              <a:gd name="adj" fmla="val 6667"/>
+              <a:gd name="adj" fmla="val 6923"/>
             </a:avLst>
           </a:prstGeom>
           <a:solidFill>
@@ -3742,7 +3742,7 @@
         </p:nvSpPr>
         <p:spPr>
           <a:xfrm>
-            <a:off x="841248" y="1837944"/>
+            <a:off x="841248" y="1792224"/>
             <a:ext cx="10479024" cy="329184"/>
           </a:xfrm>
           <a:prstGeom prst="rect">
@@ -3781,8 +3781,8 @@
         </p:nvSpPr>
         <p:spPr>
           <a:xfrm>
-            <a:off x="841248" y="2167128"/>
-            <a:ext cx="10479024" cy="630936"/>
+            <a:off x="841248" y="2121408"/>
+            <a:ext cx="10479024" cy="585216"/>
           </a:xfrm>
           <a:prstGeom prst="rect">
             <a:avLst/>
@@ -3801,7 +3801,7 @@
               <a:buNone/>
             </a:pPr>
             <a:r>
-              <a:rPr lang="en-US" sz="1300" dirty="0">
+              <a:rPr lang="en-US" sz="1250" dirty="0">
                 <a:solidFill>
                   <a:srgbClr val="E8EEF7"/>
                 </a:solidFill>
@@ -3811,7 +3811,7 @@
               </a:rPr>
               <a:t>Confira a fase: o projeto precisa estar aprovado (com carga horária). O ADMIN revisa a tela Transições por perfil.</a:t>
             </a:r>
-            <a:endParaRPr lang="en-US" sz="1300" dirty="0"/>
+            <a:endParaRPr lang="en-US" sz="1250" dirty="0"/>
           </a:p>
         </p:txBody>
       </p:sp>
@@ -3823,12 +3823,12 @@
         </p:nvSpPr>
         <p:spPr>
           <a:xfrm>
-            <a:off x="640080" y="3108960"/>
-            <a:ext cx="10881360" cy="1234440"/>
+            <a:off x="640080" y="3017520"/>
+            <a:ext cx="10881360" cy="1188720"/>
           </a:xfrm>
           <a:prstGeom prst="roundRect">
             <a:avLst>
-              <a:gd name="adj" fmla="val 6667"/>
+              <a:gd name="adj" fmla="val 6923"/>
             </a:avLst>
           </a:prstGeom>
           <a:solidFill>
@@ -3850,7 +3850,7 @@
         </p:nvSpPr>
         <p:spPr>
           <a:xfrm>
-            <a:off x="841248" y="3255264"/>
+            <a:off x="841248" y="3163824"/>
             <a:ext cx="10479024" cy="329184"/>
           </a:xfrm>
           <a:prstGeom prst="rect">
@@ -3889,8 +3889,8 @@
         </p:nvSpPr>
         <p:spPr>
           <a:xfrm>
-            <a:off x="841248" y="3584448"/>
-            <a:ext cx="10479024" cy="630936"/>
+            <a:off x="841248" y="3493008"/>
+            <a:ext cx="10479024" cy="585216"/>
           </a:xfrm>
           <a:prstGeom prst="rect">
             <a:avLst/>
@@ -3909,7 +3909,7 @@
               <a:buNone/>
             </a:pPr>
             <a:r>
-              <a:rPr lang="en-US" sz="1300" dirty="0">
+              <a:rPr lang="en-US" sz="1250" dirty="0">
                 <a:solidFill>
                   <a:srgbClr val="E8EEF7"/>
                 </a:solidFill>
@@ -3919,7 +3919,7 @@
               </a:rPr>
               <a:t>Somente o ADMIN exclui arquivos (botão Excluir na lista, com auditoria).</a:t>
             </a:r>
-            <a:endParaRPr lang="en-US" sz="1300" dirty="0"/>
+            <a:endParaRPr lang="en-US" sz="1250" dirty="0"/>
           </a:p>
         </p:txBody>
       </p:sp>
@@ -3931,12 +3931,12 @@
         </p:nvSpPr>
         <p:spPr>
           <a:xfrm>
-            <a:off x="640080" y="4526280"/>
-            <a:ext cx="10881360" cy="1234440"/>
+            <a:off x="640080" y="4389120"/>
+            <a:ext cx="10881360" cy="1188720"/>
           </a:xfrm>
           <a:prstGeom prst="roundRect">
             <a:avLst>
-              <a:gd name="adj" fmla="val 6667"/>
+              <a:gd name="adj" fmla="val 6923"/>
             </a:avLst>
           </a:prstGeom>
           <a:solidFill>
@@ -3958,7 +3958,7 @@
         </p:nvSpPr>
         <p:spPr>
           <a:xfrm>
-            <a:off x="841248" y="4672584"/>
+            <a:off x="841248" y="4535424"/>
             <a:ext cx="10479024" cy="329184"/>
           </a:xfrm>
           <a:prstGeom prst="rect">
@@ -3997,8 +3997,8 @@
         </p:nvSpPr>
         <p:spPr>
           <a:xfrm>
-            <a:off x="841248" y="5001768"/>
-            <a:ext cx="10479024" cy="630936"/>
+            <a:off x="841248" y="4864608"/>
+            <a:ext cx="10479024" cy="585216"/>
           </a:xfrm>
           <a:prstGeom prst="rect">
             <a:avLst/>
@@ -4017,7 +4017,7 @@
               <a:buNone/>
             </a:pPr>
             <a:r>
-              <a:rPr lang="en-US" sz="1300" dirty="0">
+              <a:rPr lang="en-US" sz="1250" dirty="0">
                 <a:solidFill>
                   <a:srgbClr val="E8EEF7"/>
                 </a:solidFill>
@@ -4027,7 +4027,7 @@
               </a:rPr>
               <a:t>Admin → Notificações mostra a fila (enviado, pendente, erro) e permite reprocessar.</a:t>
             </a:r>
-            <a:endParaRPr lang="en-US" sz="1300" dirty="0"/>
+            <a:endParaRPr lang="en-US" sz="1250" dirty="0"/>
           </a:p>
         </p:txBody>
       </p:sp>
@@ -4039,24 +4039,24 @@
         </p:nvSpPr>
         <p:spPr>
           <a:xfrm>
-            <a:off x="640080" y="5943600"/>
-            <a:ext cx="10058400" cy="365760"/>
-          </a:xfrm>
-          <a:prstGeom prst="rect">
-            <a:avLst/>
-          </a:prstGeom>
-          <a:noFill/>
-          <a:ln/>
-        </p:spPr>
-        <p:txBody>
-          <a:bodyPr wrap="square" lIns="0" tIns="0" rIns="0" bIns="0" rtlCol="0" anchor="ctr"/>
-          <a:lstStyle/>
-          <a:p>
-            <a:pPr indent="0" marL="0">
-              <a:buNone/>
-            </a:pPr>
-            <a:r>
-              <a:rPr lang="en-US" sz="1600" dirty="0">
+            <a:off x="640080" y="5989320"/>
+            <a:ext cx="10058400" cy="347472"/>
+          </a:xfrm>
+          <a:prstGeom prst="rect">
+            <a:avLst/>
+          </a:prstGeom>
+          <a:noFill/>
+          <a:ln/>
+        </p:spPr>
+        <p:txBody>
+          <a:bodyPr wrap="square" lIns="0" tIns="0" rIns="0" bIns="0" rtlCol="0" anchor="ctr"/>
+          <a:lstStyle/>
+          <a:p>
+            <a:pPr indent="0" marL="0">
+              <a:buNone/>
+            </a:pPr>
+            <a:r>
+              <a:rPr lang="en-US" sz="1500" dirty="0">
                 <a:solidFill>
                   <a:srgbClr val="8BAAC8"/>
                 </a:solidFill>
@@ -4070,7 +4070,7 @@
               <a:buNone/>
             </a:pPr>
             <a:r>
-              <a:rPr lang="en-US" sz="1600" b="1" dirty="0">
+              <a:rPr lang="en-US" sz="1500" b="1" dirty="0">
                 <a:solidFill>
                   <a:srgbClr val="22D3EE"/>
                 </a:solidFill>
@@ -4080,7 +4080,7 @@
               </a:rPr>
               <a:t>ti.cecape@scseduca.com.br</a:t>
             </a:r>
-            <a:endParaRPr lang="en-US" sz="1600" dirty="0"/>
+            <a:endParaRPr lang="en-US" sz="1500" dirty="0"/>
           </a:p>
         </p:txBody>
       </p:sp>
@@ -8680,7 +8680,7 @@
         <p:spPr>
           <a:xfrm>
             <a:off x="1097280" y="1737360"/>
-            <a:ext cx="5029200" cy="914400"/>
+            <a:ext cx="5029200" cy="566928"/>
           </a:xfrm>
           <a:prstGeom prst="rect">
             <a:avLst/>
@@ -8746,7 +8746,7 @@
         </p:nvSpPr>
         <p:spPr>
           <a:xfrm>
-            <a:off x="640080" y="2697480"/>
+            <a:off x="640080" y="2350008"/>
             <a:ext cx="310896" cy="310896"/>
           </a:xfrm>
           <a:prstGeom prst="ellipse">
@@ -8766,7 +8766,7 @@
         </p:nvSpPr>
         <p:spPr>
           <a:xfrm>
-            <a:off x="640080" y="2697480"/>
+            <a:off x="640080" y="2350008"/>
             <a:ext cx="310896" cy="310896"/>
           </a:xfrm>
           <a:prstGeom prst="rect">
@@ -8805,8 +8805,8 @@
         </p:nvSpPr>
         <p:spPr>
           <a:xfrm>
-            <a:off x="1097280" y="2651760"/>
-            <a:ext cx="5029200" cy="914400"/>
+            <a:off x="1097280" y="2304288"/>
+            <a:ext cx="5029200" cy="566928"/>
           </a:xfrm>
           <a:prstGeom prst="rect">
             <a:avLst/>
@@ -8872,7 +8872,7 @@
         </p:nvSpPr>
         <p:spPr>
           <a:xfrm>
-            <a:off x="640080" y="3611880"/>
+            <a:off x="640080" y="2916936"/>
             <a:ext cx="310896" cy="310896"/>
           </a:xfrm>
           <a:prstGeom prst="ellipse">
@@ -8892,7 +8892,7 @@
         </p:nvSpPr>
         <p:spPr>
           <a:xfrm>
-            <a:off x="640080" y="3611880"/>
+            <a:off x="640080" y="2916936"/>
             <a:ext cx="310896" cy="310896"/>
           </a:xfrm>
           <a:prstGeom prst="rect">
@@ -8931,8 +8931,8 @@
         </p:nvSpPr>
         <p:spPr>
           <a:xfrm>
-            <a:off x="1097280" y="3566160"/>
-            <a:ext cx="5029200" cy="914400"/>
+            <a:off x="1097280" y="2871216"/>
+            <a:ext cx="5029200" cy="566928"/>
           </a:xfrm>
           <a:prstGeom prst="rect">
             <a:avLst/>
@@ -8970,7 +8970,7 @@
         </p:nvSpPr>
         <p:spPr>
           <a:xfrm>
-            <a:off x="640080" y="4526280"/>
+            <a:off x="640080" y="3483864"/>
             <a:ext cx="310896" cy="310896"/>
           </a:xfrm>
           <a:prstGeom prst="ellipse">
@@ -8990,7 +8990,7 @@
         </p:nvSpPr>
         <p:spPr>
           <a:xfrm>
-            <a:off x="640080" y="4526280"/>
+            <a:off x="640080" y="3483864"/>
             <a:ext cx="310896" cy="310896"/>
           </a:xfrm>
           <a:prstGeom prst="rect">
@@ -9029,8 +9029,8 @@
         </p:nvSpPr>
         <p:spPr>
           <a:xfrm>
-            <a:off x="1097280" y="4480560"/>
-            <a:ext cx="5029200" cy="914400"/>
+            <a:off x="1097280" y="3438144"/>
+            <a:ext cx="5029200" cy="566928"/>
           </a:xfrm>
           <a:prstGeom prst="rect">
             <a:avLst/>
@@ -9096,12 +9096,12 @@
         </p:nvSpPr>
         <p:spPr>
           <a:xfrm>
-            <a:off x="640080" y="5212080"/>
-            <a:ext cx="5486400" cy="1005840"/>
+            <a:off x="6400800" y="1783080"/>
+            <a:ext cx="5212080" cy="2011680"/>
           </a:xfrm>
           <a:prstGeom prst="roundRect">
             <a:avLst>
-              <a:gd name="adj" fmla="val 8182"/>
+              <a:gd name="adj" fmla="val 4091"/>
             </a:avLst>
           </a:prstGeom>
           <a:solidFill>
@@ -9123,8 +9123,8 @@
         </p:nvSpPr>
         <p:spPr>
           <a:xfrm>
-            <a:off x="841248" y="5358384"/>
-            <a:ext cx="5084064" cy="329184"/>
+            <a:off x="6601968" y="1929384"/>
+            <a:ext cx="4809744" cy="329184"/>
           </a:xfrm>
           <a:prstGeom prst="rect">
             <a:avLst/>
@@ -9162,8 +9162,8 @@
         </p:nvSpPr>
         <p:spPr>
           <a:xfrm>
-            <a:off x="841248" y="5687568"/>
-            <a:ext cx="5084064" cy="402336"/>
+            <a:off x="6601968" y="2258568"/>
+            <a:ext cx="4809744" cy="1408176"/>
           </a:xfrm>
           <a:prstGeom prst="rect">
             <a:avLst/>
@@ -9182,7 +9182,7 @@
               <a:buNone/>
             </a:pPr>
             <a:r>
-              <a:rPr lang="en-US" sz="1250" dirty="0">
+              <a:rPr lang="en-US" sz="1300" dirty="0">
                 <a:solidFill>
                   <a:srgbClr val="E8EEF7"/>
                 </a:solidFill>
@@ -9190,9 +9190,9 @@
                 <a:ea typeface="Calibri" pitchFamily="34" charset="-122"/>
                 <a:cs typeface="Calibri" pitchFamily="34" charset="-120"/>
               </a:rPr>
-              <a:t>Registra os apontamentos, muda o status e envia ao formador o e-mail com a lista completa.</a:t>
-            </a:r>
-            <a:endParaRPr lang="en-US" sz="1250" dirty="0"/>
+              <a:t>Registra os apontamentos, muda o status para "Recusado - Ajustes Necessários" e envia ao formador o e-mail com a lista completa.</a:t>
+            </a:r>
+            <a:endParaRPr lang="en-US" sz="1300" dirty="0"/>
           </a:p>
         </p:txBody>
       </p:sp>
@@ -9204,12 +9204,12 @@
         </p:nvSpPr>
         <p:spPr>
           <a:xfrm>
-            <a:off x="6672598" y="1554480"/>
-            <a:ext cx="4759925" cy="4663440"/>
+            <a:off x="3156139" y="4160520"/>
+            <a:ext cx="5940682" cy="2057400"/>
           </a:xfrm>
           <a:prstGeom prst="roundRect">
             <a:avLst>
-              <a:gd name="adj" fmla="val 1765"/>
+              <a:gd name="adj" fmla="val 4000"/>
             </a:avLst>
           </a:prstGeom>
           <a:solidFill>
@@ -9239,8 +9239,8 @@
         </p:blipFill>
         <p:spPr>
           <a:xfrm>
-            <a:off x="6782326" y="1664208"/>
-            <a:ext cx="4540469" cy="4443984"/>
+            <a:off x="3265867" y="4270248"/>
+            <a:ext cx="5721226" cy="1837944"/>
           </a:xfrm>
           <a:prstGeom prst="rect">
             <a:avLst/>
